--- a/lectures-and-labs/week05/mcp-lecture.pptx
+++ b/lectures-and-labs/week05/mcp-lecture.pptx
@@ -5,67 +5,67 @@
     <p:sldMasterId id="2147483648" r:id="rId1"/>
   </p:sldMasterIdLst>
   <p:sldIdLst>
-    <p:sldId id="256" r:id="rId3"/>
-    <p:sldId id="257" r:id="rId2"/>
-    <p:sldId id="258" r:id="rId10"/>
-    <p:sldId id="259" r:id="rId11"/>
-    <p:sldId id="260" r:id="rId12"/>
-    <p:sldId id="261" r:id="rId13"/>
-    <p:sldId id="262" r:id="rId14"/>
-    <p:sldId id="263" r:id="rId15"/>
-    <p:sldId id="264" r:id="rId16"/>
-    <p:sldId id="265" r:id="rId17"/>
-    <p:sldId id="266" r:id="rId18"/>
-    <p:sldId id="267" r:id="rId19"/>
-    <p:sldId id="268" r:id="rId20"/>
-    <p:sldId id="269" r:id="rId21"/>
-    <p:sldId id="270" r:id="rId22"/>
-    <p:sldId id="271" r:id="rId23"/>
-    <p:sldId id="272" r:id="rId24"/>
-    <p:sldId id="273" r:id="rId25"/>
-    <p:sldId id="274" r:id="rId26"/>
-    <p:sldId id="275" r:id="rId27"/>
-    <p:sldId id="276" r:id="rId28"/>
-    <p:sldId id="277" r:id="rId29"/>
-    <p:sldId id="278" r:id="rId30"/>
-    <p:sldId id="279" r:id="rId31"/>
-    <p:sldId id="280" r:id="rId32"/>
-    <p:sldId id="281" r:id="rId33"/>
-    <p:sldId id="282" r:id="rId34"/>
-    <p:sldId id="283" r:id="rId35"/>
-    <p:sldId id="284" r:id="rId36"/>
-    <p:sldId id="285" r:id="rId37"/>
-    <p:sldId id="286" r:id="rId38"/>
-    <p:sldId id="287" r:id="rId39"/>
-    <p:sldId id="288" r:id="rId40"/>
-    <p:sldId id="289" r:id="rId41"/>
-    <p:sldId id="290" r:id="rId42"/>
-    <p:sldId id="291" r:id="rId43"/>
-    <p:sldId id="292" r:id="rId44"/>
-    <p:sldId id="293" r:id="rId45"/>
-    <p:sldId id="294" r:id="rId46"/>
-    <p:sldId id="295" r:id="rId47"/>
-    <p:sldId id="296" r:id="rId48"/>
-    <p:sldId id="297" r:id="rId49"/>
-    <p:sldId id="298" r:id="rId50"/>
-    <p:sldId id="299" r:id="rId51"/>
-    <p:sldId id="300" r:id="rId52"/>
-    <p:sldId id="301" r:id="rId53"/>
-    <p:sldId id="302" r:id="rId54"/>
-    <p:sldId id="303" r:id="rId55"/>
-    <p:sldId id="304" r:id="rId56"/>
-    <p:sldId id="305" r:id="rId57"/>
-    <p:sldId id="306" r:id="rId58"/>
-    <p:sldId id="307" r:id="rId59"/>
-    <p:sldId id="308" r:id="rId60"/>
-    <p:sldId id="309" r:id="rId61"/>
-    <p:sldId id="310" r:id="rId62"/>
-    <p:sldId id="311" r:id="rId63"/>
-    <p:sldId id="312" r:id="rId64"/>
-    <p:sldId id="313" r:id="rId65"/>
-    <p:sldId id="314" r:id="rId66"/>
-    <p:sldId id="315" r:id="rId67"/>
-    <p:sldId id="316" r:id="rId68"/>
+    <p:sldId id="256" r:id="rId2"/>
+    <p:sldId id="257" r:id="rId3"/>
+    <p:sldId id="258" r:id="rId4"/>
+    <p:sldId id="259" r:id="rId5"/>
+    <p:sldId id="260" r:id="rId6"/>
+    <p:sldId id="261" r:id="rId7"/>
+    <p:sldId id="262" r:id="rId8"/>
+    <p:sldId id="263" r:id="rId9"/>
+    <p:sldId id="264" r:id="rId10"/>
+    <p:sldId id="265" r:id="rId11"/>
+    <p:sldId id="266" r:id="rId12"/>
+    <p:sldId id="267" r:id="rId13"/>
+    <p:sldId id="268" r:id="rId14"/>
+    <p:sldId id="269" r:id="rId15"/>
+    <p:sldId id="270" r:id="rId16"/>
+    <p:sldId id="271" r:id="rId17"/>
+    <p:sldId id="272" r:id="rId18"/>
+    <p:sldId id="273" r:id="rId19"/>
+    <p:sldId id="274" r:id="rId20"/>
+    <p:sldId id="275" r:id="rId21"/>
+    <p:sldId id="276" r:id="rId22"/>
+    <p:sldId id="277" r:id="rId23"/>
+    <p:sldId id="278" r:id="rId24"/>
+    <p:sldId id="279" r:id="rId25"/>
+    <p:sldId id="280" r:id="rId26"/>
+    <p:sldId id="281" r:id="rId27"/>
+    <p:sldId id="282" r:id="rId28"/>
+    <p:sldId id="283" r:id="rId29"/>
+    <p:sldId id="284" r:id="rId30"/>
+    <p:sldId id="285" r:id="rId31"/>
+    <p:sldId id="286" r:id="rId32"/>
+    <p:sldId id="287" r:id="rId33"/>
+    <p:sldId id="288" r:id="rId34"/>
+    <p:sldId id="289" r:id="rId35"/>
+    <p:sldId id="290" r:id="rId36"/>
+    <p:sldId id="291" r:id="rId37"/>
+    <p:sldId id="292" r:id="rId38"/>
+    <p:sldId id="293" r:id="rId39"/>
+    <p:sldId id="294" r:id="rId40"/>
+    <p:sldId id="295" r:id="rId41"/>
+    <p:sldId id="296" r:id="rId42"/>
+    <p:sldId id="297" r:id="rId43"/>
+    <p:sldId id="298" r:id="rId44"/>
+    <p:sldId id="299" r:id="rId45"/>
+    <p:sldId id="300" r:id="rId46"/>
+    <p:sldId id="301" r:id="rId47"/>
+    <p:sldId id="302" r:id="rId48"/>
+    <p:sldId id="303" r:id="rId49"/>
+    <p:sldId id="304" r:id="rId50"/>
+    <p:sldId id="305" r:id="rId51"/>
+    <p:sldId id="306" r:id="rId52"/>
+    <p:sldId id="307" r:id="rId53"/>
+    <p:sldId id="308" r:id="rId54"/>
+    <p:sldId id="309" r:id="rId55"/>
+    <p:sldId id="310" r:id="rId56"/>
+    <p:sldId id="311" r:id="rId57"/>
+    <p:sldId id="312" r:id="rId58"/>
+    <p:sldId id="313" r:id="rId59"/>
+    <p:sldId id="314" r:id="rId60"/>
+    <p:sldId id="315" r:id="rId61"/>
+    <p:sldId id="316" r:id="rId62"/>
   </p:sldIdLst>
   <p:sldSz cx="12192000" cy="6858000"/>
   <p:notesSz cx="6858000" cy="9144000"/>
@@ -164,13 +164,18 @@
       </a:defRPr>
     </a:lvl9pPr>
   </p:defaultTextStyle>
+  <p:extLst>
+    <p:ext uri="{EFAFB233-063F-42B5-8137-9DF3F51BA10A}">
+      <p15:sldGuideLst xmlns:p15="http://schemas.microsoft.com/office/powerpoint/2012/main"/>
+    </p:ext>
+  </p:extLst>
 </p:presentation>
 </file>
 
 <file path=ppt/revisionInfo.xml><?xml version="1.0" encoding="utf-8"?>
 <p1510:revInfo xmlns:a="http://schemas.openxmlformats.org/drawingml/2006/main" xmlns:r="http://schemas.openxmlformats.org/officeDocument/2006/relationships" xmlns:p1510="http://schemas.microsoft.com/office/powerpoint/2015/10/main">
   <p1510:revLst>
-    <p1510:client id="{AF643C40-E432-453B-92F5-60AF84F2336E}" v="4" dt="2025-10-09T21:24:32.175"/>
+    <p1510:client id="{F0ACC884-D3BF-4B52-9A54-6CCFFF18D3EC}" v="73" dt="2026-10-09T09:36:53.302"/>
   </p1510:revLst>
 </p1510:revInfo>
 </file>
@@ -178,55 +183,204 @@
 <file path=ppt/changesInfos/changesInfo1.xml><?xml version="1.0" encoding="utf-8"?>
 <pc:chgInfo xmlns:a="http://schemas.openxmlformats.org/drawingml/2006/main" xmlns:r="http://schemas.openxmlformats.org/officeDocument/2006/relationships" xmlns:ac="http://schemas.microsoft.com/office/drawing/2013/main/command" xmlns:pc="http://schemas.microsoft.com/office/powerpoint/2013/main/command">
   <pc:docChgLst>
-    <pc:chgData name="Daniel Cregg" userId="a4417ebc-d1f9-4266-8a6c-2c7f21bbea7f" providerId="ADAL" clId="{AF643C40-E432-453B-92F5-60AF84F2336E}"/>
-    <pc:docChg chg="addSld modSld">
-      <pc:chgData name="Daniel Cregg" userId="a4417ebc-d1f9-4266-8a6c-2c7f21bbea7f" providerId="ADAL" clId="{AF643C40-E432-453B-92F5-60AF84F2336E}" dt="2025-10-09T21:24:34.582" v="83" actId="6549"/>
+    <pc:chgData name="Daniel Cregg" userId="a4417ebc-d1f9-4266-8a6c-2c7f21bbea7f" providerId="ADAL" clId="{B41FF6A5-8EE3-453F-9467-07EDEFDD4E20}"/>
+    <pc:docChg chg="undo custSel modSld">
+      <pc:chgData name="Daniel Cregg" userId="a4417ebc-d1f9-4266-8a6c-2c7f21bbea7f" providerId="ADAL" clId="{B41FF6A5-8EE3-453F-9467-07EDEFDD4E20}" dt="2026-10-09T09:36:53.302" v="131" actId="20577"/>
       <pc:docMkLst>
         <pc:docMk/>
       </pc:docMkLst>
-      <pc:sldChg chg="modSp new mod">
-        <pc:chgData name="Daniel Cregg" userId="a4417ebc-d1f9-4266-8a6c-2c7f21bbea7f" providerId="ADAL" clId="{AF643C40-E432-453B-92F5-60AF84F2336E}" dt="2025-10-09T21:24:11.088" v="47" actId="20577"/>
+      <pc:sldChg chg="addSp delSp modSp mod setBg addAnim delAnim">
+        <pc:chgData name="Daniel Cregg" userId="a4417ebc-d1f9-4266-8a6c-2c7f21bbea7f" providerId="ADAL" clId="{B41FF6A5-8EE3-453F-9467-07EDEFDD4E20}" dt="2026-10-09T09:23:50.521" v="11" actId="113"/>
         <pc:sldMkLst>
           <pc:docMk/>
-          <pc:sldMk cId="3497088910" sldId="256"/>
+          <pc:sldMk cId="0" sldId="256"/>
         </pc:sldMkLst>
         <pc:spChg chg="mod">
-          <ac:chgData name="Daniel Cregg" userId="a4417ebc-d1f9-4266-8a6c-2c7f21bbea7f" providerId="ADAL" clId="{AF643C40-E432-453B-92F5-60AF84F2336E}" dt="2025-10-09T21:24:03.176" v="22" actId="20577"/>
+          <ac:chgData name="Daniel Cregg" userId="a4417ebc-d1f9-4266-8a6c-2c7f21bbea7f" providerId="ADAL" clId="{B41FF6A5-8EE3-453F-9467-07EDEFDD4E20}" dt="2026-10-09T09:23:07.085" v="5" actId="26606"/>
           <ac:spMkLst>
             <pc:docMk/>
-            <pc:sldMk cId="3497088910" sldId="256"/>
-            <ac:spMk id="2" creationId="{F2D37440-44C7-9EA2-81BB-0250D2A15B73}"/>
+            <pc:sldMk cId="0" sldId="256"/>
+            <ac:spMk id="2" creationId="{00000000-0000-0000-0000-000000000000}"/>
           </ac:spMkLst>
         </pc:spChg>
         <pc:spChg chg="mod">
-          <ac:chgData name="Daniel Cregg" userId="a4417ebc-d1f9-4266-8a6c-2c7f21bbea7f" providerId="ADAL" clId="{AF643C40-E432-453B-92F5-60AF84F2336E}" dt="2025-10-09T21:24:11.088" v="47" actId="20577"/>
+          <ac:chgData name="Daniel Cregg" userId="a4417ebc-d1f9-4266-8a6c-2c7f21bbea7f" providerId="ADAL" clId="{B41FF6A5-8EE3-453F-9467-07EDEFDD4E20}" dt="2026-10-09T09:23:50.521" v="11" actId="113"/>
           <ac:spMkLst>
             <pc:docMk/>
-            <pc:sldMk cId="3497088910" sldId="256"/>
-            <ac:spMk id="3" creationId="{4397FD6A-9BDB-EFA7-CAB2-E629A2C9718C}"/>
+            <pc:sldMk cId="0" sldId="256"/>
+            <ac:spMk id="3" creationId="{00000000-0000-0000-0000-000000000000}"/>
+          </ac:spMkLst>
+        </pc:spChg>
+        <pc:spChg chg="add del">
+          <ac:chgData name="Daniel Cregg" userId="a4417ebc-d1f9-4266-8a6c-2c7f21bbea7f" providerId="ADAL" clId="{B41FF6A5-8EE3-453F-9467-07EDEFDD4E20}" dt="2026-10-09T09:23:07.085" v="4" actId="26606"/>
+          <ac:spMkLst>
+            <pc:docMk/>
+            <pc:sldMk cId="0" sldId="256"/>
+            <ac:spMk id="10" creationId="{362D44EE-C852-4460-B8B5-C4F2BC20510C}"/>
+          </ac:spMkLst>
+        </pc:spChg>
+        <pc:spChg chg="add del">
+          <ac:chgData name="Daniel Cregg" userId="a4417ebc-d1f9-4266-8a6c-2c7f21bbea7f" providerId="ADAL" clId="{B41FF6A5-8EE3-453F-9467-07EDEFDD4E20}" dt="2026-10-09T09:23:07.085" v="4" actId="26606"/>
+          <ac:spMkLst>
+            <pc:docMk/>
+            <pc:sldMk cId="0" sldId="256"/>
+            <ac:spMk id="12" creationId="{658970D8-8D1D-4B5C-894B-E871CC86543D}"/>
+          </ac:spMkLst>
+        </pc:spChg>
+        <pc:spChg chg="add del">
+          <ac:chgData name="Daniel Cregg" userId="a4417ebc-d1f9-4266-8a6c-2c7f21bbea7f" providerId="ADAL" clId="{B41FF6A5-8EE3-453F-9467-07EDEFDD4E20}" dt="2026-10-09T09:23:07.085" v="4" actId="26606"/>
+          <ac:spMkLst>
+            <pc:docMk/>
+            <pc:sldMk cId="0" sldId="256"/>
+            <ac:spMk id="14" creationId="{F227E5B6-9132-43CA-B503-37A18562ADF2}"/>
+          </ac:spMkLst>
+        </pc:spChg>
+        <pc:spChg chg="add del">
+          <ac:chgData name="Daniel Cregg" userId="a4417ebc-d1f9-4266-8a6c-2c7f21bbea7f" providerId="ADAL" clId="{B41FF6A5-8EE3-453F-9467-07EDEFDD4E20}" dt="2026-10-09T09:23:07.085" v="4" actId="26606"/>
+          <ac:spMkLst>
+            <pc:docMk/>
+            <pc:sldMk cId="0" sldId="256"/>
+            <ac:spMk id="16" creationId="{03C2051E-A88D-48E5-BACF-AAED17892722}"/>
+          </ac:spMkLst>
+        </pc:spChg>
+        <pc:spChg chg="add del">
+          <ac:chgData name="Daniel Cregg" userId="a4417ebc-d1f9-4266-8a6c-2c7f21bbea7f" providerId="ADAL" clId="{B41FF6A5-8EE3-453F-9467-07EDEFDD4E20}" dt="2026-10-09T09:23:07.085" v="4" actId="26606"/>
+          <ac:spMkLst>
+            <pc:docMk/>
+            <pc:sldMk cId="0" sldId="256"/>
+            <ac:spMk id="18" creationId="{7821A508-2985-4905-874A-527429BAABFA}"/>
+          </ac:spMkLst>
+        </pc:spChg>
+        <pc:spChg chg="add del">
+          <ac:chgData name="Daniel Cregg" userId="a4417ebc-d1f9-4266-8a6c-2c7f21bbea7f" providerId="ADAL" clId="{B41FF6A5-8EE3-453F-9467-07EDEFDD4E20}" dt="2026-10-09T09:23:07.085" v="4" actId="26606"/>
+          <ac:spMkLst>
+            <pc:docMk/>
+            <pc:sldMk cId="0" sldId="256"/>
+            <ac:spMk id="20" creationId="{D2929CB1-0E3C-4B2D-ADC5-0154FB33BA44}"/>
+          </ac:spMkLst>
+        </pc:spChg>
+        <pc:spChg chg="add del">
+          <ac:chgData name="Daniel Cregg" userId="a4417ebc-d1f9-4266-8a6c-2c7f21bbea7f" providerId="ADAL" clId="{B41FF6A5-8EE3-453F-9467-07EDEFDD4E20}" dt="2026-10-09T09:23:07.085" v="4" actId="26606"/>
+          <ac:spMkLst>
+            <pc:docMk/>
+            <pc:sldMk cId="0" sldId="256"/>
+            <ac:spMk id="22" creationId="{5F2F0C84-BE8C-4DC2-A6D3-30349A801D5C}"/>
+          </ac:spMkLst>
+        </pc:spChg>
+        <pc:spChg chg="add">
+          <ac:chgData name="Daniel Cregg" userId="a4417ebc-d1f9-4266-8a6c-2c7f21bbea7f" providerId="ADAL" clId="{B41FF6A5-8EE3-453F-9467-07EDEFDD4E20}" dt="2026-10-09T09:23:07.085" v="5" actId="26606"/>
+          <ac:spMkLst>
+            <pc:docMk/>
+            <pc:sldMk cId="0" sldId="256"/>
+            <ac:spMk id="24" creationId="{8930EBA3-4D2E-42E8-B828-834555328D85}"/>
+          </ac:spMkLst>
+        </pc:spChg>
+        <pc:spChg chg="add">
+          <ac:chgData name="Daniel Cregg" userId="a4417ebc-d1f9-4266-8a6c-2c7f21bbea7f" providerId="ADAL" clId="{B41FF6A5-8EE3-453F-9467-07EDEFDD4E20}" dt="2026-10-09T09:23:07.085" v="5" actId="26606"/>
+          <ac:spMkLst>
+            <pc:docMk/>
+            <pc:sldMk cId="0" sldId="256"/>
+            <ac:spMk id="25" creationId="{E58B2195-5055-402F-A3E7-53FF0E4980C3}"/>
+          </ac:spMkLst>
+        </pc:spChg>
+        <pc:spChg chg="add">
+          <ac:chgData name="Daniel Cregg" userId="a4417ebc-d1f9-4266-8a6c-2c7f21bbea7f" providerId="ADAL" clId="{B41FF6A5-8EE3-453F-9467-07EDEFDD4E20}" dt="2026-10-09T09:23:07.085" v="5" actId="26606"/>
+          <ac:spMkLst>
+            <pc:docMk/>
+            <pc:sldMk cId="0" sldId="256"/>
+            <ac:spMk id="26" creationId="{528AA953-F4F9-4DC5-97C7-491F4AF937DC}"/>
+          </ac:spMkLst>
+        </pc:spChg>
+        <pc:picChg chg="add mod ord">
+          <ac:chgData name="Daniel Cregg" userId="a4417ebc-d1f9-4266-8a6c-2c7f21bbea7f" providerId="ADAL" clId="{B41FF6A5-8EE3-453F-9467-07EDEFDD4E20}" dt="2026-10-09T09:23:07.085" v="5" actId="26606"/>
+          <ac:picMkLst>
+            <pc:docMk/>
+            <pc:sldMk cId="0" sldId="256"/>
+            <ac:picMk id="5" creationId="{8B7E9E48-5467-F920-F6E5-B4EE90FEEE4E}"/>
+          </ac:picMkLst>
+        </pc:picChg>
+      </pc:sldChg>
+      <pc:sldChg chg="addSp delSp modSp mod modAnim">
+        <pc:chgData name="Daniel Cregg" userId="a4417ebc-d1f9-4266-8a6c-2c7f21bbea7f" providerId="ADAL" clId="{B41FF6A5-8EE3-453F-9467-07EDEFDD4E20}" dt="2026-10-09T09:26:16.580" v="64" actId="14100"/>
+        <pc:sldMkLst>
+          <pc:docMk/>
+          <pc:sldMk cId="0" sldId="257"/>
+        </pc:sldMkLst>
+        <pc:spChg chg="mod">
+          <ac:chgData name="Daniel Cregg" userId="a4417ebc-d1f9-4266-8a6c-2c7f21bbea7f" providerId="ADAL" clId="{B41FF6A5-8EE3-453F-9467-07EDEFDD4E20}" dt="2026-10-09T09:26:07.288" v="63" actId="27636"/>
+          <ac:spMkLst>
+            <pc:docMk/>
+            <pc:sldMk cId="0" sldId="257"/>
+            <ac:spMk id="3" creationId="{00000000-0000-0000-0000-000000000000}"/>
+          </ac:spMkLst>
+        </pc:spChg>
+        <pc:grpChg chg="del">
+          <ac:chgData name="Daniel Cregg" userId="a4417ebc-d1f9-4266-8a6c-2c7f21bbea7f" providerId="ADAL" clId="{B41FF6A5-8EE3-453F-9467-07EDEFDD4E20}" dt="2026-10-09T09:25:15.582" v="12" actId="478"/>
+          <ac:grpSpMkLst>
+            <pc:docMk/>
+            <pc:sldMk cId="0" sldId="257"/>
+            <ac:grpSpMk id="5" creationId="{00000000-0000-0000-0000-000000000000}"/>
+          </ac:grpSpMkLst>
+        </pc:grpChg>
+        <pc:picChg chg="add mod">
+          <ac:chgData name="Daniel Cregg" userId="a4417ebc-d1f9-4266-8a6c-2c7f21bbea7f" providerId="ADAL" clId="{B41FF6A5-8EE3-453F-9467-07EDEFDD4E20}" dt="2026-10-09T09:26:16.580" v="64" actId="14100"/>
+          <ac:picMkLst>
+            <pc:docMk/>
+            <pc:sldMk cId="0" sldId="257"/>
+            <ac:picMk id="25" creationId="{2F33774A-EFFB-EA6A-D2D0-7C537E636528}"/>
+          </ac:picMkLst>
+        </pc:picChg>
+      </pc:sldChg>
+      <pc:sldChg chg="modSp mod modAnim">
+        <pc:chgData name="Daniel Cregg" userId="a4417ebc-d1f9-4266-8a6c-2c7f21bbea7f" providerId="ADAL" clId="{B41FF6A5-8EE3-453F-9467-07EDEFDD4E20}" dt="2026-10-09T09:35:36.270" v="130" actId="27636"/>
+        <pc:sldMkLst>
+          <pc:docMk/>
+          <pc:sldMk cId="0" sldId="258"/>
+        </pc:sldMkLst>
+        <pc:spChg chg="mod">
+          <ac:chgData name="Daniel Cregg" userId="a4417ebc-d1f9-4266-8a6c-2c7f21bbea7f" providerId="ADAL" clId="{B41FF6A5-8EE3-453F-9467-07EDEFDD4E20}" dt="2026-10-09T09:33:57.890" v="106" actId="5793"/>
+          <ac:spMkLst>
+            <pc:docMk/>
+            <pc:sldMk cId="0" sldId="258"/>
+            <ac:spMk id="2" creationId="{00000000-0000-0000-0000-000000000000}"/>
+          </ac:spMkLst>
+        </pc:spChg>
+        <pc:spChg chg="mod">
+          <ac:chgData name="Daniel Cregg" userId="a4417ebc-d1f9-4266-8a6c-2c7f21bbea7f" providerId="ADAL" clId="{B41FF6A5-8EE3-453F-9467-07EDEFDD4E20}" dt="2026-10-09T09:35:36.270" v="130" actId="27636"/>
+          <ac:spMkLst>
+            <pc:docMk/>
+            <pc:sldMk cId="0" sldId="258"/>
+            <ac:spMk id="3" creationId="{00000000-0000-0000-0000-000000000000}"/>
           </ac:spMkLst>
         </pc:spChg>
       </pc:sldChg>
-      <pc:sldChg chg="modSp new mod">
-        <pc:chgData name="Daniel Cregg" userId="a4417ebc-d1f9-4266-8a6c-2c7f21bbea7f" providerId="ADAL" clId="{AF643C40-E432-453B-92F5-60AF84F2336E}" dt="2025-10-09T21:24:34.582" v="83" actId="6549"/>
+      <pc:sldChg chg="modSp">
+        <pc:chgData name="Daniel Cregg" userId="a4417ebc-d1f9-4266-8a6c-2c7f21bbea7f" providerId="ADAL" clId="{B41FF6A5-8EE3-453F-9467-07EDEFDD4E20}" dt="2026-10-09T09:34:51.716" v="128" actId="313"/>
         <pc:sldMkLst>
           <pc:docMk/>
-          <pc:sldMk cId="1135524420" sldId="257"/>
+          <pc:sldMk cId="0" sldId="261"/>
         </pc:sldMkLst>
         <pc:spChg chg="mod">
-          <ac:chgData name="Daniel Cregg" userId="a4417ebc-d1f9-4266-8a6c-2c7f21bbea7f" providerId="ADAL" clId="{AF643C40-E432-453B-92F5-60AF84F2336E}" dt="2025-10-09T21:24:19.752" v="60" actId="20577"/>
+          <ac:chgData name="Daniel Cregg" userId="a4417ebc-d1f9-4266-8a6c-2c7f21bbea7f" providerId="ADAL" clId="{B41FF6A5-8EE3-453F-9467-07EDEFDD4E20}" dt="2026-10-09T09:34:51.716" v="128" actId="313"/>
           <ac:spMkLst>
             <pc:docMk/>
-            <pc:sldMk cId="1135524420" sldId="257"/>
-            <ac:spMk id="2" creationId="{C30C990F-C0FF-6121-03C7-FCDD7E7BBDBB}"/>
+            <pc:sldMk cId="0" sldId="261"/>
+            <ac:spMk id="3" creationId="{00000000-0000-0000-0000-000000000000}"/>
           </ac:spMkLst>
         </pc:spChg>
+      </pc:sldChg>
+      <pc:sldChg chg="modSp modAnim">
+        <pc:chgData name="Daniel Cregg" userId="a4417ebc-d1f9-4266-8a6c-2c7f21bbea7f" providerId="ADAL" clId="{B41FF6A5-8EE3-453F-9467-07EDEFDD4E20}" dt="2026-10-09T09:36:53.302" v="131" actId="20577"/>
+        <pc:sldMkLst>
+          <pc:docMk/>
+          <pc:sldMk cId="0" sldId="263"/>
+        </pc:sldMkLst>
         <pc:spChg chg="mod">
-          <ac:chgData name="Daniel Cregg" userId="a4417ebc-d1f9-4266-8a6c-2c7f21bbea7f" providerId="ADAL" clId="{AF643C40-E432-453B-92F5-60AF84F2336E}" dt="2025-10-09T21:24:34.582" v="83" actId="6549"/>
+          <ac:chgData name="Daniel Cregg" userId="a4417ebc-d1f9-4266-8a6c-2c7f21bbea7f" providerId="ADAL" clId="{B41FF6A5-8EE3-453F-9467-07EDEFDD4E20}" dt="2026-10-09T09:36:53.302" v="131" actId="20577"/>
           <ac:spMkLst>
             <pc:docMk/>
-            <pc:sldMk cId="1135524420" sldId="257"/>
-            <ac:spMk id="3" creationId="{5C7784A8-CFDD-8862-CFCD-414464AEBDF5}"/>
+            <pc:sldMk cId="0" sldId="263"/>
+            <ac:spMk id="3" creationId="{00000000-0000-0000-0000-000000000000}"/>
           </ac:spMkLst>
         </pc:spChg>
       </pc:sldChg>
@@ -384,7 +538,7 @@
           <a:p>
             <a:fld id="{44A5CEE2-6E65-48D0-90B9-EB2BBC28F974}" type="datetimeFigureOut">
               <a:rPr lang="en-IE" smtClean="0"/>
-              <a:t>09/10/2025</a:t>
+              <a:t>09/10/2026</a:t>
             </a:fld>
             <a:endParaRPr lang="en-IE"/>
           </a:p>
@@ -584,7 +738,7 @@
           <a:p>
             <a:fld id="{44A5CEE2-6E65-48D0-90B9-EB2BBC28F974}" type="datetimeFigureOut">
               <a:rPr lang="en-IE" smtClean="0"/>
-              <a:t>09/10/2025</a:t>
+              <a:t>09/10/2026</a:t>
             </a:fld>
             <a:endParaRPr lang="en-IE"/>
           </a:p>
@@ -794,7 +948,7 @@
           <a:p>
             <a:fld id="{44A5CEE2-6E65-48D0-90B9-EB2BBC28F974}" type="datetimeFigureOut">
               <a:rPr lang="en-IE" smtClean="0"/>
-              <a:t>09/10/2025</a:t>
+              <a:t>09/10/2026</a:t>
             </a:fld>
             <a:endParaRPr lang="en-IE"/>
           </a:p>
@@ -994,7 +1148,7 @@
           <a:p>
             <a:fld id="{44A5CEE2-6E65-48D0-90B9-EB2BBC28F974}" type="datetimeFigureOut">
               <a:rPr lang="en-IE" smtClean="0"/>
-              <a:t>09/10/2025</a:t>
+              <a:t>09/10/2026</a:t>
             </a:fld>
             <a:endParaRPr lang="en-IE"/>
           </a:p>
@@ -1270,7 +1424,7 @@
           <a:p>
             <a:fld id="{44A5CEE2-6E65-48D0-90B9-EB2BBC28F974}" type="datetimeFigureOut">
               <a:rPr lang="en-IE" smtClean="0"/>
-              <a:t>09/10/2025</a:t>
+              <a:t>09/10/2026</a:t>
             </a:fld>
             <a:endParaRPr lang="en-IE"/>
           </a:p>
@@ -1538,7 +1692,7 @@
           <a:p>
             <a:fld id="{44A5CEE2-6E65-48D0-90B9-EB2BBC28F974}" type="datetimeFigureOut">
               <a:rPr lang="en-IE" smtClean="0"/>
-              <a:t>09/10/2025</a:t>
+              <a:t>09/10/2026</a:t>
             </a:fld>
             <a:endParaRPr lang="en-IE"/>
           </a:p>
@@ -1953,7 +2107,7 @@
           <a:p>
             <a:fld id="{44A5CEE2-6E65-48D0-90B9-EB2BBC28F974}" type="datetimeFigureOut">
               <a:rPr lang="en-IE" smtClean="0"/>
-              <a:t>09/10/2025</a:t>
+              <a:t>09/10/2026</a:t>
             </a:fld>
             <a:endParaRPr lang="en-IE"/>
           </a:p>
@@ -2095,7 +2249,7 @@
           <a:p>
             <a:fld id="{44A5CEE2-6E65-48D0-90B9-EB2BBC28F974}" type="datetimeFigureOut">
               <a:rPr lang="en-IE" smtClean="0"/>
-              <a:t>09/10/2025</a:t>
+              <a:t>09/10/2026</a:t>
             </a:fld>
             <a:endParaRPr lang="en-IE"/>
           </a:p>
@@ -2208,7 +2362,7 @@
           <a:p>
             <a:fld id="{44A5CEE2-6E65-48D0-90B9-EB2BBC28F974}" type="datetimeFigureOut">
               <a:rPr lang="en-IE" smtClean="0"/>
-              <a:t>09/10/2025</a:t>
+              <a:t>09/10/2026</a:t>
             </a:fld>
             <a:endParaRPr lang="en-IE"/>
           </a:p>
@@ -2521,7 +2675,7 @@
           <a:p>
             <a:fld id="{44A5CEE2-6E65-48D0-90B9-EB2BBC28F974}" type="datetimeFigureOut">
               <a:rPr lang="en-IE" smtClean="0"/>
-              <a:t>09/10/2025</a:t>
+              <a:t>09/10/2026</a:t>
             </a:fld>
             <a:endParaRPr lang="en-IE"/>
           </a:p>
@@ -2810,7 +2964,7 @@
           <a:p>
             <a:fld id="{44A5CEE2-6E65-48D0-90B9-EB2BBC28F974}" type="datetimeFigureOut">
               <a:rPr lang="en-IE" smtClean="0"/>
-              <a:t>09/10/2025</a:t>
+              <a:t>09/10/2026</a:t>
             </a:fld>
             <a:endParaRPr lang="en-IE"/>
           </a:p>
@@ -3053,7 +3207,7 @@
           <a:p>
             <a:fld id="{44A5CEE2-6E65-48D0-90B9-EB2BBC28F974}" type="datetimeFigureOut">
               <a:rPr lang="en-IE" smtClean="0"/>
-              <a:t>09/10/2025</a:t>
+              <a:t>09/10/2026</a:t>
             </a:fld>
             <a:endParaRPr lang="en-IE"/>
           </a:p>
@@ -3454,15 +3608,358 @@
 </file>
 
 <file path=ppt/slides/slide1.xml><?xml version="1.0" encoding="utf-8"?>
-<p:sld xmlns:a="http://schemas.openxmlformats.org/drawingml/2006/main" xmlns:p="http://schemas.openxmlformats.org/presentationml/2006/main" xmlns:r="http://schemas.openxmlformats.org/officeDocument/2006/relationships">
+<p:sld xmlns:a="http://schemas.openxmlformats.org/drawingml/2006/main" xmlns:r="http://schemas.openxmlformats.org/officeDocument/2006/relationships" xmlns:p="http://schemas.openxmlformats.org/presentationml/2006/main">
   <p:cSld>
+    <p:bg>
+      <p:bgPr>
+        <a:solidFill>
+          <a:schemeClr val="bg1"/>
+        </a:solidFill>
+        <a:effectLst/>
+      </p:bgPr>
+    </p:bg>
     <p:spTree>
       <p:nvGrpSpPr>
         <p:cNvPr id="1" name=""/>
         <p:cNvGrpSpPr/>
         <p:nvPr/>
       </p:nvGrpSpPr>
-      <p:grpSpPr/>
+      <p:grpSpPr>
+        <a:xfrm>
+          <a:off x="0" y="0"/>
+          <a:ext cx="0" cy="0"/>
+          <a:chOff x="0" y="0"/>
+          <a:chExt cx="0" cy="0"/>
+        </a:xfrm>
+      </p:grpSpPr>
+      <p:sp useBgFill="1">
+        <p:nvSpPr>
+          <p:cNvPr id="24" name="Rectangle 23">
+            <a:extLst>
+              <a:ext uri="{FF2B5EF4-FFF2-40B4-BE49-F238E27FC236}">
+                <a16:creationId xmlns:a16="http://schemas.microsoft.com/office/drawing/2014/main" id="{8930EBA3-4D2E-42E8-B828-834555328D85}"/>
+              </a:ext>
+              <a:ext uri="{C183D7F6-B498-43B3-948B-1728B52AA6E4}">
+                <adec:decorative xmlns:adec="http://schemas.microsoft.com/office/drawing/2017/decorative" val="1"/>
+              </a:ext>
+            </a:extLst>
+          </p:cNvPr>
+          <p:cNvSpPr>
+            <a:spLocks noGrp="1" noRot="1" noChangeAspect="1" noMove="1" noResize="1" noEditPoints="1" noAdjustHandles="1" noChangeArrowheads="1" noChangeShapeType="1" noTextEdit="1"/>
+          </p:cNvSpPr>
+          <p:nvPr>
+            <p:extLst>
+              <p:ext uri="{386F3935-93C4-4BCD-93E2-E3B085C9AB24}">
+                <p16:designElem xmlns:p16="http://schemas.microsoft.com/office/powerpoint/2015/main" val="1"/>
+              </p:ext>
+            </p:extLst>
+          </p:nvPr>
+        </p:nvSpPr>
+        <p:spPr bwMode="white">
+          <a:xfrm>
+            <a:off x="0" y="0"/>
+            <a:ext cx="12192000" cy="6858000"/>
+          </a:xfrm>
+          <a:prstGeom prst="rect">
+            <a:avLst/>
+          </a:prstGeom>
+          <a:ln>
+            <a:noFill/>
+          </a:ln>
+        </p:spPr>
+        <p:style>
+          <a:lnRef idx="2">
+            <a:schemeClr val="accent1">
+              <a:shade val="50000"/>
+            </a:schemeClr>
+          </a:lnRef>
+          <a:fillRef idx="1">
+            <a:schemeClr val="accent1"/>
+          </a:fillRef>
+          <a:effectRef idx="0">
+            <a:schemeClr val="accent1"/>
+          </a:effectRef>
+          <a:fontRef idx="minor">
+            <a:schemeClr val="lt1"/>
+          </a:fontRef>
+        </p:style>
+        <p:txBody>
+          <a:bodyPr rtlCol="0" anchor="ctr"/>
+          <a:lstStyle>
+            <a:defPPr>
+              <a:defRPr lang="en-US"/>
+            </a:defPPr>
+            <a:lvl1pPr marL="0" algn="l" defTabSz="914400" rtl="0" eaLnBrk="1" latinLnBrk="0" hangingPunct="1">
+              <a:defRPr sz="1800" kern="1200">
+                <a:solidFill>
+                  <a:schemeClr val="lt1"/>
+                </a:solidFill>
+                <a:latin typeface="+mn-lt"/>
+                <a:ea typeface="+mn-ea"/>
+                <a:cs typeface="+mn-cs"/>
+              </a:defRPr>
+            </a:lvl1pPr>
+            <a:lvl2pPr marL="457200" algn="l" defTabSz="914400" rtl="0" eaLnBrk="1" latinLnBrk="0" hangingPunct="1">
+              <a:defRPr sz="1800" kern="1200">
+                <a:solidFill>
+                  <a:schemeClr val="lt1"/>
+                </a:solidFill>
+                <a:latin typeface="+mn-lt"/>
+                <a:ea typeface="+mn-ea"/>
+                <a:cs typeface="+mn-cs"/>
+              </a:defRPr>
+            </a:lvl2pPr>
+            <a:lvl3pPr marL="914400" algn="l" defTabSz="914400" rtl="0" eaLnBrk="1" latinLnBrk="0" hangingPunct="1">
+              <a:defRPr sz="1800" kern="1200">
+                <a:solidFill>
+                  <a:schemeClr val="lt1"/>
+                </a:solidFill>
+                <a:latin typeface="+mn-lt"/>
+                <a:ea typeface="+mn-ea"/>
+                <a:cs typeface="+mn-cs"/>
+              </a:defRPr>
+            </a:lvl3pPr>
+            <a:lvl4pPr marL="1371600" algn="l" defTabSz="914400" rtl="0" eaLnBrk="1" latinLnBrk="0" hangingPunct="1">
+              <a:defRPr sz="1800" kern="1200">
+                <a:solidFill>
+                  <a:schemeClr val="lt1"/>
+                </a:solidFill>
+                <a:latin typeface="+mn-lt"/>
+                <a:ea typeface="+mn-ea"/>
+                <a:cs typeface="+mn-cs"/>
+              </a:defRPr>
+            </a:lvl4pPr>
+            <a:lvl5pPr marL="1828800" algn="l" defTabSz="914400" rtl="0" eaLnBrk="1" latinLnBrk="0" hangingPunct="1">
+              <a:defRPr sz="1800" kern="1200">
+                <a:solidFill>
+                  <a:schemeClr val="lt1"/>
+                </a:solidFill>
+                <a:latin typeface="+mn-lt"/>
+                <a:ea typeface="+mn-ea"/>
+                <a:cs typeface="+mn-cs"/>
+              </a:defRPr>
+            </a:lvl5pPr>
+            <a:lvl6pPr marL="2286000" algn="l" defTabSz="914400" rtl="0" eaLnBrk="1" latinLnBrk="0" hangingPunct="1">
+              <a:defRPr sz="1800" kern="1200">
+                <a:solidFill>
+                  <a:schemeClr val="lt1"/>
+                </a:solidFill>
+                <a:latin typeface="+mn-lt"/>
+                <a:ea typeface="+mn-ea"/>
+                <a:cs typeface="+mn-cs"/>
+              </a:defRPr>
+            </a:lvl6pPr>
+            <a:lvl7pPr marL="2743200" algn="l" defTabSz="914400" rtl="0" eaLnBrk="1" latinLnBrk="0" hangingPunct="1">
+              <a:defRPr sz="1800" kern="1200">
+                <a:solidFill>
+                  <a:schemeClr val="lt1"/>
+                </a:solidFill>
+                <a:latin typeface="+mn-lt"/>
+                <a:ea typeface="+mn-ea"/>
+                <a:cs typeface="+mn-cs"/>
+              </a:defRPr>
+            </a:lvl7pPr>
+            <a:lvl8pPr marL="3200400" algn="l" defTabSz="914400" rtl="0" eaLnBrk="1" latinLnBrk="0" hangingPunct="1">
+              <a:defRPr sz="1800" kern="1200">
+                <a:solidFill>
+                  <a:schemeClr val="lt1"/>
+                </a:solidFill>
+                <a:latin typeface="+mn-lt"/>
+                <a:ea typeface="+mn-ea"/>
+                <a:cs typeface="+mn-cs"/>
+              </a:defRPr>
+            </a:lvl8pPr>
+            <a:lvl9pPr marL="3657600" algn="l" defTabSz="914400" rtl="0" eaLnBrk="1" latinLnBrk="0" hangingPunct="1">
+              <a:defRPr sz="1800" kern="1200">
+                <a:solidFill>
+                  <a:schemeClr val="lt1"/>
+                </a:solidFill>
+                <a:latin typeface="+mn-lt"/>
+                <a:ea typeface="+mn-ea"/>
+                <a:cs typeface="+mn-cs"/>
+              </a:defRPr>
+            </a:lvl9pPr>
+          </a:lstStyle>
+          <a:p>
+            <a:pPr algn="ctr"/>
+            <a:endParaRPr lang="en-US"/>
+          </a:p>
+        </p:txBody>
+      </p:sp>
+      <p:pic>
+        <p:nvPicPr>
+          <p:cNvPr id="5" name="Picture 2" descr="undefined">
+            <a:extLst>
+              <a:ext uri="{FF2B5EF4-FFF2-40B4-BE49-F238E27FC236}">
+                <a16:creationId xmlns:a16="http://schemas.microsoft.com/office/drawing/2014/main" id="{8B7E9E48-5467-F920-F6E5-B4EE90FEEE4E}"/>
+              </a:ext>
+            </a:extLst>
+          </p:cNvPr>
+          <p:cNvPicPr>
+            <a:picLocks noChangeAspect="1" noChangeArrowheads="1"/>
+          </p:cNvPicPr>
+          <p:nvPr/>
+        </p:nvPicPr>
+        <p:blipFill>
+          <a:blip r:embed="rId2">
+            <a:extLst>
+              <a:ext uri="{28A0092B-C50C-407E-A947-70E740481C1C}">
+                <a14:useLocalDpi xmlns:a14="http://schemas.microsoft.com/office/drawing/2010/main" val="0"/>
+              </a:ext>
+            </a:extLst>
+          </a:blip>
+          <a:stretch>
+            <a:fillRect/>
+          </a:stretch>
+        </p:blipFill>
+        <p:spPr bwMode="auto">
+          <a:xfrm>
+            <a:off x="0" y="503808"/>
+            <a:ext cx="5850384" cy="5850384"/>
+          </a:xfrm>
+          <a:custGeom>
+            <a:avLst/>
+            <a:gdLst/>
+            <a:ahLst/>
+            <a:cxnLst/>
+            <a:rect l="l" t="t" r="r" b="b"/>
+            <a:pathLst>
+              <a:path w="6094252" h="6857998">
+                <a:moveTo>
+                  <a:pt x="0" y="0"/>
+                </a:moveTo>
+                <a:lnTo>
+                  <a:pt x="5898122" y="0"/>
+                </a:lnTo>
+                <a:cubicBezTo>
+                  <a:pt x="6006442" y="0"/>
+                  <a:pt x="6094252" y="87810"/>
+                  <a:pt x="6094252" y="196130"/>
+                </a:cubicBezTo>
+                <a:lnTo>
+                  <a:pt x="6094252" y="6661869"/>
+                </a:lnTo>
+                <a:cubicBezTo>
+                  <a:pt x="6094252" y="6756649"/>
+                  <a:pt x="6027023" y="6835726"/>
+                  <a:pt x="5937649" y="6854015"/>
+                </a:cubicBezTo>
+                <a:lnTo>
+                  <a:pt x="5898132" y="6857998"/>
+                </a:lnTo>
+                <a:lnTo>
+                  <a:pt x="0" y="6857998"/>
+                </a:lnTo>
+                <a:close/>
+              </a:path>
+            </a:pathLst>
+          </a:custGeom>
+          <a:noFill/>
+          <a:extLst>
+            <a:ext uri="{909E8E84-426E-40DD-AFC4-6F175D3DCCD1}">
+              <a14:hiddenFill xmlns:a14="http://schemas.microsoft.com/office/drawing/2010/main">
+                <a:solidFill>
+                  <a:srgbClr val="FFFFFF"/>
+                </a:solidFill>
+              </a14:hiddenFill>
+            </a:ext>
+          </a:extLst>
+        </p:spPr>
+      </p:pic>
+      <p:sp>
+        <p:nvSpPr>
+          <p:cNvPr id="25" name="Arc 24">
+            <a:extLst>
+              <a:ext uri="{FF2B5EF4-FFF2-40B4-BE49-F238E27FC236}">
+                <a16:creationId xmlns:a16="http://schemas.microsoft.com/office/drawing/2014/main" id="{E58B2195-5055-402F-A3E7-53FF0E4980C3}"/>
+              </a:ext>
+              <a:ext uri="{C183D7F6-B498-43B3-948B-1728B52AA6E4}">
+                <adec:decorative xmlns:adec="http://schemas.microsoft.com/office/drawing/2017/decorative" val="1"/>
+              </a:ext>
+            </a:extLst>
+          </p:cNvPr>
+          <p:cNvSpPr>
+            <a:spLocks noGrp="1" noRot="1" noChangeAspect="1" noMove="1" noResize="1" noEditPoints="1" noAdjustHandles="1" noChangeArrowheads="1" noChangeShapeType="1" noTextEdit="1"/>
+          </p:cNvSpPr>
+          <p:nvPr>
+            <p:extLst>
+              <p:ext uri="{386F3935-93C4-4BCD-93E2-E3B085C9AB24}">
+                <p16:designElem xmlns:p16="http://schemas.microsoft.com/office/powerpoint/2015/main" val="1"/>
+              </p:ext>
+            </p:extLst>
+          </p:nvPr>
+        </p:nvSpPr>
+        <p:spPr>
+          <a:xfrm>
+            <a:off x="8525836" y="775849"/>
+            <a:ext cx="2987899" cy="2987899"/>
+          </a:xfrm>
+          <a:prstGeom prst="arc">
+            <a:avLst>
+              <a:gd name="adj1" fmla="val 14441841"/>
+              <a:gd name="adj2" fmla="val 0"/>
+            </a:avLst>
+          </a:prstGeom>
+          <a:ln w="127000" cap="rnd">
+            <a:solidFill>
+              <a:schemeClr val="accent4"/>
+            </a:solidFill>
+            <a:prstDash val="dash"/>
+            <a:miter lim="800000"/>
+          </a:ln>
+        </p:spPr>
+        <p:style>
+          <a:lnRef idx="1">
+            <a:schemeClr val="accent1"/>
+          </a:lnRef>
+          <a:fillRef idx="0">
+            <a:schemeClr val="accent1"/>
+          </a:fillRef>
+          <a:effectRef idx="0">
+            <a:schemeClr val="accent1"/>
+          </a:effectRef>
+          <a:fontRef idx="minor">
+            <a:schemeClr val="tx1"/>
+          </a:fontRef>
+        </p:style>
+        <p:txBody>
+          <a:bodyPr rtlCol="0" anchor="ctr"/>
+          <a:lstStyle/>
+          <a:p>
+            <a:pPr marL="0" marR="0" lvl="0" indent="0" algn="ctr" defTabSz="914400" rtl="0" eaLnBrk="1" fontAlgn="auto" latinLnBrk="0" hangingPunct="1">
+              <a:lnSpc>
+                <a:spcPct val="100000"/>
+              </a:lnSpc>
+              <a:spcBef>
+                <a:spcPts val="0"/>
+              </a:spcBef>
+              <a:spcAft>
+                <a:spcPts val="0"/>
+              </a:spcAft>
+              <a:buClrTx/>
+              <a:buSzTx/>
+              <a:buFontTx/>
+              <a:buNone/>
+              <a:tabLst/>
+              <a:defRPr/>
+            </a:pPr>
+            <a:endParaRPr kumimoji="0" lang="en-US" sz="1800" b="0" i="0" u="none" strike="noStrike" kern="1200" cap="none" spc="0" normalizeH="0" baseline="0" noProof="0">
+              <a:ln>
+                <a:noFill/>
+              </a:ln>
+              <a:solidFill>
+                <a:srgbClr val="000000"/>
+              </a:solidFill>
+              <a:effectLst/>
+              <a:uLnTx/>
+              <a:uFillTx/>
+              <a:latin typeface="Calibri" panose="020F0502020204030204"/>
+              <a:ea typeface="+mn-ea"/>
+              <a:cs typeface="+mn-cs"/>
+            </a:endParaRPr>
+          </a:p>
+        </p:txBody>
+      </p:sp>
       <p:sp>
         <p:nvSpPr>
           <p:cNvPr id="2" name="Title 1"/>
@@ -3473,7 +3970,12 @@
             <p:ph type="ctrTitle"/>
           </p:nvPr>
         </p:nvSpPr>
-        <p:spPr/>
+        <p:spPr>
+          <a:xfrm>
+            <a:off x="6417732" y="957715"/>
+            <a:ext cx="5130798" cy="2750419"/>
+          </a:xfrm>
+        </p:spPr>
         <p:txBody>
           <a:bodyPr>
             <a:normAutofit/>
@@ -3483,6 +3985,98 @@
             <a:r>
               <a:t>MCP</a:t>
             </a:r>
+          </a:p>
+        </p:txBody>
+      </p:sp>
+      <p:sp>
+        <p:nvSpPr>
+          <p:cNvPr id="26" name="Oval 25">
+            <a:extLst>
+              <a:ext uri="{FF2B5EF4-FFF2-40B4-BE49-F238E27FC236}">
+                <a16:creationId xmlns:a16="http://schemas.microsoft.com/office/drawing/2014/main" id="{528AA953-F4F9-4DC5-97C7-491F4AF937DC}"/>
+              </a:ext>
+              <a:ext uri="{C183D7F6-B498-43B3-948B-1728B52AA6E4}">
+                <adec:decorative xmlns:adec="http://schemas.microsoft.com/office/drawing/2017/decorative" val="1"/>
+              </a:ext>
+            </a:extLst>
+          </p:cNvPr>
+          <p:cNvSpPr>
+            <a:spLocks noGrp="1" noRot="1" noChangeAspect="1" noMove="1" noResize="1" noEditPoints="1" noAdjustHandles="1" noChangeArrowheads="1" noChangeShapeType="1" noTextEdit="1"/>
+          </p:cNvSpPr>
+          <p:nvPr>
+            <p:extLst>
+              <p:ext uri="{386F3935-93C4-4BCD-93E2-E3B085C9AB24}">
+                <p16:designElem xmlns:p16="http://schemas.microsoft.com/office/powerpoint/2015/main" val="1"/>
+              </p:ext>
+            </p:extLst>
+          </p:nvPr>
+        </p:nvSpPr>
+        <p:spPr>
+          <a:xfrm>
+            <a:off x="11097079" y="5607717"/>
+            <a:ext cx="513442" cy="499514"/>
+          </a:xfrm>
+          <a:prstGeom prst="ellipse">
+            <a:avLst/>
+          </a:prstGeom>
+          <a:solidFill>
+            <a:schemeClr val="accent5"/>
+          </a:solidFill>
+          <a:ln>
+            <a:noFill/>
+          </a:ln>
+        </p:spPr>
+        <p:style>
+          <a:lnRef idx="2">
+            <a:schemeClr val="accent1">
+              <a:shade val="50000"/>
+            </a:schemeClr>
+          </a:lnRef>
+          <a:fillRef idx="1">
+            <a:schemeClr val="accent1"/>
+          </a:fillRef>
+          <a:effectRef idx="0">
+            <a:schemeClr val="accent1"/>
+          </a:effectRef>
+          <a:fontRef idx="minor">
+            <a:schemeClr val="lt1"/>
+          </a:fontRef>
+        </p:style>
+        <p:txBody>
+          <a:bodyPr rtlCol="0" anchor="ctr"/>
+          <a:lstStyle/>
+          <a:p>
+            <a:pPr marL="0" marR="0" lvl="0" indent="0" algn="ctr" defTabSz="914400" rtl="0" eaLnBrk="1" fontAlgn="auto" latinLnBrk="0" hangingPunct="1">
+              <a:lnSpc>
+                <a:spcPct val="100000"/>
+              </a:lnSpc>
+              <a:spcBef>
+                <a:spcPts val="0"/>
+              </a:spcBef>
+              <a:spcAft>
+                <a:spcPts val="0"/>
+              </a:spcAft>
+              <a:buClrTx/>
+              <a:buSzTx/>
+              <a:buFontTx/>
+              <a:buNone/>
+              <a:tabLst/>
+              <a:defRPr/>
+            </a:pPr>
+            <a:endParaRPr kumimoji="0" lang="en-US" sz="1800" b="0" i="0" u="none" strike="noStrike" kern="1200" cap="none" spc="0" normalizeH="0" baseline="0" noProof="0">
+              <a:ln>
+                <a:noFill/>
+              </a:ln>
+              <a:solidFill>
+                <a:srgbClr val="FFFFFF"/>
+              </a:solidFill>
+              <a:effectLst/>
+              <a:uLnTx/>
+              <a:uFillTx/>
+              <a:latin typeface="Calibri" panose="020F0502020204030204"/>
+              <a:ea typeface="+mn-ea"/>
+              <a:cs typeface="+mn-cs"/>
+            </a:endParaRPr>
           </a:p>
         </p:txBody>
       </p:sp>
@@ -3496,13 +4090,41 @@
             <p:ph type="subTitle" idx="1"/>
           </p:nvPr>
         </p:nvSpPr>
-        <p:spPr/>
+        <p:spPr>
+          <a:xfrm>
+            <a:off x="7284717" y="3800209"/>
+            <a:ext cx="3396828" cy="1432191"/>
+          </a:xfrm>
+        </p:spPr>
         <p:txBody>
-          <a:bodyPr/>
+          <a:bodyPr>
+            <a:normAutofit/>
+          </a:bodyPr>
           <a:lstStyle/>
           <a:p>
             <a:r>
-              <a:t>Model Context Protocol: one standard way to connect AI to your tools and data</a:t>
+              <a:rPr b="1" dirty="0"/>
+              <a:t>M</a:t>
+            </a:r>
+            <a:r>
+              <a:rPr dirty="0"/>
+              <a:t>odel </a:t>
+            </a:r>
+            <a:r>
+              <a:rPr b="1" dirty="0"/>
+              <a:t>C</a:t>
+            </a:r>
+            <a:r>
+              <a:rPr dirty="0"/>
+              <a:t>ontext </a:t>
+            </a:r>
+            <a:r>
+              <a:rPr b="1" dirty="0"/>
+              <a:t>P</a:t>
+            </a:r>
+            <a:r>
+              <a:rPr dirty="0"/>
+              <a:t>rotocol: one standard way to connect AI to your tools and data</a:t>
             </a:r>
           </a:p>
         </p:txBody>
@@ -3516,7 +4138,7 @@
 </file>
 
 <file path=ppt/slides/slide10.xml><?xml version="1.0" encoding="utf-8"?>
-<p:sld xmlns:a="http://schemas.openxmlformats.org/drawingml/2006/main" xmlns:p="http://schemas.openxmlformats.org/presentationml/2006/main" xmlns:r="http://schemas.openxmlformats.org/officeDocument/2006/relationships">
+<p:sld xmlns:a="http://schemas.openxmlformats.org/drawingml/2006/main" xmlns:r="http://schemas.openxmlformats.org/officeDocument/2006/relationships" xmlns:p="http://schemas.openxmlformats.org/presentationml/2006/main">
   <p:cSld>
     <p:spTree>
       <p:nvGrpSpPr>
@@ -3524,7 +4146,14 @@
         <p:cNvGrpSpPr/>
         <p:nvPr/>
       </p:nvGrpSpPr>
-      <p:grpSpPr/>
+      <p:grpSpPr>
+        <a:xfrm>
+          <a:off x="0" y="0"/>
+          <a:ext cx="0" cy="0"/>
+          <a:chOff x="0" y="0"/>
+          <a:chExt cx="0" cy="0"/>
+        </a:xfrm>
+      </p:grpSpPr>
       <p:sp>
         <p:nvSpPr>
           <p:cNvPr id="2" name="Title 1"/>
@@ -3606,7 +4235,7 @@
             </a:fontRef>
           </p:style>
           <p:txBody>
-            <a:bodyPr rtlCol="0" anchor="t" wrap="square">
+            <a:bodyPr wrap="square" rtlCol="0" anchor="t">
               <a:noAutofit/>
             </a:bodyPr>
             <a:lstStyle/>
@@ -3664,7 +4293,7 @@
             </a:fontRef>
           </p:style>
           <p:txBody>
-            <a:bodyPr rtlCol="0" anchor="ctr" wrap="square">
+            <a:bodyPr wrap="square" rtlCol="0" anchor="ctr">
               <a:noAutofit/>
             </a:bodyPr>
             <a:lstStyle/>
@@ -3725,7 +4354,7 @@
             </a:fontRef>
           </p:style>
           <p:txBody>
-            <a:bodyPr rtlCol="0" anchor="ctr" wrap="square">
+            <a:bodyPr wrap="square" rtlCol="0" anchor="ctr">
               <a:noAutofit/>
             </a:bodyPr>
             <a:lstStyle/>
@@ -3796,7 +4425,7 @@
             </a:fontRef>
           </p:style>
           <p:txBody>
-            <a:bodyPr rtlCol="0" anchor="ctr" wrap="square">
+            <a:bodyPr wrap="square" rtlCol="0" anchor="ctr">
               <a:noAutofit/>
             </a:bodyPr>
             <a:lstStyle/>
@@ -3876,7 +4505,7 @@
             </a:solidFill>
           </p:spPr>
           <p:txBody>
-            <a:bodyPr wrap="square" anchor="ctr" lIns="27432" rIns="27432" tIns="0" bIns="0">
+            <a:bodyPr wrap="square" lIns="27432" tIns="0" rIns="27432" bIns="0" anchor="ctr">
               <a:noAutofit/>
             </a:bodyPr>
             <a:lstStyle/>
@@ -3975,7 +4604,7 @@
             </a:fontRef>
           </p:style>
           <p:txBody>
-            <a:bodyPr rtlCol="0" anchor="ctr" wrap="square">
+            <a:bodyPr wrap="square" rtlCol="0" anchor="ctr">
               <a:noAutofit/>
             </a:bodyPr>
             <a:lstStyle/>
@@ -4036,7 +4665,7 @@
             </a:fontRef>
           </p:style>
           <p:txBody>
-            <a:bodyPr rtlCol="0" anchor="ctr" wrap="square">
+            <a:bodyPr wrap="square" rtlCol="0" anchor="ctr">
               <a:noAutofit/>
             </a:bodyPr>
             <a:lstStyle/>
@@ -4107,7 +4736,7 @@
             </a:fontRef>
           </p:style>
           <p:txBody>
-            <a:bodyPr rtlCol="0" anchor="ctr" wrap="square">
+            <a:bodyPr wrap="square" rtlCol="0" anchor="ctr">
               <a:noAutofit/>
             </a:bodyPr>
             <a:lstStyle/>
@@ -4187,7 +4816,7 @@
             </a:solidFill>
           </p:spPr>
           <p:txBody>
-            <a:bodyPr wrap="square" anchor="ctr" lIns="27432" rIns="27432" tIns="0" bIns="0">
+            <a:bodyPr wrap="square" lIns="27432" tIns="0" rIns="27432" bIns="0" anchor="ctr">
               <a:noAutofit/>
             </a:bodyPr>
             <a:lstStyle/>
@@ -4286,7 +4915,7 @@
             </a:fontRef>
           </p:style>
           <p:txBody>
-            <a:bodyPr rtlCol="0" anchor="ctr" wrap="square">
+            <a:bodyPr wrap="square" rtlCol="0" anchor="ctr">
               <a:noAutofit/>
             </a:bodyPr>
             <a:lstStyle/>
@@ -4347,7 +4976,7 @@
             </a:fontRef>
           </p:style>
           <p:txBody>
-            <a:bodyPr rtlCol="0" anchor="ctr" wrap="square">
+            <a:bodyPr wrap="square" rtlCol="0" anchor="ctr">
               <a:noAutofit/>
             </a:bodyPr>
             <a:lstStyle/>
@@ -4418,7 +5047,7 @@
             </a:fontRef>
           </p:style>
           <p:txBody>
-            <a:bodyPr rtlCol="0" anchor="ctr" wrap="square">
+            <a:bodyPr wrap="square" rtlCol="0" anchor="ctr">
               <a:noAutofit/>
             </a:bodyPr>
             <a:lstStyle/>
@@ -4498,7 +5127,7 @@
             </a:solidFill>
           </p:spPr>
           <p:txBody>
-            <a:bodyPr wrap="square" anchor="ctr" lIns="27432" rIns="27432" tIns="0" bIns="0">
+            <a:bodyPr wrap="square" lIns="27432" tIns="0" rIns="27432" bIns="0" anchor="ctr">
               <a:noAutofit/>
             </a:bodyPr>
             <a:lstStyle/>
@@ -4579,7 +5208,6 @@
           </a:bodyPr>
           <a:lstStyle/>
           <a:p>
-            <a:pPr/>
             <a:r>
               <a:t>A local server usually serves one client; a remote server serves many</a:t>
             </a:r>
@@ -4677,7 +5305,7 @@
 </file>
 
 <file path=ppt/slides/slide11.xml><?xml version="1.0" encoding="utf-8"?>
-<p:sld xmlns:a="http://schemas.openxmlformats.org/drawingml/2006/main" xmlns:p="http://schemas.openxmlformats.org/presentationml/2006/main" xmlns:r="http://schemas.openxmlformats.org/officeDocument/2006/relationships">
+<p:sld xmlns:a="http://schemas.openxmlformats.org/drawingml/2006/main" xmlns:r="http://schemas.openxmlformats.org/officeDocument/2006/relationships" xmlns:p="http://schemas.openxmlformats.org/presentationml/2006/main">
   <p:cSld>
     <p:spTree>
       <p:nvGrpSpPr>
@@ -4685,7 +5313,14 @@
         <p:cNvGrpSpPr/>
         <p:nvPr/>
       </p:nvGrpSpPr>
-      <p:grpSpPr/>
+      <p:grpSpPr>
+        <a:xfrm>
+          <a:off x="0" y="0"/>
+          <a:ext cx="0" cy="0"/>
+          <a:chOff x="0" y="0"/>
+          <a:chExt cx="0" cy="0"/>
+        </a:xfrm>
+      </p:grpSpPr>
       <p:sp>
         <p:nvSpPr>
           <p:cNvPr id="2" name="Title 1"/>
@@ -4767,7 +5402,7 @@
             </a:fontRef>
           </p:style>
           <p:txBody>
-            <a:bodyPr rtlCol="0" anchor="ctr" wrap="square">
+            <a:bodyPr wrap="square" rtlCol="0" anchor="ctr">
               <a:noAutofit/>
             </a:bodyPr>
             <a:lstStyle/>
@@ -4836,7 +5471,7 @@
             </a:fontRef>
           </p:style>
           <p:txBody>
-            <a:bodyPr rtlCol="0" anchor="ctr" wrap="square">
+            <a:bodyPr wrap="square" rtlCol="0" anchor="ctr">
               <a:noAutofit/>
             </a:bodyPr>
             <a:lstStyle/>
@@ -4908,7 +5543,7 @@
             </a:fontRef>
           </p:style>
           <p:txBody>
-            <a:bodyPr rtlCol="0" anchor="ctr" wrap="square">
+            <a:bodyPr wrap="square" rtlCol="0" anchor="ctr">
               <a:noAutofit/>
             </a:bodyPr>
             <a:lstStyle/>
@@ -4990,7 +5625,7 @@
             <a:noFill/>
           </p:spPr>
           <p:txBody>
-            <a:bodyPr wrap="square" anchor="b" lIns="27432" rIns="27432" tIns="0" bIns="0">
+            <a:bodyPr wrap="square" lIns="27432" tIns="0" rIns="27432" bIns="0" anchor="b">
               <a:noAutofit/>
             </a:bodyPr>
             <a:lstStyle/>
@@ -5062,7 +5697,7 @@
             <a:noFill/>
           </p:spPr>
           <p:txBody>
-            <a:bodyPr wrap="square" anchor="t" lIns="27432" rIns="27432" tIns="0" bIns="0">
+            <a:bodyPr wrap="square" lIns="27432" tIns="0" rIns="27432" bIns="0" anchor="t">
               <a:noAutofit/>
             </a:bodyPr>
             <a:lstStyle/>
@@ -5133,7 +5768,7 @@
             <a:noFill/>
           </p:spPr>
           <p:txBody>
-            <a:bodyPr wrap="square" anchor="b" lIns="27432" rIns="27432" tIns="0" bIns="0">
+            <a:bodyPr wrap="square" lIns="27432" tIns="0" rIns="27432" bIns="0" anchor="b">
               <a:noAutofit/>
             </a:bodyPr>
             <a:lstStyle/>
@@ -5205,7 +5840,7 @@
             <a:noFill/>
           </p:spPr>
           <p:txBody>
-            <a:bodyPr wrap="square" anchor="t" lIns="27432" rIns="27432" tIns="0" bIns="0">
+            <a:bodyPr wrap="square" lIns="27432" tIns="0" rIns="27432" bIns="0" anchor="t">
               <a:noAutofit/>
             </a:bodyPr>
             <a:lstStyle/>
@@ -5245,13 +5880,11 @@
           </a:bodyPr>
           <a:lstStyle/>
           <a:p>
-            <a:pPr/>
             <a:r>
               <a:t>The client turns what the model wants into a protocol message</a:t>
             </a:r>
           </a:p>
           <a:p>
-            <a:pPr/>
             <a:r>
               <a:t>The server speaks MCP on one side and the system's own API on the other</a:t>
             </a:r>
@@ -5398,7 +6031,7 @@
 </file>
 
 <file path=ppt/slides/slide12.xml><?xml version="1.0" encoding="utf-8"?>
-<p:sld xmlns:a="http://schemas.openxmlformats.org/drawingml/2006/main" xmlns:p="http://schemas.openxmlformats.org/presentationml/2006/main" xmlns:r="http://schemas.openxmlformats.org/officeDocument/2006/relationships">
+<p:sld xmlns:a="http://schemas.openxmlformats.org/drawingml/2006/main" xmlns:r="http://schemas.openxmlformats.org/officeDocument/2006/relationships" xmlns:p="http://schemas.openxmlformats.org/presentationml/2006/main">
   <p:cSld>
     <p:spTree>
       <p:nvGrpSpPr>
@@ -5406,7 +6039,14 @@
         <p:cNvGrpSpPr/>
         <p:nvPr/>
       </p:nvGrpSpPr>
-      <p:grpSpPr/>
+      <p:grpSpPr>
+        <a:xfrm>
+          <a:off x="0" y="0"/>
+          <a:ext cx="0" cy="0"/>
+          <a:chOff x="0" y="0"/>
+          <a:chExt cx="0" cy="0"/>
+        </a:xfrm>
+      </p:grpSpPr>
       <p:sp>
         <p:nvSpPr>
           <p:cNvPr id="2" name="Title 1"/>
@@ -5460,25 +6100,21 @@
             </a:r>
           </a:p>
           <a:p>
-            <a:pPr/>
             <a:r>
               <a:t>The model runs the function itself</a:t>
             </a:r>
           </a:p>
           <a:p>
-            <a:pPr/>
             <a:r>
               <a:t>The model writes a request, and the client has the server run it</a:t>
             </a:r>
           </a:p>
           <a:p>
-            <a:pPr/>
             <a:r>
               <a:t>The server pushes the answer straight into the model</a:t>
             </a:r>
           </a:p>
           <a:p>
-            <a:pPr/>
             <a:r>
               <a:t>The model looks the weather up in its training data</a:t>
             </a:r>
@@ -5723,7 +6359,7 @@
 </file>
 
 <file path=ppt/slides/slide13.xml><?xml version="1.0" encoding="utf-8"?>
-<p:sld xmlns:a="http://schemas.openxmlformats.org/drawingml/2006/main" xmlns:p="http://schemas.openxmlformats.org/presentationml/2006/main" xmlns:r="http://schemas.openxmlformats.org/officeDocument/2006/relationships">
+<p:sld xmlns:a="http://schemas.openxmlformats.org/drawingml/2006/main" xmlns:r="http://schemas.openxmlformats.org/officeDocument/2006/relationships" xmlns:p="http://schemas.openxmlformats.org/presentationml/2006/main">
   <p:cSld>
     <p:spTree>
       <p:nvGrpSpPr>
@@ -5731,7 +6367,14 @@
         <p:cNvGrpSpPr/>
         <p:nvPr/>
       </p:nvGrpSpPr>
-      <p:grpSpPr/>
+      <p:grpSpPr>
+        <a:xfrm>
+          <a:off x="0" y="0"/>
+          <a:ext cx="0" cy="0"/>
+          <a:chOff x="0" y="0"/>
+          <a:chExt cx="0" cy="0"/>
+        </a:xfrm>
+      </p:grpSpPr>
       <p:sp>
         <p:nvSpPr>
           <p:cNvPr id="2" name="Title 1"/>
@@ -5973,7 +6616,7 @@
             </a:fontRef>
           </p:style>
           <p:txBody>
-            <a:bodyPr rtlCol="0" anchor="ctr" wrap="square">
+            <a:bodyPr wrap="square" rtlCol="0" anchor="ctr">
               <a:noAutofit/>
             </a:bodyPr>
             <a:lstStyle/>
@@ -6034,7 +6677,7 @@
             </a:fontRef>
           </p:style>
           <p:txBody>
-            <a:bodyPr rtlCol="0" anchor="ctr" wrap="square">
+            <a:bodyPr wrap="square" rtlCol="0" anchor="ctr">
               <a:noAutofit/>
             </a:bodyPr>
             <a:lstStyle/>
@@ -6106,7 +6749,7 @@
             </a:fontRef>
           </p:style>
           <p:txBody>
-            <a:bodyPr rtlCol="0" anchor="ctr" wrap="square">
+            <a:bodyPr wrap="square" rtlCol="0" anchor="ctr">
               <a:noAutofit/>
             </a:bodyPr>
             <a:lstStyle/>
@@ -6178,7 +6821,7 @@
             </a:fontRef>
           </p:style>
           <p:txBody>
-            <a:bodyPr rtlCol="0" anchor="ctr" wrap="square">
+            <a:bodyPr wrap="square" rtlCol="0" anchor="ctr">
               <a:noAutofit/>
             </a:bodyPr>
             <a:lstStyle/>
@@ -6227,7 +6870,7 @@
             <a:noFill/>
           </p:spPr>
           <p:txBody>
-            <a:bodyPr wrap="square" anchor="b" lIns="27432" rIns="27432" tIns="0" bIns="0">
+            <a:bodyPr wrap="square" lIns="27432" tIns="0" rIns="27432" bIns="0" anchor="b">
               <a:noAutofit/>
             </a:bodyPr>
             <a:lstStyle/>
@@ -6313,7 +6956,7 @@
             <a:noFill/>
           </p:spPr>
           <p:txBody>
-            <a:bodyPr wrap="square" anchor="b" lIns="27432" rIns="27432" tIns="0" bIns="0">
+            <a:bodyPr wrap="square" lIns="27432" tIns="0" rIns="27432" bIns="0" anchor="b">
               <a:noAutofit/>
             </a:bodyPr>
             <a:lstStyle/>
@@ -6399,7 +7042,7 @@
             <a:noFill/>
           </p:spPr>
           <p:txBody>
-            <a:bodyPr wrap="square" anchor="b" lIns="27432" rIns="27432" tIns="0" bIns="0">
+            <a:bodyPr wrap="square" lIns="27432" tIns="0" rIns="27432" bIns="0" anchor="b">
               <a:noAutofit/>
             </a:bodyPr>
             <a:lstStyle/>
@@ -6518,7 +7161,7 @@
             </a:fontRef>
           </p:style>
           <p:txBody>
-            <a:bodyPr rtlCol="0" anchor="ctr" wrap="square">
+            <a:bodyPr wrap="square" rtlCol="0" anchor="ctr">
               <a:noAutofit/>
             </a:bodyPr>
             <a:lstStyle/>
@@ -6567,7 +7210,7 @@
             <a:noFill/>
           </p:spPr>
           <p:txBody>
-            <a:bodyPr wrap="square" anchor="b" lIns="27432" rIns="27432" tIns="0" bIns="0">
+            <a:bodyPr wrap="square" lIns="27432" tIns="0" rIns="27432" bIns="0" anchor="b">
               <a:noAutofit/>
             </a:bodyPr>
             <a:lstStyle/>
@@ -6654,7 +7297,7 @@
             <a:noFill/>
           </p:spPr>
           <p:txBody>
-            <a:bodyPr wrap="square" anchor="b" lIns="27432" rIns="27432" tIns="0" bIns="0">
+            <a:bodyPr wrap="square" lIns="27432" tIns="0" rIns="27432" bIns="0" anchor="b">
               <a:noAutofit/>
             </a:bodyPr>
             <a:lstStyle/>
@@ -6741,7 +7384,7 @@
             <a:noFill/>
           </p:spPr>
           <p:txBody>
-            <a:bodyPr wrap="square" anchor="b" lIns="27432" rIns="27432" tIns="0" bIns="0">
+            <a:bodyPr wrap="square" lIns="27432" tIns="0" rIns="27432" bIns="0" anchor="b">
               <a:noAutofit/>
             </a:bodyPr>
             <a:lstStyle/>
@@ -6819,7 +7462,6 @@
           </a:bodyPr>
           <a:lstStyle/>
           <a:p>
-            <a:pPr/>
             <a:r>
               <a:rPr b="1"/>
               <a:t>The model never executes anything:</a:t>
@@ -6856,7 +7498,7 @@
                             </p:stCondLst>
                             <p:childTnLst>
                               <p:par>
-                                <p:cTn id="5" presetID="1" presetClass="entr" presetSubtype="0" fill="hold" grpId="0" nodeType="clickEffect">
+                                <p:cTn id="5" presetID="1" presetClass="entr" presetSubtype="0" fill="hold" nodeType="clickEffect">
                                   <p:stCondLst>
                                     <p:cond delay="0"/>
                                   </p:stCondLst>
@@ -6901,7 +7543,7 @@
                             </p:stCondLst>
                             <p:childTnLst>
                               <p:par>
-                                <p:cTn id="9" presetID="1" presetClass="entr" presetSubtype="0" fill="hold" grpId="0" nodeType="clickEffect">
+                                <p:cTn id="9" presetID="1" presetClass="entr" presetSubtype="0" fill="hold" nodeType="clickEffect">
                                   <p:stCondLst>
                                     <p:cond delay="0"/>
                                   </p:stCondLst>
@@ -6946,7 +7588,7 @@
                             </p:stCondLst>
                             <p:childTnLst>
                               <p:par>
-                                <p:cTn id="13" presetID="1" presetClass="entr" presetSubtype="0" fill="hold" grpId="0" nodeType="clickEffect">
+                                <p:cTn id="13" presetID="1" presetClass="entr" presetSubtype="0" fill="hold" nodeType="clickEffect">
                                   <p:stCondLst>
                                     <p:cond delay="0"/>
                                   </p:stCondLst>
@@ -6991,7 +7633,7 @@
                             </p:stCondLst>
                             <p:childTnLst>
                               <p:par>
-                                <p:cTn id="17" presetID="1" presetClass="entr" presetSubtype="0" fill="hold" grpId="0" nodeType="clickEffect">
+                                <p:cTn id="17" presetID="1" presetClass="entr" presetSubtype="0" fill="hold" nodeType="clickEffect">
                                   <p:stCondLst>
                                     <p:cond delay="0"/>
                                   </p:stCondLst>
@@ -7036,7 +7678,7 @@
                             </p:stCondLst>
                             <p:childTnLst>
                               <p:par>
-                                <p:cTn id="21" presetID="1" presetClass="entr" presetSubtype="0" fill="hold" grpId="0" nodeType="clickEffect">
+                                <p:cTn id="21" presetID="1" presetClass="entr" presetSubtype="0" fill="hold" nodeType="clickEffect">
                                   <p:stCondLst>
                                     <p:cond delay="0"/>
                                   </p:stCondLst>
@@ -7081,7 +7723,7 @@
                             </p:stCondLst>
                             <p:childTnLst>
                               <p:par>
-                                <p:cTn id="25" presetID="1" presetClass="entr" presetSubtype="0" fill="hold" grpId="0" nodeType="clickEffect">
+                                <p:cTn id="25" presetID="1" presetClass="entr" presetSubtype="0" fill="hold" nodeType="clickEffect">
                                   <p:stCondLst>
                                     <p:cond delay="0"/>
                                   </p:stCondLst>
@@ -7126,7 +7768,7 @@
                             </p:stCondLst>
                             <p:childTnLst>
                               <p:par>
-                                <p:cTn id="29" presetID="1" presetClass="entr" presetSubtype="0" fill="hold" grpId="0" nodeType="clickEffect">
+                                <p:cTn id="29" presetID="1" presetClass="entr" presetSubtype="0" fill="hold" nodeType="clickEffect">
                                   <p:stCondLst>
                                     <p:cond delay="0"/>
                                   </p:stCondLst>
@@ -7236,7 +7878,7 @@
 </file>
 
 <file path=ppt/slides/slide14.xml><?xml version="1.0" encoding="utf-8"?>
-<p:sld xmlns:a="http://schemas.openxmlformats.org/drawingml/2006/main" xmlns:p="http://schemas.openxmlformats.org/presentationml/2006/main" xmlns:r="http://schemas.openxmlformats.org/officeDocument/2006/relationships">
+<p:sld xmlns:a="http://schemas.openxmlformats.org/drawingml/2006/main" xmlns:r="http://schemas.openxmlformats.org/officeDocument/2006/relationships" xmlns:p="http://schemas.openxmlformats.org/presentationml/2006/main">
   <p:cSld>
     <p:spTree>
       <p:nvGrpSpPr>
@@ -7244,7 +7886,14 @@
         <p:cNvGrpSpPr/>
         <p:nvPr/>
       </p:nvGrpSpPr>
-      <p:grpSpPr/>
+      <p:grpSpPr>
+        <a:xfrm>
+          <a:off x="0" y="0"/>
+          <a:ext cx="0" cy="0"/>
+          <a:chOff x="0" y="0"/>
+          <a:chExt cx="0" cy="0"/>
+        </a:xfrm>
+      </p:grpSpPr>
       <p:sp>
         <p:nvSpPr>
           <p:cNvPr id="2" name="Title 1"/>
@@ -7323,7 +7972,7 @@
             </a:fontRef>
           </p:style>
           <p:txBody>
-            <a:bodyPr rtlCol="0" anchor="ctr" wrap="square">
+            <a:bodyPr wrap="square" rtlCol="0" anchor="ctr">
               <a:noAutofit/>
             </a:bodyPr>
             <a:lstStyle/>
@@ -7403,7 +8052,7 @@
             </a:fontRef>
           </p:style>
           <p:txBody>
-            <a:bodyPr rtlCol="0" anchor="ctr" wrap="square">
+            <a:bodyPr wrap="square" rtlCol="0" anchor="ctr">
               <a:noAutofit/>
             </a:bodyPr>
             <a:lstStyle/>
@@ -7483,7 +8132,7 @@
             </a:fontRef>
           </p:style>
           <p:txBody>
-            <a:bodyPr rtlCol="0" anchor="ctr" wrap="square">
+            <a:bodyPr wrap="square" rtlCol="0" anchor="ctr">
               <a:noAutofit/>
             </a:bodyPr>
             <a:lstStyle/>
@@ -7563,7 +8212,7 @@
             </a:fontRef>
           </p:style>
           <p:txBody>
-            <a:bodyPr rtlCol="0" anchor="ctr" wrap="square">
+            <a:bodyPr wrap="square" rtlCol="0" anchor="ctr">
               <a:noAutofit/>
             </a:bodyPr>
             <a:lstStyle/>
@@ -7717,7 +8366,6 @@
           </a:bodyPr>
           <a:lstStyle/>
           <a:p>
-            <a:pPr/>
             <a:r>
               <a:t>These are the </a:t>
             </a:r>
@@ -7822,7 +8470,7 @@
 </file>
 
 <file path=ppt/slides/slide15.xml><?xml version="1.0" encoding="utf-8"?>
-<p:sld xmlns:a="http://schemas.openxmlformats.org/drawingml/2006/main" xmlns:p="http://schemas.openxmlformats.org/presentationml/2006/main" xmlns:r="http://schemas.openxmlformats.org/officeDocument/2006/relationships">
+<p:sld xmlns:a="http://schemas.openxmlformats.org/drawingml/2006/main" xmlns:r="http://schemas.openxmlformats.org/officeDocument/2006/relationships" xmlns:p="http://schemas.openxmlformats.org/presentationml/2006/main">
   <p:cSld>
     <p:spTree>
       <p:nvGrpSpPr>
@@ -7830,7 +8478,14 @@
         <p:cNvGrpSpPr/>
         <p:nvPr/>
       </p:nvGrpSpPr>
-      <p:grpSpPr/>
+      <p:grpSpPr>
+        <a:xfrm>
+          <a:off x="0" y="0"/>
+          <a:ext cx="0" cy="0"/>
+          <a:chOff x="0" y="0"/>
+          <a:chExt cx="0" cy="0"/>
+        </a:xfrm>
+      </p:grpSpPr>
       <p:sp>
         <p:nvSpPr>
           <p:cNvPr id="2" name="Title 1"/>
@@ -7888,25 +8543,21 @@
             </a:r>
           </a:p>
           <a:p>
-            <a:pPr/>
             <a:r>
               <a:t>A document or a source file</a:t>
             </a:r>
           </a:p>
           <a:p>
-            <a:pPr/>
             <a:r>
               <a:t>A database record, or the database's schema</a:t>
             </a:r>
           </a:p>
           <a:p>
-            <a:pPr/>
             <a:r>
               <a:t>A JSON response from an API</a:t>
             </a:r>
           </a:p>
           <a:p>
-            <a:pPr/>
             <a:r>
               <a:t>Each one has an address, such as </a:t>
             </a:r>
@@ -7918,7 +8569,6 @@
             </a:r>
           </a:p>
           <a:p>
-            <a:pPr/>
             <a:r>
               <a:t>Example: reading a CSV file into the conversation as context</a:t>
             </a:r>
@@ -8212,7 +8862,7 @@
 </file>
 
 <file path=ppt/slides/slide16.xml><?xml version="1.0" encoding="utf-8"?>
-<p:sld xmlns:a="http://schemas.openxmlformats.org/drawingml/2006/main" xmlns:p="http://schemas.openxmlformats.org/presentationml/2006/main" xmlns:r="http://schemas.openxmlformats.org/officeDocument/2006/relationships">
+<p:sld xmlns:a="http://schemas.openxmlformats.org/drawingml/2006/main" xmlns:r="http://schemas.openxmlformats.org/officeDocument/2006/relationships" xmlns:p="http://schemas.openxmlformats.org/presentationml/2006/main">
   <p:cSld>
     <p:spTree>
       <p:nvGrpSpPr>
@@ -8220,7 +8870,14 @@
         <p:cNvGrpSpPr/>
         <p:nvPr/>
       </p:nvGrpSpPr>
-      <p:grpSpPr/>
+      <p:grpSpPr>
+        <a:xfrm>
+          <a:off x="0" y="0"/>
+          <a:ext cx="0" cy="0"/>
+          <a:chOff x="0" y="0"/>
+          <a:chExt cx="0" cy="0"/>
+        </a:xfrm>
+      </p:grpSpPr>
       <p:sp>
         <p:nvSpPr>
           <p:cNvPr id="2" name="Title 1"/>
@@ -8278,25 +8935,21 @@
             </a:r>
           </a:p>
           <a:p>
-            <a:pPr/>
             <a:r>
               <a:t>Run code or a script</a:t>
             </a:r>
           </a:p>
           <a:p>
-            <a:pPr/>
             <a:r>
               <a:t>Send an email</a:t>
             </a:r>
           </a:p>
           <a:p>
-            <a:pPr/>
             <a:r>
               <a:t>Query or update a database</a:t>
             </a:r>
           </a:p>
           <a:p>
-            <a:pPr/>
             <a:r>
               <a:t>Tools are </a:t>
             </a:r>
@@ -8309,7 +8962,6 @@
             </a:r>
           </a:p>
           <a:p>
-            <a:pPr/>
             <a:r>
               <a:t>Example: </a:t>
             </a:r>
@@ -8636,7 +9288,7 @@
 </file>
 
 <file path=ppt/slides/slide17.xml><?xml version="1.0" encoding="utf-8"?>
-<p:sld xmlns:a="http://schemas.openxmlformats.org/drawingml/2006/main" xmlns:p="http://schemas.openxmlformats.org/presentationml/2006/main" xmlns:r="http://schemas.openxmlformats.org/officeDocument/2006/relationships">
+<p:sld xmlns:a="http://schemas.openxmlformats.org/drawingml/2006/main" xmlns:r="http://schemas.openxmlformats.org/officeDocument/2006/relationships" xmlns:p="http://schemas.openxmlformats.org/presentationml/2006/main">
   <p:cSld>
     <p:spTree>
       <p:nvGrpSpPr>
@@ -8644,7 +9296,14 @@
         <p:cNvGrpSpPr/>
         <p:nvPr/>
       </p:nvGrpSpPr>
-      <p:grpSpPr/>
+      <p:grpSpPr>
+        <a:xfrm>
+          <a:off x="0" y="0"/>
+          <a:ext cx="0" cy="0"/>
+          <a:chOff x="0" y="0"/>
+          <a:chExt cx="0" cy="0"/>
+        </a:xfrm>
+      </p:grpSpPr>
       <p:sp>
         <p:nvSpPr>
           <p:cNvPr id="2" name="Title 1"/>
@@ -8702,25 +9361,21 @@
             </a:r>
           </a:p>
           <a:p>
-            <a:pPr/>
             <a:r>
               <a:t>A template with blanks for you to fill in</a:t>
             </a:r>
           </a:p>
           <a:p>
-            <a:pPr/>
             <a:r>
               <a:t>The user chooses one; hosts often show them as slash commands</a:t>
             </a:r>
           </a:p>
           <a:p>
-            <a:pPr/>
             <a:r>
               <a:t>They make a common task repeatable</a:t>
             </a:r>
           </a:p>
           <a:p>
-            <a:pPr/>
             <a:r>
               <a:t>Example: </a:t>
             </a:r>
@@ -8974,7 +9629,7 @@
 </file>
 
 <file path=ppt/slides/slide18.xml><?xml version="1.0" encoding="utf-8"?>
-<p:sld xmlns:a="http://schemas.openxmlformats.org/drawingml/2006/main" xmlns:p="http://schemas.openxmlformats.org/presentationml/2006/main" xmlns:r="http://schemas.openxmlformats.org/officeDocument/2006/relationships">
+<p:sld xmlns:a="http://schemas.openxmlformats.org/drawingml/2006/main" xmlns:r="http://schemas.openxmlformats.org/officeDocument/2006/relationships" xmlns:p="http://schemas.openxmlformats.org/presentationml/2006/main">
   <p:cSld>
     <p:spTree>
       <p:nvGrpSpPr>
@@ -8982,7 +9637,14 @@
         <p:cNvGrpSpPr/>
         <p:nvPr/>
       </p:nvGrpSpPr>
-      <p:grpSpPr/>
+      <p:grpSpPr>
+        <a:xfrm>
+          <a:off x="0" y="0"/>
+          <a:ext cx="0" cy="0"/>
+          <a:chOff x="0" y="0"/>
+          <a:chExt cx="0" cy="0"/>
+        </a:xfrm>
+      </p:grpSpPr>
       <p:sp>
         <p:nvSpPr>
           <p:cNvPr id="2" name="Title 1"/>
@@ -9045,7 +9707,7 @@
           </a:fontRef>
         </p:style>
         <p:txBody>
-          <a:bodyPr rtlCol="0" anchor="t" wrap="none" lIns="137160" rIns="137160" tIns="91440" bIns="91440">
+          <a:bodyPr wrap="none" lIns="137160" tIns="91440" rIns="137160" bIns="91440" rtlCol="0" anchor="t">
             <a:noAutofit/>
           </a:bodyPr>
           <a:lstStyle/>
@@ -9550,7 +10212,6 @@
           </a:bodyPr>
           <a:lstStyle/>
           <a:p>
-            <a:pPr/>
             <a:r>
               <a:t>The </a:t>
             </a:r>
@@ -9563,7 +10224,6 @@
             </a:r>
           </a:p>
           <a:p>
-            <a:pPr/>
             <a:r>
               <a:t>The </a:t>
             </a:r>
@@ -9717,7 +10377,7 @@
 </file>
 
 <file path=ppt/slides/slide19.xml><?xml version="1.0" encoding="utf-8"?>
-<p:sld xmlns:a="http://schemas.openxmlformats.org/drawingml/2006/main" xmlns:p="http://schemas.openxmlformats.org/presentationml/2006/main" xmlns:r="http://schemas.openxmlformats.org/officeDocument/2006/relationships">
+<p:sld xmlns:a="http://schemas.openxmlformats.org/drawingml/2006/main" xmlns:r="http://schemas.openxmlformats.org/officeDocument/2006/relationships" xmlns:p="http://schemas.openxmlformats.org/presentationml/2006/main">
   <p:cSld>
     <p:spTree>
       <p:nvGrpSpPr>
@@ -9725,7 +10385,14 @@
         <p:cNvGrpSpPr/>
         <p:nvPr/>
       </p:nvGrpSpPr>
-      <p:grpSpPr/>
+      <p:grpSpPr>
+        <a:xfrm>
+          <a:off x="0" y="0"/>
+          <a:ext cx="0" cy="0"/>
+          <a:chOff x="0" y="0"/>
+          <a:chExt cx="0" cy="0"/>
+        </a:xfrm>
+      </p:grpSpPr>
       <p:sp>
         <p:nvSpPr>
           <p:cNvPr id="2" name="Title 1"/>
@@ -9771,7 +10438,6 @@
           </a:bodyPr>
           <a:lstStyle/>
           <a:p>
-            <a:pPr/>
             <a:r>
               <a:t>MCP messages are </a:t>
             </a:r>
@@ -9784,7 +10450,6 @@
             </a:r>
           </a:p>
           <a:p>
-            <a:pPr/>
             <a:r>
               <a:rPr b="1"/>
               <a:t>Request</a:t>
@@ -9800,7 +10465,6 @@
             </a:r>
           </a:p>
           <a:p>
-            <a:pPr/>
             <a:r>
               <a:rPr b="1"/>
               <a:t>Response</a:t>
@@ -9819,7 +10483,6 @@
             </a:r>
           </a:p>
           <a:p>
-            <a:pPr/>
             <a:r>
               <a:rPr b="1"/>
               <a:t>Notification</a:t>
@@ -9838,7 +10501,6 @@
             </a:r>
           </a:p>
           <a:p>
-            <a:pPr/>
             <a:r>
               <a:t>Nothing here is specific to AI: it is a remote procedure call</a:t>
             </a:r>
@@ -10132,7 +10794,7 @@
 </file>
 
 <file path=ppt/slides/slide2.xml><?xml version="1.0" encoding="utf-8"?>
-<p:sld xmlns:a="http://schemas.openxmlformats.org/drawingml/2006/main" xmlns:p="http://schemas.openxmlformats.org/presentationml/2006/main" xmlns:r="http://schemas.openxmlformats.org/officeDocument/2006/relationships">
+<p:sld xmlns:a="http://schemas.openxmlformats.org/drawingml/2006/main" xmlns:r="http://schemas.openxmlformats.org/officeDocument/2006/relationships" xmlns:p="http://schemas.openxmlformats.org/presentationml/2006/main">
   <p:cSld>
     <p:spTree>
       <p:nvGrpSpPr>
@@ -10140,7 +10802,14 @@
         <p:cNvGrpSpPr/>
         <p:nvPr/>
       </p:nvGrpSpPr>
-      <p:grpSpPr/>
+      <p:grpSpPr>
+        <a:xfrm>
+          <a:off x="0" y="0"/>
+          <a:ext cx="0" cy="0"/>
+          <a:chOff x="0" y="0"/>
+          <a:chExt cx="0" cy="0"/>
+        </a:xfrm>
+      </p:grpSpPr>
       <p:sp>
         <p:nvSpPr>
           <p:cNvPr id="2" name="Title 1"/>
@@ -10171,18 +10840,18 @@
             <a:spLocks noGrp="1"/>
           </p:cNvSpPr>
           <p:nvPr>
-            <p:ph idx="1" sz="half"/>
+            <p:ph sz="half" idx="1"/>
           </p:nvPr>
         </p:nvSpPr>
         <p:spPr>
           <a:xfrm>
             <a:off x="838200" y="1825625"/>
-            <a:ext cx="5181600" cy="4351338"/>
+            <a:ext cx="5501640" cy="4351338"/>
           </a:xfrm>
         </p:spPr>
         <p:txBody>
           <a:bodyPr>
-            <a:normAutofit fontScale="77500"/>
+            <a:normAutofit fontScale="85000" lnSpcReduction="20000"/>
           </a:bodyPr>
           <a:lstStyle/>
           <a:p>
@@ -10190,919 +10859,106 @@
               <a:buNone/>
             </a:pPr>
             <a:r>
-              <a:rPr b="1"/>
+              <a:rPr b="1" dirty="0"/>
               <a:t>MCP: one standard plug between an AI application and everything outside it.</a:t>
             </a:r>
-          </a:p>
-          <a:p>
-            <a:pPr/>
-            <a:r>
-              <a:rPr b="1"/>
+            <a:endParaRPr lang="en-US" b="1" dirty="0"/>
+          </a:p>
+          <a:p>
+            <a:pPr marL="0" indent="0">
+              <a:buNone/>
+            </a:pPr>
+            <a:endParaRPr b="1" dirty="0"/>
+          </a:p>
+          <a:p>
+            <a:r>
+              <a:rPr b="1" dirty="0"/>
               <a:t>Model</a:t>
             </a:r>
             <a:r>
+              <a:rPr dirty="0"/>
               <a:t>: the LLM inside the application: Claude, ChatGPT, Copilot</a:t>
             </a:r>
           </a:p>
           <a:p>
-            <a:pPr/>
-            <a:r>
-              <a:rPr b="1"/>
+            <a:r>
+              <a:rPr b="1" dirty="0"/>
               <a:t>Context</a:t>
             </a:r>
             <a:r>
+              <a:rPr dirty="0"/>
               <a:t>: what it needs from outside: files, databases, APIs, live data</a:t>
             </a:r>
           </a:p>
           <a:p>
-            <a:pPr/>
-            <a:r>
-              <a:rPr b="1"/>
+            <a:r>
+              <a:rPr b="1" dirty="0"/>
               <a:t>Protocol</a:t>
             </a:r>
             <a:r>
+              <a:rPr dirty="0"/>
               <a:t>: the agreed rules for asking for it</a:t>
             </a:r>
-          </a:p>
-          <a:p>
-            <a:pPr/>
-            <a:r>
+            <a:endParaRPr lang="en-US" dirty="0"/>
+          </a:p>
+          <a:p>
+            <a:endParaRPr dirty="0"/>
+          </a:p>
+          <a:p>
+            <a:r>
+              <a:rPr dirty="0"/>
               <a:t>An open standard: published by Anthropic in November 2024, now with the Linux Foundation</a:t>
             </a:r>
           </a:p>
         </p:txBody>
       </p:sp>
-      <p:grpSp>
-        <p:nvGrpSpPr>
-          <p:cNvPr id="5" name="Hub diagram"/>
-          <p:cNvGrpSpPr/>
+      <p:pic>
+        <p:nvPicPr>
+          <p:cNvPr id="25" name="Picture 2" descr="Model Context Protocol (MCP) Assets | by Abhishek Jaiswal | Medium">
+            <a:extLst>
+              <a:ext uri="{FF2B5EF4-FFF2-40B4-BE49-F238E27FC236}">
+                <a16:creationId xmlns:a16="http://schemas.microsoft.com/office/drawing/2014/main" id="{2F33774A-EFFB-EA6A-D2D0-7C537E636528}"/>
+              </a:ext>
+            </a:extLst>
+          </p:cNvPr>
+          <p:cNvPicPr>
+            <a:picLocks noChangeAspect="1" noChangeArrowheads="1"/>
+          </p:cNvPicPr>
           <p:nvPr/>
-        </p:nvGrpSpPr>
-        <p:grpSpPr>
+        </p:nvPicPr>
+        <p:blipFill rotWithShape="1">
+          <a:blip r:embed="rId2">
+            <a:extLst>
+              <a:ext uri="{28A0092B-C50C-407E-A947-70E740481C1C}">
+                <a14:useLocalDpi xmlns:a14="http://schemas.microsoft.com/office/drawing/2010/main" val="0"/>
+              </a:ext>
+            </a:extLst>
+          </a:blip>
+          <a:srcRect l="3204" t="13533" r="3445" b="2275"/>
+          <a:stretch>
+            <a:fillRect/>
+          </a:stretch>
+        </p:blipFill>
+        <p:spPr bwMode="auto">
           <a:xfrm>
-            <a:off x="6263640" y="1825625"/>
-            <a:ext cx="4998720" cy="2871216"/>
-            <a:chOff x="6263640" y="1825625"/>
-            <a:chExt cx="4998720" cy="2871216"/>
+            <a:off x="6339840" y="1122883"/>
+            <a:ext cx="5864354" cy="4913620"/>
           </a:xfrm>
-        </p:grpSpPr>
-        <p:cxnSp>
-          <p:nvCxnSpPr>
-            <p:cNvPr id="6" name="Connector 5"/>
-            <p:cNvCxnSpPr/>
-            <p:nvPr/>
-          </p:nvCxnSpPr>
-          <p:spPr>
-            <a:xfrm>
-              <a:off x="7020560" y="2328545"/>
-              <a:ext cx="1184859" cy="566928"/>
-            </a:xfrm>
-            <a:prstGeom prst="line">
-              <a:avLst/>
-            </a:prstGeom>
-            <a:ln w="22225">
-              <a:solidFill>
-                <a:schemeClr val="accent1"/>
-              </a:solidFill>
-              <a:prstDash val="dash"/>
-              <a:headEnd type="triangle"/>
-              <a:tailEnd type="triangle"/>
-            </a:ln>
-            <a:effectLst/>
-          </p:spPr>
-          <p:style>
-            <a:lnRef idx="2">
-              <a:schemeClr val="accent1"/>
-            </a:lnRef>
-            <a:fillRef idx="0">
-              <a:schemeClr val="accent1"/>
-            </a:fillRef>
-            <a:effectRef idx="1">
-              <a:schemeClr val="accent1"/>
-            </a:effectRef>
-            <a:fontRef idx="minor">
-              <a:schemeClr val="tx1"/>
-            </a:fontRef>
-          </p:style>
-        </p:cxnSp>
-        <p:cxnSp>
-          <p:nvCxnSpPr>
-            <p:cNvPr id="7" name="Connector 6"/>
-            <p:cNvCxnSpPr/>
-            <p:nvPr/>
-          </p:nvCxnSpPr>
-          <p:spPr>
-            <a:xfrm>
-              <a:off x="8763000" y="2328545"/>
-              <a:ext cx="0" cy="566928"/>
-            </a:xfrm>
-            <a:prstGeom prst="line">
-              <a:avLst/>
-            </a:prstGeom>
-            <a:ln w="22225">
-              <a:solidFill>
-                <a:schemeClr val="accent1"/>
-              </a:solidFill>
-              <a:prstDash val="dash"/>
-              <a:headEnd type="triangle"/>
-              <a:tailEnd type="triangle"/>
-            </a:ln>
-            <a:effectLst/>
-          </p:spPr>
-          <p:style>
-            <a:lnRef idx="2">
-              <a:schemeClr val="accent1"/>
-            </a:lnRef>
-            <a:fillRef idx="0">
-              <a:schemeClr val="accent1"/>
-            </a:fillRef>
-            <a:effectRef idx="1">
-              <a:schemeClr val="accent1"/>
-            </a:effectRef>
-            <a:fontRef idx="minor">
-              <a:schemeClr val="tx1"/>
-            </a:fontRef>
-          </p:style>
-        </p:cxnSp>
-        <p:cxnSp>
-          <p:nvCxnSpPr>
-            <p:cNvPr id="8" name="Connector 7"/>
-            <p:cNvCxnSpPr/>
-            <p:nvPr/>
-          </p:nvCxnSpPr>
-          <p:spPr>
-            <a:xfrm flipH="1">
-              <a:off x="9320580" y="2328545"/>
-              <a:ext cx="1184860" cy="566928"/>
-            </a:xfrm>
-            <a:prstGeom prst="line">
-              <a:avLst/>
-            </a:prstGeom>
-            <a:ln w="22225">
-              <a:solidFill>
-                <a:schemeClr val="accent1"/>
-              </a:solidFill>
-              <a:prstDash val="dash"/>
-              <a:headEnd type="triangle"/>
-              <a:tailEnd type="triangle"/>
-            </a:ln>
-            <a:effectLst/>
-          </p:spPr>
-          <p:style>
-            <a:lnRef idx="2">
-              <a:schemeClr val="accent1"/>
-            </a:lnRef>
-            <a:fillRef idx="0">
-              <a:schemeClr val="accent1"/>
-            </a:fillRef>
-            <a:effectRef idx="1">
-              <a:schemeClr val="accent1"/>
-            </a:effectRef>
-            <a:fontRef idx="minor">
-              <a:schemeClr val="tx1"/>
-            </a:fontRef>
-          </p:style>
-        </p:cxnSp>
-        <p:cxnSp>
-          <p:nvCxnSpPr>
-            <p:cNvPr id="9" name="Connector 8"/>
-            <p:cNvCxnSpPr/>
-            <p:nvPr/>
-          </p:nvCxnSpPr>
-          <p:spPr>
-            <a:xfrm flipV="1">
-              <a:off x="7020560" y="3626993"/>
-              <a:ext cx="1184859" cy="566928"/>
-            </a:xfrm>
-            <a:prstGeom prst="line">
-              <a:avLst/>
-            </a:prstGeom>
-            <a:ln w="22225">
-              <a:solidFill>
-                <a:schemeClr val="accent1"/>
-              </a:solidFill>
-              <a:prstDash val="dash"/>
-              <a:headEnd type="triangle"/>
-              <a:tailEnd type="triangle"/>
-            </a:ln>
-            <a:effectLst/>
-          </p:spPr>
-          <p:style>
-            <a:lnRef idx="2">
-              <a:schemeClr val="accent1"/>
-            </a:lnRef>
-            <a:fillRef idx="0">
-              <a:schemeClr val="accent1"/>
-            </a:fillRef>
-            <a:effectRef idx="1">
-              <a:schemeClr val="accent1"/>
-            </a:effectRef>
-            <a:fontRef idx="minor">
-              <a:schemeClr val="tx1"/>
-            </a:fontRef>
-          </p:style>
-        </p:cxnSp>
-        <p:cxnSp>
-          <p:nvCxnSpPr>
-            <p:cNvPr id="10" name="Connector 9"/>
-            <p:cNvCxnSpPr/>
-            <p:nvPr/>
-          </p:nvCxnSpPr>
-          <p:spPr>
-            <a:xfrm flipV="1">
-              <a:off x="8763000" y="3626993"/>
-              <a:ext cx="0" cy="566928"/>
-            </a:xfrm>
-            <a:prstGeom prst="line">
-              <a:avLst/>
-            </a:prstGeom>
-            <a:ln w="22225">
-              <a:solidFill>
-                <a:schemeClr val="accent1"/>
-              </a:solidFill>
-              <a:prstDash val="dash"/>
-              <a:headEnd type="triangle"/>
-              <a:tailEnd type="triangle"/>
-            </a:ln>
-            <a:effectLst/>
-          </p:spPr>
-          <p:style>
-            <a:lnRef idx="2">
-              <a:schemeClr val="accent1"/>
-            </a:lnRef>
-            <a:fillRef idx="0">
-              <a:schemeClr val="accent1"/>
-            </a:fillRef>
-            <a:effectRef idx="1">
-              <a:schemeClr val="accent1"/>
-            </a:effectRef>
-            <a:fontRef idx="minor">
-              <a:schemeClr val="tx1"/>
-            </a:fontRef>
-          </p:style>
-        </p:cxnSp>
-        <p:cxnSp>
-          <p:nvCxnSpPr>
-            <p:cNvPr id="11" name="Connector 10"/>
-            <p:cNvCxnSpPr/>
-            <p:nvPr/>
-          </p:nvCxnSpPr>
-          <p:spPr>
-            <a:xfrm flipH="1" flipV="1">
-              <a:off x="9320580" y="3626993"/>
-              <a:ext cx="1184860" cy="566928"/>
-            </a:xfrm>
-            <a:prstGeom prst="line">
-              <a:avLst/>
-            </a:prstGeom>
-            <a:ln w="22225">
-              <a:solidFill>
-                <a:schemeClr val="accent1"/>
-              </a:solidFill>
-              <a:prstDash val="dash"/>
-              <a:headEnd type="triangle"/>
-              <a:tailEnd type="triangle"/>
-            </a:ln>
-            <a:effectLst/>
-          </p:spPr>
-          <p:style>
-            <a:lnRef idx="2">
-              <a:schemeClr val="accent1"/>
-            </a:lnRef>
-            <a:fillRef idx="0">
-              <a:schemeClr val="accent1"/>
-            </a:fillRef>
-            <a:effectRef idx="1">
-              <a:schemeClr val="accent1"/>
-            </a:effectRef>
-            <a:fontRef idx="minor">
-              <a:schemeClr val="tx1"/>
-            </a:fontRef>
-          </p:style>
-        </p:cxnSp>
-        <p:sp>
-          <p:nvSpPr>
-            <p:cNvPr id="12" name="Box Web APIs"/>
-            <p:cNvSpPr/>
-            <p:nvPr/>
-          </p:nvSpPr>
-          <p:spPr>
-            <a:xfrm>
-              <a:off x="6263640" y="1825625"/>
-              <a:ext cx="1513840" cy="502920"/>
-            </a:xfrm>
-            <a:prstGeom prst="roundRect">
-              <a:avLst>
-                <a:gd name="adj" fmla="val 16363"/>
-              </a:avLst>
-            </a:prstGeom>
-            <a:solidFill>
-              <a:schemeClr val="bg1"/>
-            </a:solidFill>
-            <a:ln w="19050">
-              <a:solidFill>
-                <a:schemeClr val="accent1"/>
-              </a:solidFill>
-            </a:ln>
-            <a:effectLst/>
-          </p:spPr>
-          <p:style>
-            <a:lnRef idx="1">
-              <a:schemeClr val="accent1"/>
-            </a:lnRef>
-            <a:fillRef idx="3">
-              <a:schemeClr val="accent1"/>
-            </a:fillRef>
-            <a:effectRef idx="2">
-              <a:schemeClr val="accent1"/>
-            </a:effectRef>
-            <a:fontRef idx="minor">
-              <a:schemeClr val="lt1"/>
-            </a:fontRef>
-          </p:style>
-          <p:txBody>
-            <a:bodyPr rtlCol="0" anchor="ctr" wrap="square">
-              <a:noAutofit/>
-            </a:bodyPr>
-            <a:lstStyle/>
-            <a:p>
-              <a:pPr algn="ctr"/>
-              <a:r>
-                <a:rPr sz="2000">
-                  <a:solidFill>
-                    <a:schemeClr val="tx1"/>
-                  </a:solidFill>
-                </a:rPr>
-                <a:t>Web APIs</a:t>
-              </a:r>
-            </a:p>
-          </p:txBody>
-        </p:sp>
-        <p:sp>
-          <p:nvSpPr>
-            <p:cNvPr id="13" name="Box Database"/>
-            <p:cNvSpPr/>
-            <p:nvPr/>
-          </p:nvSpPr>
-          <p:spPr>
-            <a:xfrm>
-              <a:off x="8006080" y="1825625"/>
-              <a:ext cx="1513840" cy="502920"/>
-            </a:xfrm>
-            <a:prstGeom prst="roundRect">
-              <a:avLst>
-                <a:gd name="adj" fmla="val 16363"/>
-              </a:avLst>
-            </a:prstGeom>
-            <a:solidFill>
-              <a:schemeClr val="bg1"/>
-            </a:solidFill>
-            <a:ln w="19050">
-              <a:solidFill>
-                <a:schemeClr val="accent1"/>
-              </a:solidFill>
-            </a:ln>
-            <a:effectLst/>
-          </p:spPr>
-          <p:style>
-            <a:lnRef idx="1">
-              <a:schemeClr val="accent1"/>
-            </a:lnRef>
-            <a:fillRef idx="3">
-              <a:schemeClr val="accent1"/>
-            </a:fillRef>
-            <a:effectRef idx="2">
-              <a:schemeClr val="accent1"/>
-            </a:effectRef>
-            <a:fontRef idx="minor">
-              <a:schemeClr val="lt1"/>
-            </a:fontRef>
-          </p:style>
-          <p:txBody>
-            <a:bodyPr rtlCol="0" anchor="ctr" wrap="square">
-              <a:noAutofit/>
-            </a:bodyPr>
-            <a:lstStyle/>
-            <a:p>
-              <a:pPr algn="ctr"/>
-              <a:r>
-                <a:rPr sz="2000">
-                  <a:solidFill>
-                    <a:schemeClr val="tx1"/>
-                  </a:solidFill>
-                </a:rPr>
-                <a:t>Database</a:t>
-              </a:r>
-            </a:p>
-          </p:txBody>
-        </p:sp>
-        <p:sp>
-          <p:nvSpPr>
-            <p:cNvPr id="14" name="Box GitHub"/>
-            <p:cNvSpPr/>
-            <p:nvPr/>
-          </p:nvSpPr>
-          <p:spPr>
-            <a:xfrm>
-              <a:off x="9748520" y="1825625"/>
-              <a:ext cx="1513840" cy="502920"/>
-            </a:xfrm>
-            <a:prstGeom prst="roundRect">
-              <a:avLst>
-                <a:gd name="adj" fmla="val 16363"/>
-              </a:avLst>
-            </a:prstGeom>
-            <a:solidFill>
-              <a:schemeClr val="bg1"/>
-            </a:solidFill>
-            <a:ln w="19050">
-              <a:solidFill>
-                <a:schemeClr val="accent1"/>
-              </a:solidFill>
-            </a:ln>
-            <a:effectLst/>
-          </p:spPr>
-          <p:style>
-            <a:lnRef idx="1">
-              <a:schemeClr val="accent1"/>
-            </a:lnRef>
-            <a:fillRef idx="3">
-              <a:schemeClr val="accent1"/>
-            </a:fillRef>
-            <a:effectRef idx="2">
-              <a:schemeClr val="accent1"/>
-            </a:effectRef>
-            <a:fontRef idx="minor">
-              <a:schemeClr val="lt1"/>
-            </a:fontRef>
-          </p:style>
-          <p:txBody>
-            <a:bodyPr rtlCol="0" anchor="ctr" wrap="square">
-              <a:noAutofit/>
-            </a:bodyPr>
-            <a:lstStyle/>
-            <a:p>
-              <a:pPr algn="ctr"/>
-              <a:r>
-                <a:rPr sz="2000">
-                  <a:solidFill>
-                    <a:schemeClr val="tx1"/>
-                  </a:solidFill>
-                </a:rPr>
-                <a:t>GitHub</a:t>
-              </a:r>
-            </a:p>
-          </p:txBody>
-        </p:sp>
-        <p:sp>
-          <p:nvSpPr>
-            <p:cNvPr id="15" name="Box Slack"/>
-            <p:cNvSpPr/>
-            <p:nvPr/>
-          </p:nvSpPr>
-          <p:spPr>
-            <a:xfrm>
-              <a:off x="6263640" y="4193921"/>
-              <a:ext cx="1513840" cy="502920"/>
-            </a:xfrm>
-            <a:prstGeom prst="roundRect">
-              <a:avLst>
-                <a:gd name="adj" fmla="val 16363"/>
-              </a:avLst>
-            </a:prstGeom>
-            <a:solidFill>
-              <a:schemeClr val="bg1"/>
-            </a:solidFill>
-            <a:ln w="19050">
-              <a:solidFill>
-                <a:schemeClr val="accent1"/>
-              </a:solidFill>
-            </a:ln>
-            <a:effectLst/>
-          </p:spPr>
-          <p:style>
-            <a:lnRef idx="1">
-              <a:schemeClr val="accent1"/>
-            </a:lnRef>
-            <a:fillRef idx="3">
-              <a:schemeClr val="accent1"/>
-            </a:fillRef>
-            <a:effectRef idx="2">
-              <a:schemeClr val="accent1"/>
-            </a:effectRef>
-            <a:fontRef idx="minor">
-              <a:schemeClr val="lt1"/>
-            </a:fontRef>
-          </p:style>
-          <p:txBody>
-            <a:bodyPr rtlCol="0" anchor="ctr" wrap="square">
-              <a:noAutofit/>
-            </a:bodyPr>
-            <a:lstStyle/>
-            <a:p>
-              <a:pPr algn="ctr"/>
-              <a:r>
-                <a:rPr sz="2000">
-                  <a:solidFill>
-                    <a:schemeClr val="tx1"/>
-                  </a:solidFill>
-                </a:rPr>
-                <a:t>Slack</a:t>
-              </a:r>
-            </a:p>
-          </p:txBody>
-        </p:sp>
-        <p:sp>
-          <p:nvSpPr>
-            <p:cNvPr id="16" name="Box Local files"/>
-            <p:cNvSpPr/>
-            <p:nvPr/>
-          </p:nvSpPr>
-          <p:spPr>
-            <a:xfrm>
-              <a:off x="8006080" y="4193921"/>
-              <a:ext cx="1513840" cy="502920"/>
-            </a:xfrm>
-            <a:prstGeom prst="roundRect">
-              <a:avLst>
-                <a:gd name="adj" fmla="val 16363"/>
-              </a:avLst>
-            </a:prstGeom>
-            <a:solidFill>
-              <a:schemeClr val="bg1"/>
-            </a:solidFill>
-            <a:ln w="19050">
-              <a:solidFill>
-                <a:schemeClr val="accent1"/>
-              </a:solidFill>
-            </a:ln>
-            <a:effectLst/>
-          </p:spPr>
-          <p:style>
-            <a:lnRef idx="1">
-              <a:schemeClr val="accent1"/>
-            </a:lnRef>
-            <a:fillRef idx="3">
-              <a:schemeClr val="accent1"/>
-            </a:fillRef>
-            <a:effectRef idx="2">
-              <a:schemeClr val="accent1"/>
-            </a:effectRef>
-            <a:fontRef idx="minor">
-              <a:schemeClr val="lt1"/>
-            </a:fontRef>
-          </p:style>
-          <p:txBody>
-            <a:bodyPr rtlCol="0" anchor="ctr" wrap="square">
-              <a:noAutofit/>
-            </a:bodyPr>
-            <a:lstStyle/>
-            <a:p>
-              <a:pPr algn="ctr"/>
-              <a:r>
-                <a:rPr sz="2000">
-                  <a:solidFill>
-                    <a:schemeClr val="tx1"/>
-                  </a:solidFill>
-                </a:rPr>
-                <a:t>Local files</a:t>
-              </a:r>
-            </a:p>
-          </p:txBody>
-        </p:sp>
-        <p:sp>
-          <p:nvSpPr>
-            <p:cNvPr id="17" name="Box Email"/>
-            <p:cNvSpPr/>
-            <p:nvPr/>
-          </p:nvSpPr>
-          <p:spPr>
-            <a:xfrm>
-              <a:off x="9748520" y="4193921"/>
-              <a:ext cx="1513840" cy="502920"/>
-            </a:xfrm>
-            <a:prstGeom prst="roundRect">
-              <a:avLst>
-                <a:gd name="adj" fmla="val 16363"/>
-              </a:avLst>
-            </a:prstGeom>
-            <a:solidFill>
-              <a:schemeClr val="bg1"/>
-            </a:solidFill>
-            <a:ln w="19050">
-              <a:solidFill>
-                <a:schemeClr val="accent1"/>
-              </a:solidFill>
-            </a:ln>
-            <a:effectLst/>
-          </p:spPr>
-          <p:style>
-            <a:lnRef idx="1">
-              <a:schemeClr val="accent1"/>
-            </a:lnRef>
-            <a:fillRef idx="3">
-              <a:schemeClr val="accent1"/>
-            </a:fillRef>
-            <a:effectRef idx="2">
-              <a:schemeClr val="accent1"/>
-            </a:effectRef>
-            <a:fontRef idx="minor">
-              <a:schemeClr val="lt1"/>
-            </a:fontRef>
-          </p:style>
-          <p:txBody>
-            <a:bodyPr rtlCol="0" anchor="ctr" wrap="square">
-              <a:noAutofit/>
-            </a:bodyPr>
-            <a:lstStyle/>
-            <a:p>
-              <a:pPr algn="ctr"/>
-              <a:r>
-                <a:rPr sz="2000">
-                  <a:solidFill>
-                    <a:schemeClr val="tx1"/>
-                  </a:solidFill>
-                </a:rPr>
-                <a:t>Email</a:t>
-              </a:r>
-            </a:p>
-          </p:txBody>
-        </p:sp>
-        <p:sp>
-          <p:nvSpPr>
-            <p:cNvPr id="18" name="Centre"/>
-            <p:cNvSpPr/>
-            <p:nvPr/>
-          </p:nvSpPr>
-          <p:spPr>
-            <a:xfrm>
-              <a:off x="7613294" y="2895473"/>
-              <a:ext cx="2299411" cy="731520"/>
-            </a:xfrm>
-            <a:prstGeom prst="roundRect">
-              <a:avLst>
-                <a:gd name="adj" fmla="val 11250"/>
-              </a:avLst>
-            </a:prstGeom>
-            <a:solidFill>
-              <a:schemeClr val="accent1"/>
-            </a:solidFill>
-            <a:ln w="19050">
-              <a:solidFill>
-                <a:schemeClr val="accent1"/>
-              </a:solidFill>
-            </a:ln>
-            <a:effectLst/>
-          </p:spPr>
-          <p:style>
-            <a:lnRef idx="1">
-              <a:schemeClr val="accent1"/>
-            </a:lnRef>
-            <a:fillRef idx="3">
-              <a:schemeClr val="accent1"/>
-            </a:fillRef>
-            <a:effectRef idx="2">
-              <a:schemeClr val="accent1"/>
-            </a:effectRef>
-            <a:fontRef idx="minor">
-              <a:schemeClr val="lt1"/>
-            </a:fontRef>
-          </p:style>
-          <p:txBody>
-            <a:bodyPr rtlCol="0" anchor="ctr" wrap="square">
-              <a:noAutofit/>
-            </a:bodyPr>
-            <a:lstStyle/>
-            <a:p>
-              <a:pPr algn="ctr"/>
-              <a:r>
-                <a:rPr sz="2000" b="1">
-                  <a:solidFill>
-                    <a:schemeClr val="bg1"/>
-                  </a:solidFill>
-                </a:rPr>
-                <a:t>AI application</a:t>
-              </a:r>
-            </a:p>
-          </p:txBody>
-        </p:sp>
-        <p:sp>
-          <p:nvSpPr>
-            <p:cNvPr id="19" name="Label"/>
-            <p:cNvSpPr txBox="1"/>
-            <p:nvPr/>
-          </p:nvSpPr>
-          <p:spPr>
-            <a:xfrm>
-              <a:off x="7383627" y="2487041"/>
-              <a:ext cx="458724" cy="249936"/>
-            </a:xfrm>
-            <a:prstGeom prst="rect">
-              <a:avLst/>
-            </a:prstGeom>
-            <a:solidFill>
-              <a:schemeClr val="bg1"/>
-            </a:solidFill>
-          </p:spPr>
-          <p:txBody>
-            <a:bodyPr wrap="square" anchor="ctr" lIns="27432" rIns="27432" tIns="0" bIns="0">
-              <a:noAutofit/>
-            </a:bodyPr>
-            <a:lstStyle/>
-            <a:p>
-              <a:pPr algn="ctr"/>
-              <a:r>
-                <a:rPr sz="1400" b="1">
-                  <a:solidFill>
-                    <a:schemeClr val="accent1"/>
-                  </a:solidFill>
-                </a:rPr>
-                <a:t>MCP</a:t>
-              </a:r>
-            </a:p>
-          </p:txBody>
-        </p:sp>
-        <p:sp>
-          <p:nvSpPr>
-            <p:cNvPr id="20" name="Label"/>
-            <p:cNvSpPr txBox="1"/>
-            <p:nvPr/>
-          </p:nvSpPr>
-          <p:spPr>
-            <a:xfrm>
-              <a:off x="8533638" y="2487041"/>
-              <a:ext cx="458724" cy="249936"/>
-            </a:xfrm>
-            <a:prstGeom prst="rect">
-              <a:avLst/>
-            </a:prstGeom>
-            <a:solidFill>
-              <a:schemeClr val="bg1"/>
-            </a:solidFill>
-          </p:spPr>
-          <p:txBody>
-            <a:bodyPr wrap="square" anchor="ctr" lIns="27432" rIns="27432" tIns="0" bIns="0">
-              <a:noAutofit/>
-            </a:bodyPr>
-            <a:lstStyle/>
-            <a:p>
-              <a:pPr algn="ctr"/>
-              <a:r>
-                <a:rPr sz="1400" b="1">
-                  <a:solidFill>
-                    <a:schemeClr val="accent1"/>
-                  </a:solidFill>
-                </a:rPr>
-                <a:t>MCP</a:t>
-              </a:r>
-            </a:p>
-          </p:txBody>
-        </p:sp>
-        <p:sp>
-          <p:nvSpPr>
-            <p:cNvPr id="21" name="Label"/>
-            <p:cNvSpPr txBox="1"/>
-            <p:nvPr/>
-          </p:nvSpPr>
-          <p:spPr>
-            <a:xfrm>
-              <a:off x="9683648" y="2487041"/>
-              <a:ext cx="458724" cy="249936"/>
-            </a:xfrm>
-            <a:prstGeom prst="rect">
-              <a:avLst/>
-            </a:prstGeom>
-            <a:solidFill>
-              <a:schemeClr val="bg1"/>
-            </a:solidFill>
-          </p:spPr>
-          <p:txBody>
-            <a:bodyPr wrap="square" anchor="ctr" lIns="27432" rIns="27432" tIns="0" bIns="0">
-              <a:noAutofit/>
-            </a:bodyPr>
-            <a:lstStyle/>
-            <a:p>
-              <a:pPr algn="ctr"/>
-              <a:r>
-                <a:rPr sz="1400" b="1">
-                  <a:solidFill>
-                    <a:schemeClr val="accent1"/>
-                  </a:solidFill>
-                </a:rPr>
-                <a:t>MCP</a:t>
-              </a:r>
-            </a:p>
-          </p:txBody>
-        </p:sp>
-        <p:sp>
-          <p:nvSpPr>
-            <p:cNvPr id="22" name="Label"/>
-            <p:cNvSpPr txBox="1"/>
-            <p:nvPr/>
-          </p:nvSpPr>
-          <p:spPr>
-            <a:xfrm>
-              <a:off x="7383627" y="3785489"/>
-              <a:ext cx="458724" cy="249936"/>
-            </a:xfrm>
-            <a:prstGeom prst="rect">
-              <a:avLst/>
-            </a:prstGeom>
-            <a:solidFill>
-              <a:schemeClr val="bg1"/>
-            </a:solidFill>
-          </p:spPr>
-          <p:txBody>
-            <a:bodyPr wrap="square" anchor="ctr" lIns="27432" rIns="27432" tIns="0" bIns="0">
-              <a:noAutofit/>
-            </a:bodyPr>
-            <a:lstStyle/>
-            <a:p>
-              <a:pPr algn="ctr"/>
-              <a:r>
-                <a:rPr sz="1400" b="1">
-                  <a:solidFill>
-                    <a:schemeClr val="accent1"/>
-                  </a:solidFill>
-                </a:rPr>
-                <a:t>MCP</a:t>
-              </a:r>
-            </a:p>
-          </p:txBody>
-        </p:sp>
-        <p:sp>
-          <p:nvSpPr>
-            <p:cNvPr id="23" name="Label"/>
-            <p:cNvSpPr txBox="1"/>
-            <p:nvPr/>
-          </p:nvSpPr>
-          <p:spPr>
-            <a:xfrm>
-              <a:off x="8533638" y="3785489"/>
-              <a:ext cx="458724" cy="249936"/>
-            </a:xfrm>
-            <a:prstGeom prst="rect">
-              <a:avLst/>
-            </a:prstGeom>
-            <a:solidFill>
-              <a:schemeClr val="bg1"/>
-            </a:solidFill>
-          </p:spPr>
-          <p:txBody>
-            <a:bodyPr wrap="square" anchor="ctr" lIns="27432" rIns="27432" tIns="0" bIns="0">
-              <a:noAutofit/>
-            </a:bodyPr>
-            <a:lstStyle/>
-            <a:p>
-              <a:pPr algn="ctr"/>
-              <a:r>
-                <a:rPr sz="1400" b="1">
-                  <a:solidFill>
-                    <a:schemeClr val="accent1"/>
-                  </a:solidFill>
-                </a:rPr>
-                <a:t>MCP</a:t>
-              </a:r>
-            </a:p>
-          </p:txBody>
-        </p:sp>
-        <p:sp>
-          <p:nvSpPr>
-            <p:cNvPr id="24" name="Label"/>
-            <p:cNvSpPr txBox="1"/>
-            <p:nvPr/>
-          </p:nvSpPr>
-          <p:spPr>
-            <a:xfrm>
-              <a:off x="9683648" y="3785489"/>
-              <a:ext cx="458724" cy="249936"/>
-            </a:xfrm>
-            <a:prstGeom prst="rect">
-              <a:avLst/>
-            </a:prstGeom>
-            <a:solidFill>
-              <a:schemeClr val="bg1"/>
-            </a:solidFill>
-          </p:spPr>
-          <p:txBody>
-            <a:bodyPr wrap="square" anchor="ctr" lIns="27432" rIns="27432" tIns="0" bIns="0">
-              <a:noAutofit/>
-            </a:bodyPr>
-            <a:lstStyle/>
-            <a:p>
-              <a:pPr algn="ctr"/>
-              <a:r>
-                <a:rPr sz="1400" b="1">
-                  <a:solidFill>
-                    <a:schemeClr val="accent1"/>
-                  </a:solidFill>
-                </a:rPr>
-                <a:t>MCP</a:t>
-              </a:r>
-            </a:p>
-          </p:txBody>
-        </p:sp>
-      </p:grpSp>
+          <a:prstGeom prst="rect">
+            <a:avLst/>
+          </a:prstGeom>
+          <a:noFill/>
+          <a:extLst>
+            <a:ext uri="{909E8E84-426E-40DD-AFC4-6F175D3DCCD1}">
+              <a14:hiddenFill xmlns:a14="http://schemas.microsoft.com/office/drawing/2010/main">
+                <a:solidFill>
+                  <a:srgbClr val="FFFFFF"/>
+                </a:solidFill>
+              </a14:hiddenFill>
+            </a:ext>
+          </a:extLst>
+        </p:spPr>
+      </p:pic>
     </p:spTree>
   </p:cSld>
   <p:clrMapOvr>
@@ -11144,7 +11000,7 @@
                                         <p:tgtEl>
                                           <p:spTgt spid="3">
                                             <p:txEl>
-                                              <p:pRg st="1" end="1"/>
+                                              <p:pRg st="2" end="2"/>
                                             </p:txEl>
                                           </p:spTgt>
                                         </p:tgtEl>
@@ -11193,7 +11049,7 @@
                                         <p:tgtEl>
                                           <p:spTgt spid="3">
                                             <p:txEl>
-                                              <p:pRg st="2" end="2"/>
+                                              <p:pRg st="3" end="3"/>
                                             </p:txEl>
                                           </p:spTgt>
                                         </p:tgtEl>
@@ -11242,7 +11098,7 @@
                                         <p:tgtEl>
                                           <p:spTgt spid="3">
                                             <p:txEl>
-                                              <p:pRg st="3" end="3"/>
+                                              <p:pRg st="4" end="4"/>
                                             </p:txEl>
                                           </p:spTgt>
                                         </p:tgtEl>
@@ -11291,7 +11147,7 @@
                                         <p:tgtEl>
                                           <p:spTgt spid="3">
                                             <p:txEl>
-                                              <p:pRg st="4" end="4"/>
+                                              <p:pRg st="6" end="6"/>
                                             </p:txEl>
                                           </p:spTgt>
                                         </p:tgtEl>
@@ -11341,7 +11197,7 @@
 </file>
 
 <file path=ppt/slides/slide20.xml><?xml version="1.0" encoding="utf-8"?>
-<p:sld xmlns:a="http://schemas.openxmlformats.org/drawingml/2006/main" xmlns:p="http://schemas.openxmlformats.org/presentationml/2006/main" xmlns:r="http://schemas.openxmlformats.org/officeDocument/2006/relationships">
+<p:sld xmlns:a="http://schemas.openxmlformats.org/drawingml/2006/main" xmlns:r="http://schemas.openxmlformats.org/officeDocument/2006/relationships" xmlns:p="http://schemas.openxmlformats.org/presentationml/2006/main">
   <p:cSld>
     <p:spTree>
       <p:nvGrpSpPr>
@@ -11349,7 +11205,14 @@
         <p:cNvGrpSpPr/>
         <p:nvPr/>
       </p:nvGrpSpPr>
-      <p:grpSpPr/>
+      <p:grpSpPr>
+        <a:xfrm>
+          <a:off x="0" y="0"/>
+          <a:ext cx="0" cy="0"/>
+          <a:chOff x="0" y="0"/>
+          <a:chExt cx="0" cy="0"/>
+        </a:xfrm>
+      </p:grpSpPr>
       <p:sp>
         <p:nvSpPr>
           <p:cNvPr id="2" name="Title 1"/>
@@ -11401,7 +11264,7 @@
             <a:spLocks noGrp="1"/>
           </p:cNvSpPr>
           <p:nvPr>
-            <p:ph idx="2" sz="half"/>
+            <p:ph sz="half" idx="2"/>
           </p:nvPr>
         </p:nvSpPr>
         <p:spPr>
@@ -11412,11 +11275,10 @@
         </p:spPr>
         <p:txBody>
           <a:bodyPr>
-            <a:normAutofit fontScale="92500"/>
+            <a:normAutofit/>
           </a:bodyPr>
           <a:lstStyle/>
           <a:p>
-            <a:pPr/>
             <a:r>
               <a:rPr>
                 <a:latin typeface="Consolas"/>
@@ -11428,7 +11290,6 @@
             </a:r>
           </a:p>
           <a:p>
-            <a:pPr/>
             <a:r>
               <a:rPr>
                 <a:latin typeface="Consolas"/>
@@ -11440,7 +11301,6 @@
             </a:r>
           </a:p>
           <a:p>
-            <a:pPr/>
             <a:r>
               <a:rPr>
                 <a:latin typeface="Consolas"/>
@@ -11460,7 +11320,7 @@
             <a:spLocks noGrp="1"/>
           </p:cNvSpPr>
           <p:nvPr>
-            <p:ph type="body" idx="3" sz="quarter"/>
+            <p:ph type="body" sz="quarter" idx="3"/>
           </p:nvPr>
         </p:nvSpPr>
         <p:spPr/>
@@ -11481,7 +11341,7 @@
             <a:spLocks noGrp="1"/>
           </p:cNvSpPr>
           <p:nvPr>
-            <p:ph idx="4" sz="quarter"/>
+            <p:ph sz="quarter" idx="4"/>
           </p:nvPr>
         </p:nvSpPr>
         <p:spPr>
@@ -11492,11 +11352,10 @@
         </p:spPr>
         <p:txBody>
           <a:bodyPr>
-            <a:normAutofit fontScale="92500"/>
+            <a:normAutofit/>
           </a:bodyPr>
           <a:lstStyle/>
           <a:p>
-            <a:pPr/>
             <a:r>
               <a:rPr>
                 <a:latin typeface="Consolas"/>
@@ -11508,7 +11367,6 @@
             </a:r>
           </a:p>
           <a:p>
-            <a:pPr/>
             <a:r>
               <a:rPr>
                 <a:latin typeface="Consolas"/>
@@ -11520,7 +11378,6 @@
             </a:r>
           </a:p>
           <a:p>
-            <a:pPr/>
             <a:r>
               <a:rPr>
                 <a:latin typeface="Consolas"/>
@@ -11551,7 +11408,7 @@
         </p:spPr>
         <p:txBody>
           <a:bodyPr wrap="square">
-            <a:normAutofit fontScale="92500"/>
+            <a:normAutofit fontScale="92500" lnSpcReduction="10000"/>
           </a:bodyPr>
           <a:lstStyle>
             <a:lvl1pPr marL="228600" indent="-228600" algn="l" defTabSz="914400" rtl="0" eaLnBrk="1" latinLnBrk="0" hangingPunct="1">
@@ -11718,7 +11575,6 @@
             </a:lvl9pPr>
           </a:lstStyle>
           <a:p>
-            <a:pPr/>
             <a:r>
               <a:t>Every request names a </a:t>
             </a:r>
@@ -12128,7 +11984,7 @@
 </file>
 
 <file path=ppt/slides/slide21.xml><?xml version="1.0" encoding="utf-8"?>
-<p:sld xmlns:a="http://schemas.openxmlformats.org/drawingml/2006/main" xmlns:p="http://schemas.openxmlformats.org/presentationml/2006/main" xmlns:r="http://schemas.openxmlformats.org/officeDocument/2006/relationships">
+<p:sld xmlns:a="http://schemas.openxmlformats.org/drawingml/2006/main" xmlns:r="http://schemas.openxmlformats.org/officeDocument/2006/relationships" xmlns:p="http://schemas.openxmlformats.org/presentationml/2006/main">
   <p:cSld>
     <p:spTree>
       <p:nvGrpSpPr>
@@ -12136,7 +11992,14 @@
         <p:cNvGrpSpPr/>
         <p:nvPr/>
       </p:nvGrpSpPr>
-      <p:grpSpPr/>
+      <p:grpSpPr>
+        <a:xfrm>
+          <a:off x="0" y="0"/>
+          <a:ext cx="0" cy="0"/>
+          <a:chOff x="0" y="0"/>
+          <a:chExt cx="0" cy="0"/>
+        </a:xfrm>
+      </p:grpSpPr>
       <p:sp>
         <p:nvSpPr>
           <p:cNvPr id="2" name="Title 1"/>
@@ -12178,7 +12041,7 @@
         </p:spPr>
         <p:txBody>
           <a:bodyPr>
-            <a:normAutofit/>
+            <a:normAutofit lnSpcReduction="10000"/>
           </a:bodyPr>
           <a:lstStyle/>
           <a:p>
@@ -12239,7 +12102,7 @@
           </a:fontRef>
         </p:style>
         <p:txBody>
-          <a:bodyPr rtlCol="0" anchor="t" wrap="none" lIns="137160" rIns="137160" tIns="91440" bIns="91440">
+          <a:bodyPr wrap="none" lIns="137160" tIns="91440" rIns="137160" bIns="91440" rtlCol="0" anchor="t">
             <a:noAutofit/>
           </a:bodyPr>
           <a:lstStyle/>
@@ -12977,13 +12840,11 @@
             </a:lvl9pPr>
           </a:lstStyle>
           <a:p>
-            <a:pPr/>
             <a:r>
               <a:t>What comes back is the declaration, word for word</a:t>
             </a:r>
           </a:p>
           <a:p>
-            <a:pPr/>
             <a:r>
               <a:t>The client puts that text in front of the model</a:t>
             </a:r>
@@ -13130,7 +12991,7 @@
 </file>
 
 <file path=ppt/slides/slide22.xml><?xml version="1.0" encoding="utf-8"?>
-<p:sld xmlns:a="http://schemas.openxmlformats.org/drawingml/2006/main" xmlns:p="http://schemas.openxmlformats.org/presentationml/2006/main" xmlns:r="http://schemas.openxmlformats.org/officeDocument/2006/relationships">
+<p:sld xmlns:a="http://schemas.openxmlformats.org/drawingml/2006/main" xmlns:r="http://schemas.openxmlformats.org/officeDocument/2006/relationships" xmlns:p="http://schemas.openxmlformats.org/presentationml/2006/main">
   <p:cSld>
     <p:spTree>
       <p:nvGrpSpPr>
@@ -13138,7 +12999,14 @@
         <p:cNvGrpSpPr/>
         <p:nvPr/>
       </p:nvGrpSpPr>
-      <p:grpSpPr/>
+      <p:grpSpPr>
+        <a:xfrm>
+          <a:off x="0" y="0"/>
+          <a:ext cx="0" cy="0"/>
+          <a:chOff x="0" y="0"/>
+          <a:chExt cx="0" cy="0"/>
+        </a:xfrm>
+      </p:grpSpPr>
       <p:sp>
         <p:nvSpPr>
           <p:cNvPr id="2" name="Title 1"/>
@@ -13169,7 +13037,7 @@
             <a:spLocks noGrp="1"/>
           </p:cNvSpPr>
           <p:nvPr>
-            <p:ph idx="1" sz="half"/>
+            <p:ph sz="half" idx="1"/>
           </p:nvPr>
         </p:nvSpPr>
         <p:spPr>
@@ -13180,7 +13048,7 @@
         </p:spPr>
         <p:txBody>
           <a:bodyPr>
-            <a:normAutofit/>
+            <a:normAutofit lnSpcReduction="10000"/>
           </a:bodyPr>
           <a:lstStyle/>
           <a:p>
@@ -13201,7 +13069,7 @@
             <a:spLocks noGrp="1"/>
           </p:cNvSpPr>
           <p:nvPr>
-            <p:ph idx="2" sz="half"/>
+            <p:ph sz="half" idx="2"/>
           </p:nvPr>
         </p:nvSpPr>
         <p:spPr>
@@ -13212,7 +13080,7 @@
         </p:spPr>
         <p:txBody>
           <a:bodyPr>
-            <a:normAutofit/>
+            <a:normAutofit lnSpcReduction="10000"/>
           </a:bodyPr>
           <a:lstStyle/>
           <a:p>
@@ -13265,7 +13133,7 @@
           </a:fontRef>
         </p:style>
         <p:txBody>
-          <a:bodyPr rtlCol="0" anchor="t" wrap="none" lIns="137160" rIns="137160" tIns="91440" bIns="91440">
+          <a:bodyPr wrap="none" lIns="137160" tIns="91440" rIns="137160" bIns="91440" rtlCol="0" anchor="t">
             <a:noAutofit/>
           </a:bodyPr>
           <a:lstStyle/>
@@ -13657,7 +13525,7 @@
           </a:fontRef>
         </p:style>
         <p:txBody>
-          <a:bodyPr rtlCol="0" anchor="t" wrap="none" lIns="137160" rIns="137160" tIns="91440" bIns="91440">
+          <a:bodyPr wrap="none" lIns="137160" tIns="91440" rIns="137160" bIns="91440" rtlCol="0" anchor="t">
             <a:noAutofit/>
           </a:bodyPr>
           <a:lstStyle/>
@@ -13992,7 +13860,7 @@
         </p:spPr>
         <p:txBody>
           <a:bodyPr wrap="square">
-            <a:normAutofit/>
+            <a:normAutofit lnSpcReduction="10000"/>
           </a:bodyPr>
           <a:lstStyle>
             <a:lvl1pPr marL="228600" indent="-228600" algn="l" defTabSz="914400" rtl="0" eaLnBrk="1" latinLnBrk="0" hangingPunct="1">
@@ -14159,7 +14027,6 @@
             </a:lvl9pPr>
           </a:lstStyle>
           <a:p>
-            <a:pPr/>
             <a:r>
               <a:t>The same </a:t>
             </a:r>
@@ -14174,7 +14041,6 @@
             </a:r>
           </a:p>
           <a:p>
-            <a:pPr/>
             <a:r>
               <a:t>The result is content, which the client hands to the model as context</a:t>
             </a:r>
@@ -14321,7 +14187,7 @@
 </file>
 
 <file path=ppt/slides/slide23.xml><?xml version="1.0" encoding="utf-8"?>
-<p:sld xmlns:a="http://schemas.openxmlformats.org/drawingml/2006/main" xmlns:p="http://schemas.openxmlformats.org/presentationml/2006/main" xmlns:r="http://schemas.openxmlformats.org/officeDocument/2006/relationships">
+<p:sld xmlns:a="http://schemas.openxmlformats.org/drawingml/2006/main" xmlns:r="http://schemas.openxmlformats.org/officeDocument/2006/relationships" xmlns:p="http://schemas.openxmlformats.org/presentationml/2006/main">
   <p:cSld>
     <p:spTree>
       <p:nvGrpSpPr>
@@ -14329,7 +14195,14 @@
         <p:cNvGrpSpPr/>
         <p:nvPr/>
       </p:nvGrpSpPr>
-      <p:grpSpPr/>
+      <p:grpSpPr>
+        <a:xfrm>
+          <a:off x="0" y="0"/>
+          <a:ext cx="0" cy="0"/>
+          <a:chOff x="0" y="0"/>
+          <a:chExt cx="0" cy="0"/>
+        </a:xfrm>
+      </p:grpSpPr>
       <p:sp>
         <p:nvSpPr>
           <p:cNvPr id="2" name="Title 1"/>
@@ -14491,7 +14364,7 @@
             </a:fontRef>
           </p:style>
           <p:txBody>
-            <a:bodyPr rtlCol="0" anchor="ctr" wrap="square">
+            <a:bodyPr wrap="square" rtlCol="0" anchor="ctr">
               <a:noAutofit/>
             </a:bodyPr>
             <a:lstStyle/>
@@ -14552,7 +14425,7 @@
             </a:fontRef>
           </p:style>
           <p:txBody>
-            <a:bodyPr rtlCol="0" anchor="ctr" wrap="square">
+            <a:bodyPr wrap="square" rtlCol="0" anchor="ctr">
               <a:noAutofit/>
             </a:bodyPr>
             <a:lstStyle/>
@@ -14601,7 +14474,7 @@
             <a:noFill/>
           </p:spPr>
           <p:txBody>
-            <a:bodyPr wrap="square" anchor="b" lIns="27432" rIns="27432" tIns="0" bIns="0">
+            <a:bodyPr wrap="square" lIns="27432" tIns="0" rIns="27432" bIns="0" anchor="b">
               <a:noAutofit/>
             </a:bodyPr>
             <a:lstStyle/>
@@ -14696,7 +14569,7 @@
             <a:noFill/>
           </p:spPr>
           <p:txBody>
-            <a:bodyPr wrap="square" anchor="b" lIns="27432" rIns="27432" tIns="0" bIns="0">
+            <a:bodyPr wrap="square" lIns="27432" tIns="0" rIns="27432" bIns="0" anchor="b">
               <a:noAutofit/>
             </a:bodyPr>
             <a:lstStyle/>
@@ -14783,7 +14656,7 @@
             <a:noFill/>
           </p:spPr>
           <p:txBody>
-            <a:bodyPr wrap="square" anchor="b" lIns="27432" rIns="27432" tIns="0" bIns="0">
+            <a:bodyPr wrap="square" lIns="27432" tIns="0" rIns="27432" bIns="0" anchor="b">
               <a:noAutofit/>
             </a:bodyPr>
             <a:lstStyle/>
@@ -14870,7 +14743,7 @@
             <a:noFill/>
           </p:spPr>
           <p:txBody>
-            <a:bodyPr wrap="square" anchor="b" lIns="27432" rIns="27432" tIns="0" bIns="0">
+            <a:bodyPr wrap="square" lIns="27432" tIns="0" rIns="27432" bIns="0" anchor="b">
               <a:noAutofit/>
             </a:bodyPr>
             <a:lstStyle/>
@@ -14957,7 +14830,7 @@
             <a:noFill/>
           </p:spPr>
           <p:txBody>
-            <a:bodyPr wrap="square" anchor="b" lIns="27432" rIns="27432" tIns="0" bIns="0">
+            <a:bodyPr wrap="square" lIns="27432" tIns="0" rIns="27432" bIns="0" anchor="b">
               <a:noAutofit/>
             </a:bodyPr>
             <a:lstStyle/>
@@ -15044,7 +14917,7 @@
             <a:noFill/>
           </p:spPr>
           <p:txBody>
-            <a:bodyPr wrap="square" anchor="b" lIns="27432" rIns="27432" tIns="0" bIns="0">
+            <a:bodyPr wrap="square" lIns="27432" tIns="0" rIns="27432" bIns="0" anchor="b">
               <a:noAutofit/>
             </a:bodyPr>
             <a:lstStyle/>
@@ -15139,7 +15012,7 @@
             <a:noFill/>
           </p:spPr>
           <p:txBody>
-            <a:bodyPr wrap="square" anchor="b" lIns="27432" rIns="27432" tIns="0" bIns="0">
+            <a:bodyPr wrap="square" lIns="27432" tIns="0" rIns="27432" bIns="0" anchor="b">
               <a:noAutofit/>
             </a:bodyPr>
             <a:lstStyle/>
@@ -15217,7 +15090,6 @@
           </a:bodyPr>
           <a:lstStyle/>
           <a:p>
-            <a:pPr/>
             <a:r>
               <a:t>The first three messages are the </a:t>
             </a:r>
@@ -15257,7 +15129,7 @@
                             </p:stCondLst>
                             <p:childTnLst>
                               <p:par>
-                                <p:cTn id="5" presetID="1" presetClass="entr" presetSubtype="0" fill="hold" grpId="0" nodeType="clickEffect">
+                                <p:cTn id="5" presetID="1" presetClass="entr" presetSubtype="0" fill="hold" nodeType="clickEffect">
                                   <p:stCondLst>
                                     <p:cond delay="0"/>
                                   </p:stCondLst>
@@ -15302,7 +15174,7 @@
                             </p:stCondLst>
                             <p:childTnLst>
                               <p:par>
-                                <p:cTn id="9" presetID="1" presetClass="entr" presetSubtype="0" fill="hold" grpId="0" nodeType="clickEffect">
+                                <p:cTn id="9" presetID="1" presetClass="entr" presetSubtype="0" fill="hold" nodeType="clickEffect">
                                   <p:stCondLst>
                                     <p:cond delay="0"/>
                                   </p:stCondLst>
@@ -15347,7 +15219,7 @@
                             </p:stCondLst>
                             <p:childTnLst>
                               <p:par>
-                                <p:cTn id="13" presetID="1" presetClass="entr" presetSubtype="0" fill="hold" grpId="0" nodeType="clickEffect">
+                                <p:cTn id="13" presetID="1" presetClass="entr" presetSubtype="0" fill="hold" nodeType="clickEffect">
                                   <p:stCondLst>
                                     <p:cond delay="0"/>
                                   </p:stCondLst>
@@ -15392,7 +15264,7 @@
                             </p:stCondLst>
                             <p:childTnLst>
                               <p:par>
-                                <p:cTn id="17" presetID="1" presetClass="entr" presetSubtype="0" fill="hold" grpId="0" nodeType="clickEffect">
+                                <p:cTn id="17" presetID="1" presetClass="entr" presetSubtype="0" fill="hold" nodeType="clickEffect">
                                   <p:stCondLst>
                                     <p:cond delay="0"/>
                                   </p:stCondLst>
@@ -15437,7 +15309,7 @@
                             </p:stCondLst>
                             <p:childTnLst>
                               <p:par>
-                                <p:cTn id="21" presetID="1" presetClass="entr" presetSubtype="0" fill="hold" grpId="0" nodeType="clickEffect">
+                                <p:cTn id="21" presetID="1" presetClass="entr" presetSubtype="0" fill="hold" nodeType="clickEffect">
                                   <p:stCondLst>
                                     <p:cond delay="0"/>
                                   </p:stCondLst>
@@ -15482,7 +15354,7 @@
                             </p:stCondLst>
                             <p:childTnLst>
                               <p:par>
-                                <p:cTn id="25" presetID="1" presetClass="entr" presetSubtype="0" fill="hold" grpId="0" nodeType="clickEffect">
+                                <p:cTn id="25" presetID="1" presetClass="entr" presetSubtype="0" fill="hold" nodeType="clickEffect">
                                   <p:stCondLst>
                                     <p:cond delay="0"/>
                                   </p:stCondLst>
@@ -15527,7 +15399,7 @@
                             </p:stCondLst>
                             <p:childTnLst>
                               <p:par>
-                                <p:cTn id="29" presetID="1" presetClass="entr" presetSubtype="0" fill="hold" grpId="0" nodeType="clickEffect">
+                                <p:cTn id="29" presetID="1" presetClass="entr" presetSubtype="0" fill="hold" nodeType="clickEffect">
                                   <p:stCondLst>
                                     <p:cond delay="0"/>
                                   </p:stCondLst>
@@ -15637,7 +15509,7 @@
 </file>
 
 <file path=ppt/slides/slide24.xml><?xml version="1.0" encoding="utf-8"?>
-<p:sld xmlns:a="http://schemas.openxmlformats.org/drawingml/2006/main" xmlns:p="http://schemas.openxmlformats.org/presentationml/2006/main" xmlns:r="http://schemas.openxmlformats.org/officeDocument/2006/relationships">
+<p:sld xmlns:a="http://schemas.openxmlformats.org/drawingml/2006/main" xmlns:r="http://schemas.openxmlformats.org/officeDocument/2006/relationships" xmlns:p="http://schemas.openxmlformats.org/presentationml/2006/main">
   <p:cSld>
     <p:spTree>
       <p:nvGrpSpPr>
@@ -15645,7 +15517,14 @@
         <p:cNvGrpSpPr/>
         <p:nvPr/>
       </p:nvGrpSpPr>
-      <p:grpSpPr/>
+      <p:grpSpPr>
+        <a:xfrm>
+          <a:off x="0" y="0"/>
+          <a:ext cx="0" cy="0"/>
+          <a:chOff x="0" y="0"/>
+          <a:chExt cx="0" cy="0"/>
+        </a:xfrm>
+      </p:grpSpPr>
       <p:sp>
         <p:nvSpPr>
           <p:cNvPr id="2" name="Title 1"/>
@@ -15697,7 +15576,7 @@
             <a:spLocks noGrp="1"/>
           </p:cNvSpPr>
           <p:nvPr>
-            <p:ph idx="2" sz="half"/>
+            <p:ph sz="half" idx="2"/>
           </p:nvPr>
         </p:nvSpPr>
         <p:spPr>
@@ -15708,29 +15587,25 @@
         </p:spPr>
         <p:txBody>
           <a:bodyPr>
-            <a:normAutofit fontScale="85000"/>
+            <a:normAutofit fontScale="92500" lnSpcReduction="10000"/>
           </a:bodyPr>
           <a:lstStyle/>
           <a:p>
-            <a:pPr/>
             <a:r>
               <a:t>For a server on the same machine</a:t>
             </a:r>
           </a:p>
           <a:p>
-            <a:pPr/>
             <a:r>
               <a:t>The host starts the server as a child process</a:t>
             </a:r>
           </a:p>
           <a:p>
-            <a:pPr/>
             <a:r>
               <a:t>Messages travel over stdin and stdout</a:t>
             </a:r>
           </a:p>
           <a:p>
-            <a:pPr/>
             <a:r>
               <a:t>Simple: no network configuration needed</a:t>
             </a:r>
@@ -15744,7 +15619,7 @@
             <a:spLocks noGrp="1"/>
           </p:cNvSpPr>
           <p:nvPr>
-            <p:ph type="body" idx="3" sz="quarter"/>
+            <p:ph type="body" sz="quarter" idx="3"/>
           </p:nvPr>
         </p:nvSpPr>
         <p:spPr/>
@@ -15765,7 +15640,7 @@
             <a:spLocks noGrp="1"/>
           </p:cNvSpPr>
           <p:nvPr>
-            <p:ph idx="4" sz="quarter"/>
+            <p:ph sz="quarter" idx="4"/>
           </p:nvPr>
         </p:nvSpPr>
         <p:spPr>
@@ -15776,35 +15651,30 @@
         </p:spPr>
         <p:txBody>
           <a:bodyPr>
-            <a:normAutofit fontScale="85000"/>
+            <a:normAutofit fontScale="92500" lnSpcReduction="10000"/>
           </a:bodyPr>
           <a:lstStyle/>
           <a:p>
-            <a:pPr/>
             <a:r>
               <a:t>For a server somewhere else</a:t>
             </a:r>
           </a:p>
           <a:p>
-            <a:pPr/>
             <a:r>
               <a:t>The client sends each message as an HTTP POST</a:t>
             </a:r>
           </a:p>
           <a:p>
-            <a:pPr/>
             <a:r>
               <a:t>The server can stream its reply back</a:t>
             </a:r>
           </a:p>
           <a:p>
-            <a:pPr/>
             <a:r>
               <a:t>One server, many clients</a:t>
             </a:r>
           </a:p>
           <a:p>
-            <a:pPr/>
             <a:r>
               <a:t>It replaced </a:t>
             </a:r>
@@ -16302,7 +16172,7 @@
 </file>
 
 <file path=ppt/slides/slide25.xml><?xml version="1.0" encoding="utf-8"?>
-<p:sld xmlns:a="http://schemas.openxmlformats.org/drawingml/2006/main" xmlns:p="http://schemas.openxmlformats.org/presentationml/2006/main" xmlns:r="http://schemas.openxmlformats.org/officeDocument/2006/relationships">
+<p:sld xmlns:a="http://schemas.openxmlformats.org/drawingml/2006/main" xmlns:r="http://schemas.openxmlformats.org/officeDocument/2006/relationships" xmlns:p="http://schemas.openxmlformats.org/presentationml/2006/main">
   <p:cSld>
     <p:spTree>
       <p:nvGrpSpPr>
@@ -16310,7 +16180,14 @@
         <p:cNvGrpSpPr/>
         <p:nvPr/>
       </p:nvGrpSpPr>
-      <p:grpSpPr/>
+      <p:grpSpPr>
+        <a:xfrm>
+          <a:off x="0" y="0"/>
+          <a:ext cx="0" cy="0"/>
+          <a:chOff x="0" y="0"/>
+          <a:chExt cx="0" cy="0"/>
+        </a:xfrm>
+      </p:grpSpPr>
       <p:sp>
         <p:nvSpPr>
           <p:cNvPr id="2" name="Title 1"/>
@@ -16356,7 +16233,6 @@
           </a:bodyPr>
           <a:lstStyle/>
           <a:p>
-            <a:pPr/>
             <a:r>
               <a:rPr b="1"/>
               <a:t>Use it for</a:t>
@@ -16366,7 +16242,6 @@
             </a:r>
           </a:p>
           <a:p>
-            <a:pPr/>
             <a:r>
               <a:t>The host launches the server as a child process</a:t>
             </a:r>
@@ -16384,13 +16259,11 @@
             </a:r>
           </a:p>
           <a:p>
-            <a:pPr/>
             <a:r>
               <a:t>No network, no ports, no sign-in</a:t>
             </a:r>
           </a:p>
           <a:p>
-            <a:pPr/>
             <a:r>
               <a:t>The process </a:t>
             </a:r>
@@ -16403,7 +16276,6 @@
             </a:r>
           </a:p>
           <a:p>
-            <a:pPr/>
             <a:r>
               <a:t>Never print to stdout in a stdio server: stdout is the wire</a:t>
             </a:r>
@@ -16759,7 +16631,7 @@
 </file>
 
 <file path=ppt/slides/slide26.xml><?xml version="1.0" encoding="utf-8"?>
-<p:sld xmlns:a="http://schemas.openxmlformats.org/drawingml/2006/main" xmlns:p="http://schemas.openxmlformats.org/presentationml/2006/main" xmlns:r="http://schemas.openxmlformats.org/officeDocument/2006/relationships">
+<p:sld xmlns:a="http://schemas.openxmlformats.org/drawingml/2006/main" xmlns:r="http://schemas.openxmlformats.org/officeDocument/2006/relationships" xmlns:p="http://schemas.openxmlformats.org/presentationml/2006/main">
   <p:cSld>
     <p:spTree>
       <p:nvGrpSpPr>
@@ -16767,7 +16639,14 @@
         <p:cNvGrpSpPr/>
         <p:nvPr/>
       </p:nvGrpSpPr>
-      <p:grpSpPr/>
+      <p:grpSpPr>
+        <a:xfrm>
+          <a:off x="0" y="0"/>
+          <a:ext cx="0" cy="0"/>
+          <a:chOff x="0" y="0"/>
+          <a:chExt cx="0" cy="0"/>
+        </a:xfrm>
+      </p:grpSpPr>
       <p:sp>
         <p:nvSpPr>
           <p:cNvPr id="2" name="Title 1"/>
@@ -16813,7 +16692,6 @@
           </a:bodyPr>
           <a:lstStyle/>
           <a:p>
-            <a:pPr/>
             <a:r>
               <a:rPr b="1"/>
               <a:t>Use it for</a:t>
@@ -16823,25 +16701,21 @@
             </a:r>
           </a:p>
           <a:p>
-            <a:pPr/>
             <a:r>
               <a:t>The client sends an HTTP POST for each message</a:t>
             </a:r>
           </a:p>
           <a:p>
-            <a:pPr/>
             <a:r>
               <a:t>The server replies with JSON, or opens a stream for a longer answer</a:t>
             </a:r>
           </a:p>
           <a:p>
-            <a:pPr/>
             <a:r>
               <a:t>Works through firewalls, proxies and load balancers</a:t>
             </a:r>
           </a:p>
           <a:p>
-            <a:pPr/>
             <a:r>
               <a:t>Sign-in uses the web's own methods; MCP recommends OAuth</a:t>
             </a:r>
@@ -17135,7 +17009,7 @@
 </file>
 
 <file path=ppt/slides/slide27.xml><?xml version="1.0" encoding="utf-8"?>
-<p:sld xmlns:a="http://schemas.openxmlformats.org/drawingml/2006/main" xmlns:p="http://schemas.openxmlformats.org/presentationml/2006/main" xmlns:r="http://schemas.openxmlformats.org/officeDocument/2006/relationships">
+<p:sld xmlns:a="http://schemas.openxmlformats.org/drawingml/2006/main" xmlns:r="http://schemas.openxmlformats.org/officeDocument/2006/relationships" xmlns:p="http://schemas.openxmlformats.org/presentationml/2006/main">
   <p:cSld>
     <p:spTree>
       <p:nvGrpSpPr>
@@ -17143,7 +17017,14 @@
         <p:cNvGrpSpPr/>
         <p:nvPr/>
       </p:nvGrpSpPr>
-      <p:grpSpPr/>
+      <p:grpSpPr>
+        <a:xfrm>
+          <a:off x="0" y="0"/>
+          <a:ext cx="0" cy="0"/>
+          <a:chOff x="0" y="0"/>
+          <a:chExt cx="0" cy="0"/>
+        </a:xfrm>
+      </p:grpSpPr>
       <p:sp>
         <p:nvSpPr>
           <p:cNvPr id="2" name="Title 1"/>
@@ -17195,7 +17076,7 @@
             <a:spLocks noGrp="1"/>
           </p:cNvSpPr>
           <p:nvPr>
-            <p:ph idx="2" sz="half"/>
+            <p:ph sz="half" idx="2"/>
           </p:nvPr>
         </p:nvSpPr>
         <p:spPr>
@@ -17206,11 +17087,10 @@
         </p:spPr>
         <p:txBody>
           <a:bodyPr>
-            <a:normAutofit fontScale="77500"/>
+            <a:normAutofit fontScale="85000" lnSpcReduction="10000"/>
           </a:bodyPr>
           <a:lstStyle/>
           <a:p>
-            <a:pPr/>
             <a:r>
               <a:rPr b="1"/>
               <a:t>Filesystem</a:t>
@@ -17220,7 +17100,6 @@
             </a:r>
           </a:p>
           <a:p>
-            <a:pPr/>
             <a:r>
               <a:rPr b="1"/>
               <a:t>Git</a:t>
@@ -17230,7 +17109,6 @@
             </a:r>
           </a:p>
           <a:p>
-            <a:pPr/>
             <a:r>
               <a:rPr b="1"/>
               <a:t>Fetch</a:t>
@@ -17240,7 +17118,6 @@
             </a:r>
           </a:p>
           <a:p>
-            <a:pPr/>
             <a:r>
               <a:rPr b="1"/>
               <a:t>Memory</a:t>
@@ -17250,7 +17127,6 @@
             </a:r>
           </a:p>
           <a:p>
-            <a:pPr/>
             <a:r>
               <a:rPr b="1"/>
               <a:t>Time</a:t>
@@ -17268,7 +17144,7 @@
             <a:spLocks noGrp="1"/>
           </p:cNvSpPr>
           <p:nvPr>
-            <p:ph type="body" idx="3" sz="quarter"/>
+            <p:ph type="body" sz="quarter" idx="3"/>
           </p:nvPr>
         </p:nvSpPr>
         <p:spPr/>
@@ -17289,7 +17165,7 @@
             <a:spLocks noGrp="1"/>
           </p:cNvSpPr>
           <p:nvPr>
-            <p:ph idx="4" sz="quarter"/>
+            <p:ph sz="quarter" idx="4"/>
           </p:nvPr>
         </p:nvSpPr>
         <p:spPr>
@@ -17300,11 +17176,10 @@
         </p:spPr>
         <p:txBody>
           <a:bodyPr>
-            <a:normAutofit fontScale="77500"/>
+            <a:normAutofit fontScale="85000" lnSpcReduction="10000"/>
           </a:bodyPr>
           <a:lstStyle/>
           <a:p>
-            <a:pPr/>
             <a:r>
               <a:rPr b="1"/>
               <a:t>GitHub</a:t>
@@ -17314,7 +17189,6 @@
             </a:r>
           </a:p>
           <a:p>
-            <a:pPr/>
             <a:r>
               <a:rPr b="1"/>
               <a:t>Playwright</a:t>
@@ -17324,7 +17198,6 @@
             </a:r>
           </a:p>
           <a:p>
-            <a:pPr/>
             <a:r>
               <a:rPr b="1"/>
               <a:t>Sentry</a:t>
@@ -17353,7 +17226,7 @@
         </p:spPr>
         <p:txBody>
           <a:bodyPr wrap="square">
-            <a:normAutofit fontScale="77500"/>
+            <a:normAutofit fontScale="77500" lnSpcReduction="10000"/>
           </a:bodyPr>
           <a:lstStyle>
             <a:lvl1pPr marL="228600" indent="-228600" algn="l" defTabSz="914400" rtl="0" eaLnBrk="1" latinLnBrk="0" hangingPunct="1">
@@ -17520,7 +17393,6 @@
             </a:lvl9pPr>
           </a:lstStyle>
           <a:p>
-            <a:pPr/>
             <a:r>
               <a:t>The 2025 reference servers for GitHub, Slack and PostgreSQL are archived. The official MCP Registry lists current ones</a:t>
             </a:r>
@@ -18012,7 +17884,7 @@
 </file>
 
 <file path=ppt/slides/slide28.xml><?xml version="1.0" encoding="utf-8"?>
-<p:sld xmlns:a="http://schemas.openxmlformats.org/drawingml/2006/main" xmlns:p="http://schemas.openxmlformats.org/presentationml/2006/main" xmlns:r="http://schemas.openxmlformats.org/officeDocument/2006/relationships">
+<p:sld xmlns:a="http://schemas.openxmlformats.org/drawingml/2006/main" xmlns:r="http://schemas.openxmlformats.org/officeDocument/2006/relationships" xmlns:p="http://schemas.openxmlformats.org/presentationml/2006/main">
   <p:cSld>
     <p:spTree>
       <p:nvGrpSpPr>
@@ -18020,7 +17892,14 @@
         <p:cNvGrpSpPr/>
         <p:nvPr/>
       </p:nvGrpSpPr>
-      <p:grpSpPr/>
+      <p:grpSpPr>
+        <a:xfrm>
+          <a:off x="0" y="0"/>
+          <a:ext cx="0" cy="0"/>
+          <a:chOff x="0" y="0"/>
+          <a:chExt cx="0" cy="0"/>
+        </a:xfrm>
+      </p:grpSpPr>
       <p:sp>
         <p:nvSpPr>
           <p:cNvPr id="2" name="Title 1"/>
@@ -18062,7 +17941,7 @@
         </p:spPr>
         <p:txBody>
           <a:bodyPr>
-            <a:normAutofit fontScale="92500"/>
+            <a:normAutofit fontScale="92500" lnSpcReduction="10000"/>
           </a:bodyPr>
           <a:lstStyle/>
           <a:p>
@@ -18123,7 +18002,7 @@
           </a:fontRef>
         </p:style>
         <p:txBody>
-          <a:bodyPr rtlCol="0" anchor="t" wrap="none" lIns="137160" rIns="137160" tIns="91440" bIns="91440">
+          <a:bodyPr wrap="none" lIns="137160" tIns="91440" rIns="137160" bIns="91440" rtlCol="0" anchor="t">
             <a:noAutofit/>
           </a:bodyPr>
           <a:lstStyle/>
@@ -18386,7 +18265,7 @@
         </p:spPr>
         <p:txBody>
           <a:bodyPr wrap="square">
-            <a:normAutofit fontScale="92500"/>
+            <a:normAutofit lnSpcReduction="10000"/>
           </a:bodyPr>
           <a:lstStyle>
             <a:lvl1pPr marL="228600" indent="-228600" algn="l" defTabSz="914400" rtl="0" eaLnBrk="1" latinLnBrk="0" hangingPunct="1">
@@ -18553,7 +18432,6 @@
             </a:lvl9pPr>
           </a:lstStyle>
           <a:p>
-            <a:pPr/>
             <a:r>
               <a:rPr>
                 <a:latin typeface="Consolas"/>
@@ -18581,13 +18459,11 @@
             </a:r>
           </a:p>
           <a:p>
-            <a:pPr/>
             <a:r>
               <a:t>The last argument is the only folder this server may touch</a:t>
             </a:r>
           </a:p>
           <a:p>
-            <a:pPr/>
             <a:r>
               <a:t>A remote server has a </a:t>
             </a:r>
@@ -18798,7 +18674,7 @@
 </file>
 
 <file path=ppt/slides/slide29.xml><?xml version="1.0" encoding="utf-8"?>
-<p:sld xmlns:a="http://schemas.openxmlformats.org/drawingml/2006/main" xmlns:p="http://schemas.openxmlformats.org/presentationml/2006/main" xmlns:r="http://schemas.openxmlformats.org/officeDocument/2006/relationships">
+<p:sld xmlns:a="http://schemas.openxmlformats.org/drawingml/2006/main" xmlns:r="http://schemas.openxmlformats.org/officeDocument/2006/relationships" xmlns:p="http://schemas.openxmlformats.org/presentationml/2006/main">
   <p:cSld>
     <p:spTree>
       <p:nvGrpSpPr>
@@ -18806,7 +18682,14 @@
         <p:cNvGrpSpPr/>
         <p:nvPr/>
       </p:nvGrpSpPr>
-      <p:grpSpPr/>
+      <p:grpSpPr>
+        <a:xfrm>
+          <a:off x="0" y="0"/>
+          <a:ext cx="0" cy="0"/>
+          <a:chOff x="0" y="0"/>
+          <a:chExt cx="0" cy="0"/>
+        </a:xfrm>
+      </p:grpSpPr>
       <p:sp>
         <p:nvSpPr>
           <p:cNvPr id="2" name="Title 1"/>
@@ -18869,7 +18752,7 @@
           </a:fontRef>
         </p:style>
         <p:txBody>
-          <a:bodyPr rtlCol="0" anchor="t" wrap="none" lIns="137160" rIns="137160" tIns="91440" bIns="91440">
+          <a:bodyPr wrap="none" lIns="137160" tIns="91440" rIns="137160" bIns="91440" rtlCol="0" anchor="t">
             <a:noAutofit/>
           </a:bodyPr>
           <a:lstStyle/>
@@ -20352,7 +20235,7 @@
 </file>
 
 <file path=ppt/slides/slide3.xml><?xml version="1.0" encoding="utf-8"?>
-<p:sld xmlns:a="http://schemas.openxmlformats.org/drawingml/2006/main" xmlns:p="http://schemas.openxmlformats.org/presentationml/2006/main" xmlns:r="http://schemas.openxmlformats.org/officeDocument/2006/relationships">
+<p:sld xmlns:a="http://schemas.openxmlformats.org/drawingml/2006/main" xmlns:r="http://schemas.openxmlformats.org/officeDocument/2006/relationships" xmlns:p="http://schemas.openxmlformats.org/presentationml/2006/main">
   <p:cSld>
     <p:spTree>
       <p:nvGrpSpPr>
@@ -20360,7 +20243,14 @@
         <p:cNvGrpSpPr/>
         <p:nvPr/>
       </p:nvGrpSpPr>
-      <p:grpSpPr/>
+      <p:grpSpPr>
+        <a:xfrm>
+          <a:off x="0" y="0"/>
+          <a:ext cx="0" cy="0"/>
+          <a:chOff x="0" y="0"/>
+          <a:chExt cx="0" cy="0"/>
+        </a:xfrm>
+      </p:grpSpPr>
       <p:sp>
         <p:nvSpPr>
           <p:cNvPr id="2" name="Title 1"/>
@@ -20379,8 +20269,10 @@
           <a:lstStyle/>
           <a:p>
             <a:r>
-              <a:t>Some arithmetic</a:t>
-            </a:r>
+              <a:rPr lang="en-US" dirty="0"/>
+              <a:t>The problem MCP solves…</a:t>
+            </a:r>
+            <a:endParaRPr dirty="0"/>
           </a:p>
         </p:txBody>
       </p:sp>
@@ -20402,7 +20294,7 @@
         </p:spPr>
         <p:txBody>
           <a:bodyPr>
-            <a:normAutofit/>
+            <a:normAutofit lnSpcReduction="10000"/>
           </a:bodyPr>
           <a:lstStyle/>
           <a:p>
@@ -20410,49 +20302,62 @@
               <a:buNone/>
             </a:pPr>
             <a:r>
+              <a:rPr dirty="0"/>
               <a:t>You have </a:t>
             </a:r>
             <a:r>
-              <a:rPr b="1"/>
+              <a:rPr b="1" dirty="0"/>
               <a:t>6</a:t>
             </a:r>
             <a:r>
+              <a:rPr dirty="0"/>
               <a:t> AI assistants and </a:t>
             </a:r>
             <a:r>
-              <a:rPr b="1"/>
+              <a:rPr b="1" dirty="0"/>
               <a:t>5</a:t>
             </a:r>
             <a:r>
+              <a:rPr dirty="0"/>
               <a:t> systems they should reach: your files, a database, an issue tracker, a calendar and a weather API.</a:t>
             </a:r>
-          </a:p>
-          <a:p>
-            <a:pPr/>
-            <a:r>
+            <a:endParaRPr lang="en-US" dirty="0"/>
+          </a:p>
+          <a:p>
+            <a:pPr marL="0" indent="0">
+              <a:buNone/>
+            </a:pPr>
+            <a:endParaRPr dirty="0"/>
+          </a:p>
+          <a:p>
+            <a:r>
+              <a:rPr dirty="0"/>
               <a:t>Every assistant needs its own connector to every system</a:t>
             </a:r>
           </a:p>
           <a:p>
-            <a:pPr/>
-            <a:r>
+            <a:r>
+              <a:rPr dirty="0"/>
               <a:t>How many connectors is that?</a:t>
             </a:r>
           </a:p>
           <a:p>
-            <a:pPr/>
-            <a:r>
-              <a:rPr b="1"/>
+            <a:r>
+              <a:rPr b="1" dirty="0"/>
               <a:t>6 × 5 = 30.</a:t>
             </a:r>
             <a:r>
+              <a:rPr dirty="0"/>
               <a:t> A seventh assistant means 5 more; a sixth system means 6 more</a:t>
             </a:r>
-          </a:p>
-          <a:p>
-            <a:pPr/>
-            <a:r>
-              <a:rPr b="1"/>
+            <a:endParaRPr lang="en-US" dirty="0"/>
+          </a:p>
+          <a:p>
+            <a:endParaRPr dirty="0"/>
+          </a:p>
+          <a:p>
+            <a:r>
+              <a:rPr b="1" dirty="0"/>
               <a:t>How do you connect every assistant to every system without writing 30 connectors?</a:t>
             </a:r>
           </a:p>
@@ -20499,7 +20404,7 @@
                                         <p:tgtEl>
                                           <p:spTgt spid="3">
                                             <p:txEl>
-                                              <p:pRg st="1" end="1"/>
+                                              <p:pRg st="2" end="2"/>
                                             </p:txEl>
                                           </p:spTgt>
                                         </p:tgtEl>
@@ -20548,7 +20453,7 @@
                                         <p:tgtEl>
                                           <p:spTgt spid="3">
                                             <p:txEl>
-                                              <p:pRg st="2" end="2"/>
+                                              <p:pRg st="3" end="3"/>
                                             </p:txEl>
                                           </p:spTgt>
                                         </p:tgtEl>
@@ -20597,7 +20502,7 @@
                                         <p:tgtEl>
                                           <p:spTgt spid="3">
                                             <p:txEl>
-                                              <p:pRg st="3" end="3"/>
+                                              <p:pRg st="4" end="4"/>
                                             </p:txEl>
                                           </p:spTgt>
                                         </p:tgtEl>
@@ -20646,7 +20551,7 @@
                                         <p:tgtEl>
                                           <p:spTgt spid="3">
                                             <p:txEl>
-                                              <p:pRg st="4" end="4"/>
+                                              <p:pRg st="6" end="6"/>
                                             </p:txEl>
                                           </p:spTgt>
                                         </p:tgtEl>
@@ -20696,7 +20601,7 @@
 </file>
 
 <file path=ppt/slides/slide30.xml><?xml version="1.0" encoding="utf-8"?>
-<p:sld xmlns:a="http://schemas.openxmlformats.org/drawingml/2006/main" xmlns:p="http://schemas.openxmlformats.org/presentationml/2006/main" xmlns:r="http://schemas.openxmlformats.org/officeDocument/2006/relationships">
+<p:sld xmlns:a="http://schemas.openxmlformats.org/drawingml/2006/main" xmlns:r="http://schemas.openxmlformats.org/officeDocument/2006/relationships" xmlns:p="http://schemas.openxmlformats.org/presentationml/2006/main">
   <p:cSld>
     <p:spTree>
       <p:nvGrpSpPr>
@@ -20704,7 +20609,14 @@
         <p:cNvGrpSpPr/>
         <p:nvPr/>
       </p:nvGrpSpPr>
-      <p:grpSpPr/>
+      <p:grpSpPr>
+        <a:xfrm>
+          <a:off x="0" y="0"/>
+          <a:ext cx="0" cy="0"/>
+          <a:chOff x="0" y="0"/>
+          <a:chExt cx="0" cy="0"/>
+        </a:xfrm>
+      </p:grpSpPr>
       <p:sp>
         <p:nvSpPr>
           <p:cNvPr id="2" name="Title 1"/>
@@ -20750,7 +20662,6 @@
           </a:bodyPr>
           <a:lstStyle/>
           <a:p>
-            <a:pPr/>
             <a:r>
               <a:rPr>
                 <a:latin typeface="Consolas"/>
@@ -20778,7 +20689,6 @@
             </a:r>
           </a:p>
           <a:p>
-            <a:pPr/>
             <a:r>
               <a:rPr>
                 <a:latin typeface="Consolas"/>
@@ -20806,13 +20716,11 @@
             </a:r>
           </a:p>
           <a:p>
-            <a:pPr/>
             <a:r>
               <a:t>Add a tool to one and not the other, and it is listed but fails when called</a:t>
             </a:r>
           </a:p>
           <a:p>
-            <a:pPr/>
             <a:r>
               <a:t>This is the Python SDK: </a:t>
             </a:r>
@@ -20827,7 +20735,6 @@
             </a:r>
           </a:p>
           <a:p>
-            <a:pPr/>
             <a:r>
               <a:t>Building a first server takes minutes, not days</a:t>
             </a:r>
@@ -21121,7 +21028,7 @@
 </file>
 
 <file path=ppt/slides/slide31.xml><?xml version="1.0" encoding="utf-8"?>
-<p:sld xmlns:a="http://schemas.openxmlformats.org/drawingml/2006/main" xmlns:p="http://schemas.openxmlformats.org/presentationml/2006/main" xmlns:r="http://schemas.openxmlformats.org/officeDocument/2006/relationships">
+<p:sld xmlns:a="http://schemas.openxmlformats.org/drawingml/2006/main" xmlns:r="http://schemas.openxmlformats.org/officeDocument/2006/relationships" xmlns:p="http://schemas.openxmlformats.org/presentationml/2006/main">
   <p:cSld>
     <p:spTree>
       <p:nvGrpSpPr>
@@ -21129,7 +21036,14 @@
         <p:cNvGrpSpPr/>
         <p:nvPr/>
       </p:nvGrpSpPr>
-      <p:grpSpPr/>
+      <p:grpSpPr>
+        <a:xfrm>
+          <a:off x="0" y="0"/>
+          <a:ext cx="0" cy="0"/>
+          <a:chOff x="0" y="0"/>
+          <a:chExt cx="0" cy="0"/>
+        </a:xfrm>
+      </p:grpSpPr>
       <p:sp>
         <p:nvSpPr>
           <p:cNvPr id="2" name="Title 1"/>
@@ -21181,7 +21095,7 @@
             <a:spLocks noGrp="1"/>
           </p:cNvSpPr>
           <p:nvPr>
-            <p:ph idx="2" sz="half"/>
+            <p:ph sz="half" idx="2"/>
           </p:nvPr>
         </p:nvSpPr>
         <p:spPr>
@@ -21196,25 +21110,21 @@
           </a:bodyPr>
           <a:lstStyle/>
           <a:p>
-            <a:pPr/>
             <a:r>
               <a:t>Discovery: read the documentation first</a:t>
             </a:r>
           </a:p>
           <a:p>
-            <a:pPr/>
             <a:r>
               <a:t>Every API has its own format and sign-in</a:t>
             </a:r>
           </a:p>
           <a:p>
-            <a:pPr/>
             <a:r>
               <a:t>Custom code for every integration</a:t>
             </a:r>
           </a:p>
           <a:p>
-            <a:pPr/>
             <a:r>
               <a:t>Written for a programmer to call</a:t>
             </a:r>
@@ -21228,7 +21138,7 @@
             <a:spLocks noGrp="1"/>
           </p:cNvSpPr>
           <p:nvPr>
-            <p:ph type="body" idx="3" sz="quarter"/>
+            <p:ph type="body" sz="quarter" idx="3"/>
           </p:nvPr>
         </p:nvSpPr>
         <p:spPr/>
@@ -21249,7 +21159,7 @@
             <a:spLocks noGrp="1"/>
           </p:cNvSpPr>
           <p:nvPr>
-            <p:ph idx="4" sz="quarter"/>
+            <p:ph sz="quarter" idx="4"/>
           </p:nvPr>
         </p:nvSpPr>
         <p:spPr>
@@ -21264,7 +21174,6 @@
           </a:bodyPr>
           <a:lstStyle/>
           <a:p>
-            <a:pPr/>
             <a:r>
               <a:t>Discovery: ask at run time with </a:t>
             </a:r>
@@ -21276,19 +21185,16 @@
             </a:r>
           </a:p>
           <a:p>
-            <a:pPr/>
             <a:r>
               <a:t>One protocol across every server</a:t>
             </a:r>
           </a:p>
           <a:p>
-            <a:pPr/>
             <a:r>
               <a:t>Write the client once, connect to any server</a:t>
             </a:r>
           </a:p>
           <a:p>
-            <a:pPr/>
             <a:r>
               <a:t>Described so that a model can choose what to call</a:t>
             </a:r>
@@ -21730,7 +21636,7 @@
 </file>
 
 <file path=ppt/slides/slide32.xml><?xml version="1.0" encoding="utf-8"?>
-<p:sld xmlns:a="http://schemas.openxmlformats.org/drawingml/2006/main" xmlns:p="http://schemas.openxmlformats.org/presentationml/2006/main" xmlns:r="http://schemas.openxmlformats.org/officeDocument/2006/relationships">
+<p:sld xmlns:a="http://schemas.openxmlformats.org/drawingml/2006/main" xmlns:r="http://schemas.openxmlformats.org/officeDocument/2006/relationships" xmlns:p="http://schemas.openxmlformats.org/presentationml/2006/main">
   <p:cSld>
     <p:spTree>
       <p:nvGrpSpPr>
@@ -21738,7 +21644,14 @@
         <p:cNvGrpSpPr/>
         <p:nvPr/>
       </p:nvGrpSpPr>
-      <p:grpSpPr/>
+      <p:grpSpPr>
+        <a:xfrm>
+          <a:off x="0" y="0"/>
+          <a:ext cx="0" cy="0"/>
+          <a:chOff x="0" y="0"/>
+          <a:chExt cx="0" cy="0"/>
+        </a:xfrm>
+      </p:grpSpPr>
       <p:sp>
         <p:nvSpPr>
           <p:cNvPr id="2" name="Title 1"/>
@@ -21790,7 +21703,7 @@
             <a:spLocks noGrp="1"/>
           </p:cNvSpPr>
           <p:nvPr>
-            <p:ph idx="2" sz="half"/>
+            <p:ph sz="half" idx="2"/>
           </p:nvPr>
         </p:nvSpPr>
         <p:spPr>
@@ -21801,29 +21714,25 @@
         </p:spPr>
         <p:txBody>
           <a:bodyPr>
-            <a:normAutofit fontScale="85000"/>
+            <a:normAutofit fontScale="92500"/>
           </a:bodyPr>
           <a:lstStyle/>
           <a:p>
-            <a:pPr/>
             <a:r>
               <a:t>An AI agent needs tools or data</a:t>
             </a:r>
           </a:p>
           <a:p>
-            <a:pPr/>
             <a:r>
               <a:t>It should discover what it can do at run time</a:t>
             </a:r>
           </a:p>
           <a:p>
-            <a:pPr/>
             <a:r>
               <a:t>One assistant must reach many systems</a:t>
             </a:r>
           </a:p>
           <a:p>
-            <a:pPr/>
             <a:r>
               <a:t>What is needed keeps changing</a:t>
             </a:r>
@@ -21837,7 +21746,7 @@
             <a:spLocks noGrp="1"/>
           </p:cNvSpPr>
           <p:nvPr>
-            <p:ph type="body" idx="3" sz="quarter"/>
+            <p:ph type="body" sz="quarter" idx="3"/>
           </p:nvPr>
         </p:nvSpPr>
         <p:spPr/>
@@ -21858,7 +21767,7 @@
             <a:spLocks noGrp="1"/>
           </p:cNvSpPr>
           <p:nvPr>
-            <p:ph idx="4" sz="quarter"/>
+            <p:ph sz="quarter" idx="4"/>
           </p:nvPr>
         </p:nvSpPr>
         <p:spPr>
@@ -21869,23 +21778,20 @@
         </p:spPr>
         <p:txBody>
           <a:bodyPr>
-            <a:normAutofit fontScale="85000"/>
+            <a:normAutofit fontScale="92500"/>
           </a:bodyPr>
           <a:lstStyle/>
           <a:p>
-            <a:pPr/>
             <a:r>
               <a:t>You need maximum speed and throughput</a:t>
             </a:r>
           </a:p>
           <a:p>
-            <a:pPr/>
             <a:r>
               <a:t>It is fixed, program-to-program communication</a:t>
             </a:r>
           </a:p>
           <a:p>
-            <a:pPr/>
             <a:r>
               <a:t>No AI is involved</a:t>
             </a:r>
@@ -21910,7 +21816,7 @@
         </p:spPr>
         <p:txBody>
           <a:bodyPr wrap="square">
-            <a:normAutofit fontScale="85000"/>
+            <a:normAutofit fontScale="85000" lnSpcReduction="10000"/>
           </a:bodyPr>
           <a:lstStyle>
             <a:lvl1pPr marL="228600" indent="-228600" algn="l" defTabSz="914400" rtl="0" eaLnBrk="1" latinLnBrk="0" hangingPunct="1">
@@ -22077,7 +21983,6 @@
             </a:lvl9pPr>
           </a:lstStyle>
           <a:p>
-            <a:pPr/>
             <a:r>
               <a:t>Often both: an MCP server is usually a thin layer over an API that already exists</a:t>
             </a:r>
@@ -22520,7 +22425,7 @@
 </file>
 
 <file path=ppt/slides/slide33.xml><?xml version="1.0" encoding="utf-8"?>
-<p:sld xmlns:a="http://schemas.openxmlformats.org/drawingml/2006/main" xmlns:p="http://schemas.openxmlformats.org/presentationml/2006/main" xmlns:r="http://schemas.openxmlformats.org/officeDocument/2006/relationships">
+<p:sld xmlns:a="http://schemas.openxmlformats.org/drawingml/2006/main" xmlns:r="http://schemas.openxmlformats.org/officeDocument/2006/relationships" xmlns:p="http://schemas.openxmlformats.org/presentationml/2006/main">
   <p:cSld>
     <p:spTree>
       <p:nvGrpSpPr>
@@ -22528,7 +22433,14 @@
         <p:cNvGrpSpPr/>
         <p:nvPr/>
       </p:nvGrpSpPr>
-      <p:grpSpPr/>
+      <p:grpSpPr>
+        <a:xfrm>
+          <a:off x="0" y="0"/>
+          <a:ext cx="0" cy="0"/>
+          <a:chOff x="0" y="0"/>
+          <a:chExt cx="0" cy="0"/>
+        </a:xfrm>
+      </p:grpSpPr>
       <p:sp>
         <p:nvSpPr>
           <p:cNvPr id="2" name="Title 1"/>
@@ -22580,7 +22492,7 @@
             <a:spLocks noGrp="1"/>
           </p:cNvSpPr>
           <p:nvPr>
-            <p:ph idx="2" sz="half"/>
+            <p:ph sz="half" idx="2"/>
           </p:nvPr>
         </p:nvSpPr>
         <p:spPr>
@@ -22595,25 +22507,21 @@
           </a:bodyPr>
           <a:lstStyle/>
           <a:p>
-            <a:pPr/>
             <a:r>
               <a:t>Less integration work: one protocol to learn</a:t>
             </a:r>
           </a:p>
           <a:p>
-            <a:pPr/>
             <a:r>
               <a:t>Add a server without changing the client</a:t>
             </a:r>
           </a:p>
           <a:p>
-            <a:pPr/>
             <a:r>
               <a:t>The AI discovers new tools by itself</a:t>
             </a:r>
           </a:p>
           <a:p>
-            <a:pPr/>
             <a:r>
               <a:t>A large ecosystem of ready-made servers</a:t>
             </a:r>
@@ -22627,7 +22535,7 @@
             <a:spLocks noGrp="1"/>
           </p:cNvSpPr>
           <p:nvPr>
-            <p:ph type="body" idx="3" sz="quarter"/>
+            <p:ph type="body" sz="quarter" idx="3"/>
           </p:nvPr>
         </p:nvSpPr>
         <p:spPr/>
@@ -22648,7 +22556,7 @@
             <a:spLocks noGrp="1"/>
           </p:cNvSpPr>
           <p:nvPr>
-            <p:ph idx="4" sz="quarter"/>
+            <p:ph sz="quarter" idx="4"/>
           </p:nvPr>
         </p:nvSpPr>
         <p:spPr>
@@ -22663,25 +22571,21 @@
           </a:bodyPr>
           <a:lstStyle/>
           <a:p>
-            <a:pPr/>
             <a:r>
               <a:t>Security: a server acts with your access</a:t>
             </a:r>
           </a:p>
           <a:p>
-            <a:pPr/>
             <a:r>
               <a:t>Every tool description uses up context</a:t>
             </a:r>
           </a:p>
           <a:p>
-            <a:pPr/>
             <a:r>
               <a:t>An extra layer: not for high-frequency calls</a:t>
             </a:r>
           </a:p>
           <a:p>
-            <a:pPr/>
             <a:r>
               <a:t>A young standard that is still changing</a:t>
             </a:r>
@@ -23123,7 +23027,7 @@
 </file>
 
 <file path=ppt/slides/slide34.xml><?xml version="1.0" encoding="utf-8"?>
-<p:sld xmlns:a="http://schemas.openxmlformats.org/drawingml/2006/main" xmlns:p="http://schemas.openxmlformats.org/presentationml/2006/main" xmlns:r="http://schemas.openxmlformats.org/officeDocument/2006/relationships">
+<p:sld xmlns:a="http://schemas.openxmlformats.org/drawingml/2006/main" xmlns:r="http://schemas.openxmlformats.org/officeDocument/2006/relationships" xmlns:p="http://schemas.openxmlformats.org/presentationml/2006/main">
   <p:cSld>
     <p:spTree>
       <p:nvGrpSpPr>
@@ -23131,7 +23035,14 @@
         <p:cNvGrpSpPr/>
         <p:nvPr/>
       </p:nvGrpSpPr>
-      <p:grpSpPr/>
+      <p:grpSpPr>
+        <a:xfrm>
+          <a:off x="0" y="0"/>
+          <a:ext cx="0" cy="0"/>
+          <a:chOff x="0" y="0"/>
+          <a:chExt cx="0" cy="0"/>
+        </a:xfrm>
+      </p:grpSpPr>
       <p:sp>
         <p:nvSpPr>
           <p:cNvPr id="2" name="Title 1"/>
@@ -23189,31 +23100,26 @@
             </a:r>
           </a:p>
           <a:p>
-            <a:pPr/>
             <a:r>
               <a:t>Looks the customer up in the CRM</a:t>
             </a:r>
           </a:p>
           <a:p>
-            <a:pPr/>
             <a:r>
               <a:t>Searches the internal documents</a:t>
             </a:r>
           </a:p>
           <a:p>
-            <a:pPr/>
             <a:r>
               <a:t>Checks the order in the database</a:t>
             </a:r>
           </a:p>
           <a:p>
-            <a:pPr/>
             <a:r>
               <a:t>Sends the follow-up email</a:t>
             </a:r>
           </a:p>
           <a:p>
-            <a:pPr/>
             <a:r>
               <a:t>Opens a ticket if it cannot resolve the issue</a:t>
             </a:r>
@@ -23515,7 +23421,7 @@
 </file>
 
 <file path=ppt/slides/slide35.xml><?xml version="1.0" encoding="utf-8"?>
-<p:sld xmlns:a="http://schemas.openxmlformats.org/drawingml/2006/main" xmlns:p="http://schemas.openxmlformats.org/presentationml/2006/main" xmlns:r="http://schemas.openxmlformats.org/officeDocument/2006/relationships">
+<p:sld xmlns:a="http://schemas.openxmlformats.org/drawingml/2006/main" xmlns:r="http://schemas.openxmlformats.org/officeDocument/2006/relationships" xmlns:p="http://schemas.openxmlformats.org/presentationml/2006/main">
   <p:cSld>
     <p:spTree>
       <p:nvGrpSpPr>
@@ -23523,7 +23429,14 @@
         <p:cNvGrpSpPr/>
         <p:nvPr/>
       </p:nvGrpSpPr>
-      <p:grpSpPr/>
+      <p:grpSpPr>
+        <a:xfrm>
+          <a:off x="0" y="0"/>
+          <a:ext cx="0" cy="0"/>
+          <a:chOff x="0" y="0"/>
+          <a:chExt cx="0" cy="0"/>
+        </a:xfrm>
+      </p:grpSpPr>
       <p:sp>
         <p:nvSpPr>
           <p:cNvPr id="2" name="Title 1"/>
@@ -23577,7 +23490,7 @@
 </file>
 
 <file path=ppt/slides/slide36.xml><?xml version="1.0" encoding="utf-8"?>
-<p:sld xmlns:a="http://schemas.openxmlformats.org/drawingml/2006/main" xmlns:p="http://schemas.openxmlformats.org/presentationml/2006/main" xmlns:r="http://schemas.openxmlformats.org/officeDocument/2006/relationships">
+<p:sld xmlns:a="http://schemas.openxmlformats.org/drawingml/2006/main" xmlns:r="http://schemas.openxmlformats.org/officeDocument/2006/relationships" xmlns:p="http://schemas.openxmlformats.org/presentationml/2006/main">
   <p:cSld>
     <p:spTree>
       <p:nvGrpSpPr>
@@ -23585,7 +23498,14 @@
         <p:cNvGrpSpPr/>
         <p:nvPr/>
       </p:nvGrpSpPr>
-      <p:grpSpPr/>
+      <p:grpSpPr>
+        <a:xfrm>
+          <a:off x="0" y="0"/>
+          <a:ext cx="0" cy="0"/>
+          <a:chOff x="0" y="0"/>
+          <a:chExt cx="0" cy="0"/>
+        </a:xfrm>
+      </p:grpSpPr>
       <p:sp>
         <p:nvSpPr>
           <p:cNvPr id="2" name="Title 1"/>
@@ -23662,7 +23582,7 @@
             </a:fontRef>
           </p:style>
           <p:txBody>
-            <a:bodyPr rtlCol="0" anchor="ctr" wrap="square" lIns="109728" rIns="109728" tIns="54864" bIns="54864">
+            <a:bodyPr wrap="square" lIns="109728" tIns="54864" rIns="109728" bIns="54864" rtlCol="0" anchor="ctr">
               <a:noAutofit/>
             </a:bodyPr>
             <a:lstStyle/>
@@ -23718,7 +23638,7 @@
             </a:fontRef>
           </p:style>
           <p:txBody>
-            <a:bodyPr rtlCol="0" anchor="ctr" wrap="square" lIns="109728" rIns="109728" tIns="54864" bIns="54864">
+            <a:bodyPr wrap="square" lIns="109728" tIns="54864" rIns="109728" bIns="54864" rtlCol="0" anchor="ctr">
               <a:noAutofit/>
             </a:bodyPr>
             <a:lstStyle/>
@@ -23774,7 +23694,7 @@
             </a:fontRef>
           </p:style>
           <p:txBody>
-            <a:bodyPr rtlCol="0" anchor="ctr" wrap="square" lIns="109728" rIns="109728" tIns="54864" bIns="54864">
+            <a:bodyPr wrap="square" lIns="109728" tIns="54864" rIns="109728" bIns="54864" rtlCol="0" anchor="ctr">
               <a:noAutofit/>
             </a:bodyPr>
             <a:lstStyle/>
@@ -23830,7 +23750,7 @@
             </a:fontRef>
           </p:style>
           <p:txBody>
-            <a:bodyPr rtlCol="0" anchor="ctr" wrap="square" lIns="109728" rIns="109728" tIns="54864" bIns="54864">
+            <a:bodyPr wrap="square" lIns="109728" tIns="54864" rIns="109728" bIns="54864" rtlCol="0" anchor="ctr">
               <a:noAutofit/>
             </a:bodyPr>
             <a:lstStyle/>
@@ -23987,19 +23907,16 @@
           </a:bodyPr>
           <a:lstStyle/>
           <a:p>
-            <a:pPr/>
             <a:r>
               <a:t>More than 10,000 MCP servers had been published by December 2025</a:t>
             </a:r>
           </a:p>
           <a:p>
-            <a:pPr/>
             <a:r>
               <a:t>The Python and TypeScript SDKs have each passed a billion downloads</a:t>
             </a:r>
           </a:p>
           <a:p>
-            <a:pPr/>
             <a:r>
               <a:t>Its home, the Agentic AI Foundation, counts Anthropic, OpenAI, Google, Microsoft and AWS as members</a:t>
             </a:r>
@@ -24195,7 +24112,7 @@
 </file>
 
 <file path=ppt/slides/slide37.xml><?xml version="1.0" encoding="utf-8"?>
-<p:sld xmlns:a="http://schemas.openxmlformats.org/drawingml/2006/main" xmlns:p="http://schemas.openxmlformats.org/presentationml/2006/main" xmlns:r="http://schemas.openxmlformats.org/officeDocument/2006/relationships">
+<p:sld xmlns:a="http://schemas.openxmlformats.org/drawingml/2006/main" xmlns:r="http://schemas.openxmlformats.org/officeDocument/2006/relationships" xmlns:p="http://schemas.openxmlformats.org/presentationml/2006/main">
   <p:cSld>
     <p:spTree>
       <p:nvGrpSpPr>
@@ -24203,7 +24120,14 @@
         <p:cNvGrpSpPr/>
         <p:nvPr/>
       </p:nvGrpSpPr>
-      <p:grpSpPr/>
+      <p:grpSpPr>
+        <a:xfrm>
+          <a:off x="0" y="0"/>
+          <a:ext cx="0" cy="0"/>
+          <a:chOff x="0" y="0"/>
+          <a:chExt cx="0" cy="0"/>
+        </a:xfrm>
+      </p:grpSpPr>
       <p:sp>
         <p:nvSpPr>
           <p:cNvPr id="2" name="Title 1"/>
@@ -24257,25 +24181,21 @@
             </a:r>
           </a:p>
           <a:p>
-            <a:pPr/>
             <a:r>
               <a:t>The server's source code</a:t>
             </a:r>
           </a:p>
           <a:p>
-            <a:pPr/>
             <a:r>
               <a:t>What it learned about this server in training</a:t>
             </a:r>
           </a:p>
           <a:p>
-            <a:pPr/>
             <a:r>
               <a:t>The listing: each tool's name, description and schema, as text in its context</a:t>
             </a:r>
           </a:p>
           <a:p>
-            <a:pPr/>
             <a:r>
               <a:t>Nothing, until it calls </a:t>
             </a:r>
@@ -24529,7 +24449,7 @@
 </file>
 
 <file path=ppt/slides/slide38.xml><?xml version="1.0" encoding="utf-8"?>
-<p:sld xmlns:a="http://schemas.openxmlformats.org/drawingml/2006/main" xmlns:p="http://schemas.openxmlformats.org/presentationml/2006/main" xmlns:r="http://schemas.openxmlformats.org/officeDocument/2006/relationships">
+<p:sld xmlns:a="http://schemas.openxmlformats.org/drawingml/2006/main" xmlns:r="http://schemas.openxmlformats.org/officeDocument/2006/relationships" xmlns:p="http://schemas.openxmlformats.org/presentationml/2006/main">
   <p:cSld>
     <p:spTree>
       <p:nvGrpSpPr>
@@ -24537,7 +24457,14 @@
         <p:cNvGrpSpPr/>
         <p:nvPr/>
       </p:nvGrpSpPr>
-      <p:grpSpPr/>
+      <p:grpSpPr>
+        <a:xfrm>
+          <a:off x="0" y="0"/>
+          <a:ext cx="0" cy="0"/>
+          <a:chOff x="0" y="0"/>
+          <a:chExt cx="0" cy="0"/>
+        </a:xfrm>
+      </p:grpSpPr>
       <p:sp>
         <p:nvSpPr>
           <p:cNvPr id="2" name="Title 1"/>
@@ -24583,7 +24510,6 @@
           </a:bodyPr>
           <a:lstStyle/>
           <a:p>
-            <a:pPr/>
             <a:r>
               <a:t>The </a:t>
             </a:r>
@@ -24605,13 +24531,11 @@
             </a:r>
           </a:p>
           <a:p>
-            <a:pPr/>
             <a:r>
               <a:t>The model has never seen your server. It has seen that text</a:t>
             </a:r>
           </a:p>
           <a:p>
-            <a:pPr/>
             <a:r>
               <a:t>Choosing a tool is </a:t>
             </a:r>
@@ -24624,13 +24548,11 @@
             </a:r>
           </a:p>
           <a:p>
-            <a:pPr/>
             <a:r>
               <a:t>The schema shapes the arguments it writes</a:t>
             </a:r>
           </a:p>
           <a:p>
-            <a:pPr/>
             <a:r>
               <a:rPr b="1"/>
               <a:t>A description is written for the model, and tested by asking the model</a:t>
@@ -24925,7 +24847,7 @@
 </file>
 
 <file path=ppt/slides/slide39.xml><?xml version="1.0" encoding="utf-8"?>
-<p:sld xmlns:a="http://schemas.openxmlformats.org/drawingml/2006/main" xmlns:p="http://schemas.openxmlformats.org/presentationml/2006/main" xmlns:r="http://schemas.openxmlformats.org/officeDocument/2006/relationships">
+<p:sld xmlns:a="http://schemas.openxmlformats.org/drawingml/2006/main" xmlns:r="http://schemas.openxmlformats.org/officeDocument/2006/relationships" xmlns:p="http://schemas.openxmlformats.org/presentationml/2006/main">
   <p:cSld>
     <p:spTree>
       <p:nvGrpSpPr>
@@ -24933,7 +24855,14 @@
         <p:cNvGrpSpPr/>
         <p:nvPr/>
       </p:nvGrpSpPr>
-      <p:grpSpPr/>
+      <p:grpSpPr>
+        <a:xfrm>
+          <a:off x="0" y="0"/>
+          <a:ext cx="0" cy="0"/>
+          <a:chOff x="0" y="0"/>
+          <a:chExt cx="0" cy="0"/>
+        </a:xfrm>
+      </p:grpSpPr>
       <p:sp>
         <p:nvSpPr>
           <p:cNvPr id="2" name="Title 1"/>
@@ -24985,7 +24914,7 @@
             <a:spLocks noGrp="1"/>
           </p:cNvSpPr>
           <p:nvPr>
-            <p:ph type="body" idx="3" sz="quarter"/>
+            <p:ph type="body" sz="quarter" idx="3"/>
           </p:nvPr>
         </p:nvSpPr>
         <p:spPr/>
@@ -25038,7 +24967,7 @@
           </a:fontRef>
         </p:style>
         <p:txBody>
-          <a:bodyPr rtlCol="0" anchor="t" wrap="none" lIns="137160" rIns="137160" tIns="91440" bIns="91440">
+          <a:bodyPr wrap="none" lIns="137160" tIns="91440" rIns="137160" bIns="91440" rtlCol="0" anchor="t">
             <a:noAutofit/>
           </a:bodyPr>
           <a:lstStyle/>
@@ -25070,7 +24999,7 @@
             <a:spLocks noGrp="1"/>
           </p:cNvSpPr>
           <p:nvPr>
-            <p:ph idx="2" sz="half"/>
+            <p:ph sz="half" idx="2"/>
           </p:nvPr>
         </p:nvSpPr>
         <p:spPr>
@@ -25081,17 +25010,15 @@
         </p:spPr>
         <p:txBody>
           <a:bodyPr>
-            <a:normAutofit fontScale="85000"/>
+            <a:normAutofit lnSpcReduction="10000"/>
           </a:bodyPr>
           <a:lstStyle/>
           <a:p>
-            <a:pPr/>
             <a:r>
               <a:t>"2 to the power of 10?" The tool is called, and the model invents the arguments</a:t>
             </a:r>
           </a:p>
           <a:p>
-            <a:pPr/>
             <a:r>
               <a:t>"17 times 23?" Called too, in 15 of 15 test replies: an </a:t>
             </a:r>
@@ -25141,7 +25068,7 @@
           </a:fontRef>
         </p:style>
         <p:txBody>
-          <a:bodyPr rtlCol="0" anchor="t" wrap="none" lIns="137160" rIns="137160" tIns="91440" bIns="91440">
+          <a:bodyPr wrap="none" lIns="137160" tIns="91440" rIns="137160" bIns="91440" rtlCol="0" anchor="t">
             <a:noAutofit/>
           </a:bodyPr>
           <a:lstStyle/>
@@ -25192,7 +25119,7 @@
             <a:spLocks noGrp="1"/>
           </p:cNvSpPr>
           <p:nvPr>
-            <p:ph idx="4" sz="quarter"/>
+            <p:ph sz="quarter" idx="4"/>
           </p:nvPr>
         </p:nvSpPr>
         <p:spPr>
@@ -25203,17 +25130,15 @@
         </p:spPr>
         <p:txBody>
           <a:bodyPr>
-            <a:normAutofit fontScale="85000"/>
+            <a:normAutofit lnSpcReduction="10000"/>
           </a:bodyPr>
           <a:lstStyle/>
           <a:p>
-            <a:pPr/>
             <a:r>
               <a:t>"2 to the power of 10?" Called, with 2 and 10</a:t>
             </a:r>
           </a:p>
           <a:p>
-            <a:pPr/>
             <a:r>
               <a:t>"17 times 23?" Not called, in 15 of 15 test replies</a:t>
             </a:r>
@@ -25238,7 +25163,7 @@
         </p:spPr>
         <p:txBody>
           <a:bodyPr wrap="square">
-            <a:normAutofit fontScale="85000"/>
+            <a:normAutofit fontScale="85000" lnSpcReduction="10000"/>
           </a:bodyPr>
           <a:lstStyle>
             <a:lvl1pPr marL="228600" indent="-228600" algn="l" defTabSz="914400" rtl="0" eaLnBrk="1" latinLnBrk="0" hangingPunct="1">
@@ -25405,7 +25330,6 @@
             </a:lvl9pPr>
           </a:lstStyle>
           <a:p>
-            <a:pPr/>
             <a:r>
               <a:t>Say what the tool does </a:t>
             </a:r>
@@ -25708,7 +25632,7 @@
 </file>
 
 <file path=ppt/slides/slide4.xml><?xml version="1.0" encoding="utf-8"?>
-<p:sld xmlns:a="http://schemas.openxmlformats.org/drawingml/2006/main" xmlns:p="http://schemas.openxmlformats.org/presentationml/2006/main" xmlns:r="http://schemas.openxmlformats.org/officeDocument/2006/relationships">
+<p:sld xmlns:a="http://schemas.openxmlformats.org/drawingml/2006/main" xmlns:r="http://schemas.openxmlformats.org/officeDocument/2006/relationships" xmlns:p="http://schemas.openxmlformats.org/presentationml/2006/main">
   <p:cSld>
     <p:spTree>
       <p:nvGrpSpPr>
@@ -25716,7 +25640,14 @@
         <p:cNvGrpSpPr/>
         <p:nvPr/>
       </p:nvGrpSpPr>
-      <p:grpSpPr/>
+      <p:grpSpPr>
+        <a:xfrm>
+          <a:off x="0" y="0"/>
+          <a:ext cx="0" cy="0"/>
+          <a:chOff x="0" y="0"/>
+          <a:chExt cx="0" cy="0"/>
+        </a:xfrm>
+      </p:grpSpPr>
       <p:sp>
         <p:nvSpPr>
           <p:cNvPr id="2" name="Title 1"/>
@@ -25768,7 +25699,7 @@
             <a:spLocks noGrp="1"/>
           </p:cNvSpPr>
           <p:nvPr>
-            <p:ph idx="2" sz="half"/>
+            <p:ph sz="half" idx="2"/>
           </p:nvPr>
         </p:nvSpPr>
         <p:spPr>
@@ -25779,35 +25710,30 @@
         </p:spPr>
         <p:txBody>
           <a:bodyPr>
-            <a:normAutofit fontScale="85000"/>
+            <a:normAutofit fontScale="92500" lnSpcReduction="10000"/>
           </a:bodyPr>
           <a:lstStyle/>
           <a:p>
-            <a:pPr/>
             <a:r>
               <a:t>The problem it solves: M × N</a:t>
             </a:r>
           </a:p>
           <a:p>
-            <a:pPr/>
             <a:r>
               <a:t>Hosts, clients and servers</a:t>
             </a:r>
           </a:p>
           <a:p>
-            <a:pPr/>
             <a:r>
               <a:t>Tools, resources and prompts</a:t>
             </a:r>
           </a:p>
           <a:p>
-            <a:pPr/>
             <a:r>
               <a:t>JSON-RPC messages and two transports</a:t>
             </a:r>
           </a:p>
           <a:p>
-            <a:pPr/>
             <a:r>
               <a:t>MCP and APIs: when to use which</a:t>
             </a:r>
@@ -25821,7 +25747,7 @@
             <a:spLocks noGrp="1"/>
           </p:cNvSpPr>
           <p:nvPr>
-            <p:ph type="body" idx="3" sz="quarter"/>
+            <p:ph type="body" sz="quarter" idx="3"/>
           </p:nvPr>
         </p:nvSpPr>
         <p:spPr/>
@@ -25842,7 +25768,7 @@
             <a:spLocks noGrp="1"/>
           </p:cNvSpPr>
           <p:nvPr>
-            <p:ph idx="4" sz="quarter"/>
+            <p:ph sz="quarter" idx="4"/>
           </p:nvPr>
         </p:nvSpPr>
         <p:spPr>
@@ -25853,35 +25779,30 @@
         </p:spPr>
         <p:txBody>
           <a:bodyPr>
-            <a:normAutofit fontScale="85000"/>
+            <a:normAutofit fontScale="92500" lnSpcReduction="10000"/>
           </a:bodyPr>
           <a:lstStyle/>
           <a:p>
-            <a:pPr/>
             <a:r>
               <a:t>Who adopted it, and who runs it now</a:t>
             </a:r>
           </a:p>
           <a:p>
-            <a:pPr/>
             <a:r>
               <a:t>What the model sees: descriptions</a:t>
             </a:r>
           </a:p>
           <a:p>
-            <a:pPr/>
             <a:r>
               <a:t>Who runs the tool, and who can say no</a:t>
             </a:r>
           </a:p>
           <a:p>
-            <a:pPr/>
             <a:r>
               <a:t>Why sessions were removed in 2026</a:t>
             </a:r>
           </a:p>
           <a:p>
-            <a:pPr/>
             <a:r>
               <a:t>Try it now: write a description</a:t>
             </a:r>
@@ -26421,7 +26342,7 @@
 </file>
 
 <file path=ppt/slides/slide40.xml><?xml version="1.0" encoding="utf-8"?>
-<p:sld xmlns:a="http://schemas.openxmlformats.org/drawingml/2006/main" xmlns:p="http://schemas.openxmlformats.org/presentationml/2006/main" xmlns:r="http://schemas.openxmlformats.org/officeDocument/2006/relationships">
+<p:sld xmlns:a="http://schemas.openxmlformats.org/drawingml/2006/main" xmlns:r="http://schemas.openxmlformats.org/officeDocument/2006/relationships" xmlns:p="http://schemas.openxmlformats.org/presentationml/2006/main">
   <p:cSld>
     <p:spTree>
       <p:nvGrpSpPr>
@@ -26429,7 +26350,14 @@
         <p:cNvGrpSpPr/>
         <p:nvPr/>
       </p:nvGrpSpPr>
-      <p:grpSpPr/>
+      <p:grpSpPr>
+        <a:xfrm>
+          <a:off x="0" y="0"/>
+          <a:ext cx="0" cy="0"/>
+          <a:chOff x="0" y="0"/>
+          <a:chExt cx="0" cy="0"/>
+        </a:xfrm>
+      </p:grpSpPr>
       <p:sp>
         <p:nvSpPr>
           <p:cNvPr id="2" name="Title 1"/>
@@ -26471,7 +26399,7 @@
         </p:spPr>
         <p:txBody>
           <a:bodyPr>
-            <a:normAutofit fontScale="85000"/>
+            <a:normAutofit fontScale="85000" lnSpcReduction="10000"/>
           </a:bodyPr>
           <a:lstStyle/>
           <a:p>
@@ -26532,7 +26460,7 @@
           </a:fontRef>
         </p:style>
         <p:txBody>
-          <a:bodyPr rtlCol="0" anchor="t" wrap="none" lIns="137160" rIns="137160" tIns="91440" bIns="91440">
+          <a:bodyPr wrap="none" lIns="137160" tIns="91440" rIns="137160" bIns="91440" rtlCol="0" anchor="t">
             <a:noAutofit/>
           </a:bodyPr>
           <a:lstStyle/>
@@ -26867,7 +26795,7 @@
         </p:spPr>
         <p:txBody>
           <a:bodyPr wrap="square">
-            <a:normAutofit fontScale="85000"/>
+            <a:normAutofit fontScale="92500"/>
           </a:bodyPr>
           <a:lstStyle>
             <a:lvl1pPr marL="228600" indent="-228600" algn="l" defTabSz="914400" rtl="0" eaLnBrk="1" latinLnBrk="0" hangingPunct="1">
@@ -27034,7 +26962,6 @@
             </a:lvl9pPr>
           </a:lstStyle>
           <a:p>
-            <a:pPr/>
             <a:r>
               <a:t>The </a:t>
             </a:r>
@@ -27047,13 +26974,11 @@
             </a:r>
           </a:p>
           <a:p>
-            <a:pPr/>
             <a:r>
               <a:t>The model reads the error as context, and can try again</a:t>
             </a:r>
           </a:p>
           <a:p>
-            <a:pPr/>
             <a:r>
               <a:t>Inside your handler, a required argument is a guarantee, not a hope</a:t>
             </a:r>
@@ -27249,7 +27174,7 @@
 </file>
 
 <file path=ppt/slides/slide41.xml><?xml version="1.0" encoding="utf-8"?>
-<p:sld xmlns:a="http://schemas.openxmlformats.org/drawingml/2006/main" xmlns:p="http://schemas.openxmlformats.org/presentationml/2006/main" xmlns:r="http://schemas.openxmlformats.org/officeDocument/2006/relationships">
+<p:sld xmlns:a="http://schemas.openxmlformats.org/drawingml/2006/main" xmlns:r="http://schemas.openxmlformats.org/officeDocument/2006/relationships" xmlns:p="http://schemas.openxmlformats.org/presentationml/2006/main">
   <p:cSld>
     <p:spTree>
       <p:nvGrpSpPr>
@@ -27257,7 +27182,14 @@
         <p:cNvGrpSpPr/>
         <p:nvPr/>
       </p:nvGrpSpPr>
-      <p:grpSpPr/>
+      <p:grpSpPr>
+        <a:xfrm>
+          <a:off x="0" y="0"/>
+          <a:ext cx="0" cy="0"/>
+          <a:chOff x="0" y="0"/>
+          <a:chExt cx="0" cy="0"/>
+        </a:xfrm>
+      </p:grpSpPr>
       <p:sp>
         <p:nvSpPr>
           <p:cNvPr id="2" name="Title 1"/>
@@ -27336,7 +27268,7 @@
             </a:fontRef>
           </p:style>
           <p:txBody>
-            <a:bodyPr rtlCol="0" anchor="ctr" wrap="square">
+            <a:bodyPr wrap="square" rtlCol="0" anchor="ctr">
               <a:noAutofit/>
             </a:bodyPr>
             <a:lstStyle/>
@@ -27416,7 +27348,7 @@
             </a:fontRef>
           </p:style>
           <p:txBody>
-            <a:bodyPr rtlCol="0" anchor="ctr" wrap="square">
+            <a:bodyPr wrap="square" rtlCol="0" anchor="ctr">
               <a:noAutofit/>
             </a:bodyPr>
             <a:lstStyle/>
@@ -27496,7 +27428,7 @@
             </a:fontRef>
           </p:style>
           <p:txBody>
-            <a:bodyPr rtlCol="0" anchor="ctr" wrap="square">
+            <a:bodyPr wrap="square" rtlCol="0" anchor="ctr">
               <a:noAutofit/>
             </a:bodyPr>
             <a:lstStyle/>
@@ -27558,7 +27490,6 @@
           </a:bodyPr>
           <a:lstStyle/>
           <a:p>
-            <a:pPr/>
             <a:r>
               <a:t>Three programs, and only two of them ever execute anything</a:t>
             </a:r>
@@ -27656,7 +27587,7 @@
 </file>
 
 <file path=ppt/slides/slide42.xml><?xml version="1.0" encoding="utf-8"?>
-<p:sld xmlns:a="http://schemas.openxmlformats.org/drawingml/2006/main" xmlns:p="http://schemas.openxmlformats.org/presentationml/2006/main" xmlns:r="http://schemas.openxmlformats.org/officeDocument/2006/relationships">
+<p:sld xmlns:a="http://schemas.openxmlformats.org/drawingml/2006/main" xmlns:r="http://schemas.openxmlformats.org/officeDocument/2006/relationships" xmlns:p="http://schemas.openxmlformats.org/presentationml/2006/main">
   <p:cSld>
     <p:spTree>
       <p:nvGrpSpPr>
@@ -27664,7 +27595,14 @@
         <p:cNvGrpSpPr/>
         <p:nvPr/>
       </p:nvGrpSpPr>
-      <p:grpSpPr/>
+      <p:grpSpPr>
+        <a:xfrm>
+          <a:off x="0" y="0"/>
+          <a:ext cx="0" cy="0"/>
+          <a:chOff x="0" y="0"/>
+          <a:chExt cx="0" cy="0"/>
+        </a:xfrm>
+      </p:grpSpPr>
       <p:sp>
         <p:nvSpPr>
           <p:cNvPr id="2" name="Title 1"/>
@@ -27736,13 +27674,11 @@
             </a:r>
           </a:p>
           <a:p>
-            <a:pPr/>
             <a:r>
               <a:t>The model's own judgement</a:t>
             </a:r>
           </a:p>
           <a:p>
-            <a:pPr/>
             <a:r>
               <a:t>The </a:t>
             </a:r>
@@ -27755,7 +27691,6 @@
             </a:r>
           </a:p>
           <a:p>
-            <a:pPr/>
             <a:r>
               <a:t>The </a:t>
             </a:r>
@@ -27768,7 +27703,6 @@
             </a:r>
           </a:p>
           <a:p>
-            <a:pPr/>
             <a:r>
               <a:t>All three, equally</a:t>
             </a:r>
@@ -28013,7 +27947,7 @@
 </file>
 
 <file path=ppt/slides/slide43.xml><?xml version="1.0" encoding="utf-8"?>
-<p:sld xmlns:a="http://schemas.openxmlformats.org/drawingml/2006/main" xmlns:p="http://schemas.openxmlformats.org/presentationml/2006/main" xmlns:r="http://schemas.openxmlformats.org/officeDocument/2006/relationships">
+<p:sld xmlns:a="http://schemas.openxmlformats.org/drawingml/2006/main" xmlns:r="http://schemas.openxmlformats.org/officeDocument/2006/relationships" xmlns:p="http://schemas.openxmlformats.org/presentationml/2006/main">
   <p:cSld>
     <p:spTree>
       <p:nvGrpSpPr>
@@ -28021,7 +27955,14 @@
         <p:cNvGrpSpPr/>
         <p:nvPr/>
       </p:nvGrpSpPr>
-      <p:grpSpPr/>
+      <p:grpSpPr>
+        <a:xfrm>
+          <a:off x="0" y="0"/>
+          <a:ext cx="0" cy="0"/>
+          <a:chOff x="0" y="0"/>
+          <a:chExt cx="0" cy="0"/>
+        </a:xfrm>
+      </p:grpSpPr>
       <p:sp>
         <p:nvSpPr>
           <p:cNvPr id="2" name="Title 1"/>
@@ -28098,7 +28039,7 @@
             </a:fontRef>
           </p:style>
           <p:txBody>
-            <a:bodyPr rtlCol="0" anchor="ctr" wrap="square" lIns="109728" rIns="109728" tIns="54864" bIns="54864">
+            <a:bodyPr wrap="square" lIns="109728" tIns="54864" rIns="109728" bIns="54864" rtlCol="0" anchor="ctr">
               <a:noAutofit/>
             </a:bodyPr>
             <a:lstStyle/>
@@ -28165,7 +28106,7 @@
             </a:fontRef>
           </p:style>
           <p:txBody>
-            <a:bodyPr rtlCol="0" anchor="ctr" wrap="square" lIns="109728" rIns="109728" tIns="54864" bIns="54864">
+            <a:bodyPr wrap="square" lIns="109728" tIns="54864" rIns="109728" bIns="54864" rtlCol="0" anchor="ctr">
               <a:noAutofit/>
             </a:bodyPr>
             <a:lstStyle/>
@@ -28232,7 +28173,7 @@
             </a:fontRef>
           </p:style>
           <p:txBody>
-            <a:bodyPr rtlCol="0" anchor="ctr" wrap="square" lIns="109728" rIns="109728" tIns="54864" bIns="54864">
+            <a:bodyPr wrap="square" lIns="109728" tIns="54864" rIns="109728" bIns="54864" rtlCol="0" anchor="ctr">
               <a:noAutofit/>
             </a:bodyPr>
             <a:lstStyle/>
@@ -28303,7 +28244,7 @@
             </a:fontRef>
           </p:style>
           <p:txBody>
-            <a:bodyPr rtlCol="0" anchor="ctr" wrap="square" lIns="109728" rIns="109728" tIns="54864" bIns="54864">
+            <a:bodyPr wrap="square" lIns="109728" tIns="54864" rIns="109728" bIns="54864" rtlCol="0" anchor="ctr">
               <a:noAutofit/>
             </a:bodyPr>
             <a:lstStyle/>
@@ -28471,19 +28412,16 @@
           </a:bodyPr>
           <a:lstStyle/>
           <a:p>
-            <a:pPr/>
             <a:r>
               <a:t>Two enforceable "no"s: the client's decision, and the access the server was given</a:t>
             </a:r>
           </a:p>
           <a:p>
-            <a:pPr/>
             <a:r>
               <a:t>The model's judgement is a third, and a tool result can talk it round</a:t>
             </a:r>
           </a:p>
           <a:p>
-            <a:pPr/>
             <a:r>
               <a:t>In VS Code this is the </a:t>
             </a:r>
@@ -28686,7 +28624,7 @@
 </file>
 
 <file path=ppt/slides/slide44.xml><?xml version="1.0" encoding="utf-8"?>
-<p:sld xmlns:a="http://schemas.openxmlformats.org/drawingml/2006/main" xmlns:p="http://schemas.openxmlformats.org/presentationml/2006/main" xmlns:r="http://schemas.openxmlformats.org/officeDocument/2006/relationships">
+<p:sld xmlns:a="http://schemas.openxmlformats.org/drawingml/2006/main" xmlns:r="http://schemas.openxmlformats.org/officeDocument/2006/relationships" xmlns:p="http://schemas.openxmlformats.org/presentationml/2006/main">
   <p:cSld>
     <p:spTree>
       <p:nvGrpSpPr>
@@ -28694,7 +28632,14 @@
         <p:cNvGrpSpPr/>
         <p:nvPr/>
       </p:nvGrpSpPr>
-      <p:grpSpPr/>
+      <p:grpSpPr>
+        <a:xfrm>
+          <a:off x="0" y="0"/>
+          <a:ext cx="0" cy="0"/>
+          <a:chOff x="0" y="0"/>
+          <a:chExt cx="0" cy="0"/>
+        </a:xfrm>
+      </p:grpSpPr>
       <p:sp>
         <p:nvSpPr>
           <p:cNvPr id="2" name="Title 1"/>
@@ -28740,7 +28685,6 @@
           </a:bodyPr>
           <a:lstStyle/>
           <a:p>
-            <a:pPr/>
             <a:r>
               <a:t>It runs with </a:t>
             </a:r>
@@ -28753,13 +28697,11 @@
             </a:r>
           </a:p>
           <a:p>
-            <a:pPr/>
             <a:r>
               <a:t>And a model decides when to call it</a:t>
             </a:r>
           </a:p>
           <a:p>
-            <a:pPr/>
             <a:r>
               <a:t>September 2025: a fake </a:t>
             </a:r>
@@ -28774,13 +28716,11 @@
             </a:r>
           </a:p>
           <a:p>
-            <a:pPr/>
             <a:r>
               <a:t>VS Code's own caution: "Local MCP servers can run arbitrary code on your machine. Only add servers from trusted sources"</a:t>
             </a:r>
           </a:p>
           <a:p>
-            <a:pPr/>
             <a:r>
               <a:rPr b="1"/>
               <a:t>Installing an MCP server is the same trust decision as installing a browser extension</a:t>
@@ -29075,7 +29015,7 @@
 </file>
 
 <file path=ppt/slides/slide45.xml><?xml version="1.0" encoding="utf-8"?>
-<p:sld xmlns:a="http://schemas.openxmlformats.org/drawingml/2006/main" xmlns:p="http://schemas.openxmlformats.org/presentationml/2006/main" xmlns:r="http://schemas.openxmlformats.org/officeDocument/2006/relationships">
+<p:sld xmlns:a="http://schemas.openxmlformats.org/drawingml/2006/main" xmlns:r="http://schemas.openxmlformats.org/officeDocument/2006/relationships" xmlns:p="http://schemas.openxmlformats.org/presentationml/2006/main">
   <p:cSld>
     <p:spTree>
       <p:nvGrpSpPr>
@@ -29083,7 +29023,14 @@
         <p:cNvGrpSpPr/>
         <p:nvPr/>
       </p:nvGrpSpPr>
-      <p:grpSpPr/>
+      <p:grpSpPr>
+        <a:xfrm>
+          <a:off x="0" y="0"/>
+          <a:ext cx="0" cy="0"/>
+          <a:chOff x="0" y="0"/>
+          <a:chExt cx="0" cy="0"/>
+        </a:xfrm>
+      </p:grpSpPr>
       <p:sp>
         <p:nvSpPr>
           <p:cNvPr id="2" name="Title 1"/>
@@ -29177,7 +29124,7 @@
           </a:fontRef>
         </p:style>
         <p:txBody>
-          <a:bodyPr rtlCol="0" anchor="t" wrap="none" lIns="137160" rIns="137160" tIns="91440" bIns="91440">
+          <a:bodyPr wrap="none" lIns="137160" tIns="91440" rIns="137160" bIns="91440" rtlCol="0" anchor="t">
             <a:noAutofit/>
           </a:bodyPr>
           <a:lstStyle/>
@@ -29406,13 +29353,11 @@
             </a:lvl9pPr>
           </a:lstStyle>
           <a:p>
-            <a:pPr/>
             <a:r>
               <a:t>Nothing happens: a tool result is data, and the model ignores instructions in it</a:t>
             </a:r>
           </a:p>
           <a:p>
-            <a:pPr/>
             <a:r>
               <a:t>It may well do it, if a file tool is connected</a:t>
             </a:r>
@@ -29559,7 +29504,7 @@
 </file>
 
 <file path=ppt/slides/slide46.xml><?xml version="1.0" encoding="utf-8"?>
-<p:sld xmlns:a="http://schemas.openxmlformats.org/drawingml/2006/main" xmlns:p="http://schemas.openxmlformats.org/presentationml/2006/main" xmlns:r="http://schemas.openxmlformats.org/officeDocument/2006/relationships">
+<p:sld xmlns:a="http://schemas.openxmlformats.org/drawingml/2006/main" xmlns:r="http://schemas.openxmlformats.org/officeDocument/2006/relationships" xmlns:p="http://schemas.openxmlformats.org/presentationml/2006/main">
   <p:cSld>
     <p:spTree>
       <p:nvGrpSpPr>
@@ -29567,7 +29512,14 @@
         <p:cNvGrpSpPr/>
         <p:nvPr/>
       </p:nvGrpSpPr>
-      <p:grpSpPr/>
+      <p:grpSpPr>
+        <a:xfrm>
+          <a:off x="0" y="0"/>
+          <a:ext cx="0" cy="0"/>
+          <a:chOff x="0" y="0"/>
+          <a:chExt cx="0" cy="0"/>
+        </a:xfrm>
+      </p:grpSpPr>
       <p:sp>
         <p:nvSpPr>
           <p:cNvPr id="2" name="Title 1"/>
@@ -29646,7 +29598,7 @@
             </a:fontRef>
           </p:style>
           <p:txBody>
-            <a:bodyPr rtlCol="0" anchor="ctr" wrap="square" lIns="109728" rIns="109728" tIns="54864" bIns="54864">
+            <a:bodyPr wrap="square" lIns="109728" tIns="54864" rIns="109728" bIns="54864" rtlCol="0" anchor="ctr">
               <a:noAutofit/>
             </a:bodyPr>
             <a:lstStyle/>
@@ -29716,7 +29668,7 @@
             </a:fontRef>
           </p:style>
           <p:txBody>
-            <a:bodyPr rtlCol="0" anchor="ctr" wrap="square" lIns="109728" rIns="109728" tIns="54864" bIns="54864">
+            <a:bodyPr wrap="square" lIns="109728" tIns="54864" rIns="109728" bIns="54864" rtlCol="0" anchor="ctr">
               <a:noAutofit/>
             </a:bodyPr>
             <a:lstStyle/>
@@ -29790,7 +29742,7 @@
             </a:fontRef>
           </p:style>
           <p:txBody>
-            <a:bodyPr rtlCol="0" anchor="ctr" wrap="square" lIns="109728" rIns="109728" tIns="54864" bIns="54864">
+            <a:bodyPr wrap="square" lIns="109728" tIns="54864" rIns="109728" bIns="54864" rtlCol="0" anchor="ctr">
               <a:noAutofit/>
             </a:bodyPr>
             <a:lstStyle/>
@@ -29838,11 +29790,10 @@
         </p:spPr>
         <p:txBody>
           <a:bodyPr>
-            <a:normAutofit fontScale="85000"/>
+            <a:normAutofit fontScale="92500" lnSpcReduction="10000"/>
           </a:bodyPr>
           <a:lstStyle/>
           <a:p>
-            <a:pPr/>
             <a:r>
               <a:t>A tool result is </a:t>
             </a:r>
@@ -29855,13 +29806,11 @@
             </a:r>
           </a:p>
           <a:p>
-            <a:pPr/>
             <a:r>
               <a:t>May 2025: researchers showed that one public GitHub issue could make an assistant copy private repository data into a public pull request</a:t>
             </a:r>
           </a:p>
           <a:p>
-            <a:pPr/>
             <a:r>
               <a:t>Their verdict: not a bug in the server's code, but in how the agent was set up</a:t>
             </a:r>
@@ -30057,7 +30006,7 @@
 </file>
 
 <file path=ppt/slides/slide47.xml><?xml version="1.0" encoding="utf-8"?>
-<p:sld xmlns:a="http://schemas.openxmlformats.org/drawingml/2006/main" xmlns:p="http://schemas.openxmlformats.org/presentationml/2006/main" xmlns:r="http://schemas.openxmlformats.org/officeDocument/2006/relationships">
+<p:sld xmlns:a="http://schemas.openxmlformats.org/drawingml/2006/main" xmlns:r="http://schemas.openxmlformats.org/officeDocument/2006/relationships" xmlns:p="http://schemas.openxmlformats.org/presentationml/2006/main">
   <p:cSld>
     <p:spTree>
       <p:nvGrpSpPr>
@@ -30065,7 +30014,14 @@
         <p:cNvGrpSpPr/>
         <p:nvPr/>
       </p:nvGrpSpPr>
-      <p:grpSpPr/>
+      <p:grpSpPr>
+        <a:xfrm>
+          <a:off x="0" y="0"/>
+          <a:ext cx="0" cy="0"/>
+          <a:chOff x="0" y="0"/>
+          <a:chExt cx="0" cy="0"/>
+        </a:xfrm>
+      </p:grpSpPr>
       <p:sp>
         <p:nvSpPr>
           <p:cNvPr id="2" name="Title 1"/>
@@ -30107,7 +30063,7 @@
         </p:spPr>
         <p:txBody>
           <a:bodyPr>
-            <a:normAutofit/>
+            <a:normAutofit lnSpcReduction="10000"/>
           </a:bodyPr>
           <a:lstStyle/>
           <a:p>
@@ -30175,7 +30131,7 @@
             </a:fontRef>
           </p:style>
           <p:txBody>
-            <a:bodyPr rtlCol="0" anchor="ctr" wrap="square" lIns="109728" rIns="109728" tIns="54864" bIns="54864">
+            <a:bodyPr wrap="square" lIns="109728" tIns="54864" rIns="109728" bIns="54864" rtlCol="0" anchor="ctr">
               <a:noAutofit/>
             </a:bodyPr>
             <a:lstStyle/>
@@ -30245,7 +30201,7 @@
             </a:fontRef>
           </p:style>
           <p:txBody>
-            <a:bodyPr rtlCol="0" anchor="ctr" wrap="square" lIns="109728" rIns="109728" tIns="54864" bIns="54864">
+            <a:bodyPr wrap="square" lIns="109728" tIns="54864" rIns="109728" bIns="54864" rtlCol="0" anchor="ctr">
               <a:noAutofit/>
             </a:bodyPr>
             <a:lstStyle/>
@@ -30319,7 +30275,7 @@
             </a:fontRef>
           </p:style>
           <p:txBody>
-            <a:bodyPr rtlCol="0" anchor="ctr" wrap="square" lIns="109728" rIns="109728" tIns="54864" bIns="54864">
+            <a:bodyPr wrap="square" lIns="109728" tIns="54864" rIns="109728" bIns="54864" rtlCol="0" anchor="ctr">
               <a:noAutofit/>
             </a:bodyPr>
             <a:lstStyle/>
@@ -30534,13 +30490,11 @@
             </a:lvl9pPr>
           </a:lstStyle>
           <a:p>
-            <a:pPr/>
             <a:r>
               <a:t>The grant is set when you connect the server, and the model cannot argue past it</a:t>
             </a:r>
           </a:p>
           <a:p>
-            <a:pPr/>
             <a:r>
               <a:t>Widen it for the task in front of you, not for tasks you might have</a:t>
             </a:r>
@@ -30687,7 +30641,7 @@
 </file>
 
 <file path=ppt/slides/slide48.xml><?xml version="1.0" encoding="utf-8"?>
-<p:sld xmlns:a="http://schemas.openxmlformats.org/drawingml/2006/main" xmlns:p="http://schemas.openxmlformats.org/presentationml/2006/main" xmlns:r="http://schemas.openxmlformats.org/officeDocument/2006/relationships">
+<p:sld xmlns:a="http://schemas.openxmlformats.org/drawingml/2006/main" xmlns:r="http://schemas.openxmlformats.org/officeDocument/2006/relationships" xmlns:p="http://schemas.openxmlformats.org/presentationml/2006/main">
   <p:cSld>
     <p:spTree>
       <p:nvGrpSpPr>
@@ -30695,7 +30649,14 @@
         <p:cNvGrpSpPr/>
         <p:nvPr/>
       </p:nvGrpSpPr>
-      <p:grpSpPr/>
+      <p:grpSpPr>
+        <a:xfrm>
+          <a:off x="0" y="0"/>
+          <a:ext cx="0" cy="0"/>
+          <a:chOff x="0" y="0"/>
+          <a:chExt cx="0" cy="0"/>
+        </a:xfrm>
+      </p:grpSpPr>
       <p:sp>
         <p:nvSpPr>
           <p:cNvPr id="2" name="Title 1"/>
@@ -30737,7 +30698,7 @@
         </p:spPr>
         <p:txBody>
           <a:bodyPr>
-            <a:normAutofit/>
+            <a:normAutofit lnSpcReduction="10000"/>
           </a:bodyPr>
           <a:lstStyle/>
           <a:p>
@@ -30816,7 +30777,7 @@
             </a:fontRef>
           </p:style>
           <p:txBody>
-            <a:bodyPr rtlCol="0" anchor="ctr" wrap="square" lIns="109728" rIns="109728" tIns="54864" bIns="54864">
+            <a:bodyPr wrap="square" lIns="109728" tIns="54864" rIns="109728" bIns="54864" rtlCol="0" anchor="ctr">
               <a:noAutofit/>
             </a:bodyPr>
             <a:lstStyle/>
@@ -30883,7 +30844,7 @@
             </a:fontRef>
           </p:style>
           <p:txBody>
-            <a:bodyPr rtlCol="0" anchor="ctr" wrap="square" lIns="109728" rIns="109728" tIns="54864" bIns="54864">
+            <a:bodyPr wrap="square" lIns="109728" tIns="54864" rIns="109728" bIns="54864" rtlCol="0" anchor="ctr">
               <a:noAutofit/>
             </a:bodyPr>
             <a:lstStyle/>
@@ -30950,7 +30911,7 @@
             </a:fontRef>
           </p:style>
           <p:txBody>
-            <a:bodyPr rtlCol="0" anchor="ctr" wrap="square" lIns="109728" rIns="109728" tIns="54864" bIns="54864">
+            <a:bodyPr wrap="square" lIns="109728" tIns="54864" rIns="109728" bIns="54864" rtlCol="0" anchor="ctr">
               <a:noAutofit/>
             </a:bodyPr>
             <a:lstStyle/>
@@ -31017,7 +30978,7 @@
             </a:fontRef>
           </p:style>
           <p:txBody>
-            <a:bodyPr rtlCol="0" anchor="ctr" wrap="square" lIns="109728" rIns="109728" tIns="54864" bIns="54864">
+            <a:bodyPr wrap="square" lIns="109728" tIns="54864" rIns="109728" bIns="54864" rtlCol="0" anchor="ctr">
               <a:noAutofit/>
             </a:bodyPr>
             <a:lstStyle/>
@@ -31348,13 +31309,11 @@
             </a:lvl9pPr>
           </a:lstStyle>
           <a:p>
-            <a:pPr/>
             <a:r>
               <a:t>Either boundary alone would stop it. Both is the design</a:t>
             </a:r>
           </a:p>
           <a:p>
-            <a:pPr/>
             <a:r>
               <a:t>Neither depends on the model noticing that the instruction was hostile</a:t>
             </a:r>
@@ -31501,7 +31460,7 @@
 </file>
 
 <file path=ppt/slides/slide49.xml><?xml version="1.0" encoding="utf-8"?>
-<p:sld xmlns:a="http://schemas.openxmlformats.org/drawingml/2006/main" xmlns:p="http://schemas.openxmlformats.org/presentationml/2006/main" xmlns:r="http://schemas.openxmlformats.org/officeDocument/2006/relationships">
+<p:sld xmlns:a="http://schemas.openxmlformats.org/drawingml/2006/main" xmlns:r="http://schemas.openxmlformats.org/officeDocument/2006/relationships" xmlns:p="http://schemas.openxmlformats.org/presentationml/2006/main">
   <p:cSld>
     <p:spTree>
       <p:nvGrpSpPr>
@@ -31509,7 +31468,14 @@
         <p:cNvGrpSpPr/>
         <p:nvPr/>
       </p:nvGrpSpPr>
-      <p:grpSpPr/>
+      <p:grpSpPr>
+        <a:xfrm>
+          <a:off x="0" y="0"/>
+          <a:ext cx="0" cy="0"/>
+          <a:chOff x="0" y="0"/>
+          <a:chExt cx="0" cy="0"/>
+        </a:xfrm>
+      </p:grpSpPr>
       <p:sp>
         <p:nvSpPr>
           <p:cNvPr id="2" name="Title 1"/>
@@ -31579,25 +31545,21 @@
             </a:r>
           </a:p>
           <a:p>
-            <a:pPr/>
             <a:r>
               <a:t>Nothing: load balancers handle this</a:t>
             </a:r>
           </a:p>
           <a:p>
-            <a:pPr/>
             <a:r>
               <a:t>Request 2 may reach a copy that never saw request 1</a:t>
             </a:r>
           </a:p>
           <a:p>
-            <a:pPr/>
             <a:r>
               <a:t>The model gets slower</a:t>
             </a:r>
           </a:p>
           <a:p>
-            <a:pPr/>
             <a:r>
               <a:t>The client reconnects automatically</a:t>
             </a:r>
@@ -31842,7 +31804,7 @@
 </file>
 
 <file path=ppt/slides/slide5.xml><?xml version="1.0" encoding="utf-8"?>
-<p:sld xmlns:a="http://schemas.openxmlformats.org/drawingml/2006/main" xmlns:p="http://schemas.openxmlformats.org/presentationml/2006/main" xmlns:r="http://schemas.openxmlformats.org/officeDocument/2006/relationships">
+<p:sld xmlns:a="http://schemas.openxmlformats.org/drawingml/2006/main" xmlns:r="http://schemas.openxmlformats.org/officeDocument/2006/relationships" xmlns:p="http://schemas.openxmlformats.org/presentationml/2006/main">
   <p:cSld>
     <p:spTree>
       <p:nvGrpSpPr>
@@ -31850,7 +31812,14 @@
         <p:cNvGrpSpPr/>
         <p:nvPr/>
       </p:nvGrpSpPr>
-      <p:grpSpPr/>
+      <p:grpSpPr>
+        <a:xfrm>
+          <a:off x="0" y="0"/>
+          <a:ext cx="0" cy="0"/>
+          <a:chOff x="0" y="0"/>
+          <a:chExt cx="0" cy="0"/>
+        </a:xfrm>
+      </p:grpSpPr>
       <p:sp>
         <p:nvSpPr>
           <p:cNvPr id="2" name="Title 1"/>
@@ -31904,7 +31873,7 @@
 </file>
 
 <file path=ppt/slides/slide50.xml><?xml version="1.0" encoding="utf-8"?>
-<p:sld xmlns:a="http://schemas.openxmlformats.org/drawingml/2006/main" xmlns:p="http://schemas.openxmlformats.org/presentationml/2006/main" xmlns:r="http://schemas.openxmlformats.org/officeDocument/2006/relationships">
+<p:sld xmlns:a="http://schemas.openxmlformats.org/drawingml/2006/main" xmlns:r="http://schemas.openxmlformats.org/officeDocument/2006/relationships" xmlns:p="http://schemas.openxmlformats.org/presentationml/2006/main">
   <p:cSld>
     <p:spTree>
       <p:nvGrpSpPr>
@@ -31912,7 +31881,14 @@
         <p:cNvGrpSpPr/>
         <p:nvPr/>
       </p:nvGrpSpPr>
-      <p:grpSpPr/>
+      <p:grpSpPr>
+        <a:xfrm>
+          <a:off x="0" y="0"/>
+          <a:ext cx="0" cy="0"/>
+          <a:chOff x="0" y="0"/>
+          <a:chExt cx="0" cy="0"/>
+        </a:xfrm>
+      </p:grpSpPr>
       <p:sp>
         <p:nvSpPr>
           <p:cNvPr id="2" name="Title 1"/>
@@ -31958,7 +31934,6 @@
           </a:bodyPr>
           <a:lstStyle/>
           <a:p>
-            <a:pPr/>
             <a:r>
               <a:t>A handshake means the server must </a:t>
             </a:r>
@@ -31971,26 +31946,22 @@
             </a:r>
           </a:p>
           <a:p>
-            <a:pPr/>
             <a:r>
               <a:t>Remembering means sticky sessions, or shared storage on every copy</a:t>
             </a:r>
           </a:p>
           <a:p>
-            <a:pPr/>
             <a:r>
               <a:t>That is how a service stops scaling</a:t>
             </a:r>
           </a:p>
           <a:p>
-            <a:pPr/>
             <a:r>
               <a:rPr b="1"/>
               <a:t>The 2026-07-28 specification removed the handshake and the session header. Every request now stands alone</a:t>
             </a:r>
           </a:p>
           <a:p>
-            <a:pPr/>
             <a:r>
               <a:t>Its authors: "any request can land on any instance behind a plain round-robin load balancer"</a:t>
             </a:r>
@@ -32284,7 +32255,7 @@
 </file>
 
 <file path=ppt/slides/slide51.xml><?xml version="1.0" encoding="utf-8"?>
-<p:sld xmlns:a="http://schemas.openxmlformats.org/drawingml/2006/main" xmlns:p="http://schemas.openxmlformats.org/presentationml/2006/main" xmlns:r="http://schemas.openxmlformats.org/officeDocument/2006/relationships">
+<p:sld xmlns:a="http://schemas.openxmlformats.org/drawingml/2006/main" xmlns:r="http://schemas.openxmlformats.org/officeDocument/2006/relationships" xmlns:p="http://schemas.openxmlformats.org/presentationml/2006/main">
   <p:cSld>
     <p:spTree>
       <p:nvGrpSpPr>
@@ -32292,7 +32263,14 @@
         <p:cNvGrpSpPr/>
         <p:nvPr/>
       </p:nvGrpSpPr>
-      <p:grpSpPr/>
+      <p:grpSpPr>
+        <a:xfrm>
+          <a:off x="0" y="0"/>
+          <a:ext cx="0" cy="0"/>
+          <a:chOff x="0" y="0"/>
+          <a:chExt cx="0" cy="0"/>
+        </a:xfrm>
+      </p:grpSpPr>
       <p:sp>
         <p:nvSpPr>
           <p:cNvPr id="2" name="Title 1"/>
@@ -32355,7 +32333,7 @@
           </a:fontRef>
         </p:style>
         <p:txBody>
-          <a:bodyPr rtlCol="0" anchor="t" wrap="none" lIns="137160" rIns="137160" tIns="91440" bIns="91440">
+          <a:bodyPr wrap="none" lIns="137160" tIns="91440" rIns="137160" bIns="91440" rtlCol="0" anchor="t">
             <a:noAutofit/>
           </a:bodyPr>
           <a:lstStyle/>
@@ -32945,11 +32923,10 @@
         </p:spPr>
         <p:txBody>
           <a:bodyPr>
-            <a:normAutofit fontScale="85000"/>
+            <a:normAutofit fontScale="92500" lnSpcReduction="10000"/>
           </a:bodyPr>
           <a:lstStyle/>
           <a:p>
-            <a:pPr/>
             <a:r>
               <a:t>No handshake came first: this was the client's third message, after </a:t>
             </a:r>
@@ -32970,7 +32947,6 @@
             </a:r>
           </a:p>
           <a:p>
-            <a:pPr/>
             <a:r>
               <a:t>Version, identity and capabilities ride in every request's </a:t>
             </a:r>
@@ -32982,7 +32958,6 @@
             </a:r>
           </a:p>
           <a:p>
-            <a:pPr/>
             <a:r>
               <a:t>Older clients and servers keep working: deprecated features stay for at least twelve months</a:t>
             </a:r>
@@ -33178,7 +33153,7 @@
 </file>
 
 <file path=ppt/slides/slide52.xml><?xml version="1.0" encoding="utf-8"?>
-<p:sld xmlns:a="http://schemas.openxmlformats.org/drawingml/2006/main" xmlns:p="http://schemas.openxmlformats.org/presentationml/2006/main" xmlns:r="http://schemas.openxmlformats.org/officeDocument/2006/relationships">
+<p:sld xmlns:a="http://schemas.openxmlformats.org/drawingml/2006/main" xmlns:r="http://schemas.openxmlformats.org/officeDocument/2006/relationships" xmlns:p="http://schemas.openxmlformats.org/presentationml/2006/main">
   <p:cSld>
     <p:spTree>
       <p:nvGrpSpPr>
@@ -33186,7 +33161,14 @@
         <p:cNvGrpSpPr/>
         <p:nvPr/>
       </p:nvGrpSpPr>
-      <p:grpSpPr/>
+      <p:grpSpPr>
+        <a:xfrm>
+          <a:off x="0" y="0"/>
+          <a:ext cx="0" cy="0"/>
+          <a:chOff x="0" y="0"/>
+          <a:chExt cx="0" cy="0"/>
+        </a:xfrm>
+      </p:grpSpPr>
       <p:sp>
         <p:nvSpPr>
           <p:cNvPr id="2" name="Title 1"/>
@@ -33238,7 +33220,7 @@
             <a:spLocks noGrp="1"/>
           </p:cNvSpPr>
           <p:nvPr>
-            <p:ph idx="2" sz="half"/>
+            <p:ph sz="half" idx="2"/>
           </p:nvPr>
         </p:nvSpPr>
         <p:spPr>
@@ -33249,11 +33231,10 @@
         </p:spPr>
         <p:txBody>
           <a:bodyPr>
-            <a:normAutofit fontScale="77500"/>
+            <a:normAutofit fontScale="85000" lnSpcReduction="10000"/>
           </a:bodyPr>
           <a:lstStyle/>
           <a:p>
-            <a:pPr/>
             <a:r>
               <a:t>Starts with an </a:t>
             </a:r>
@@ -33268,19 +33249,16 @@
             </a:r>
           </a:p>
           <a:p>
-            <a:pPr/>
             <a:r>
               <a:t>A session: the server remembers you</a:t>
             </a:r>
           </a:p>
           <a:p>
-            <a:pPr/>
             <a:r>
               <a:t>Capabilities: learned once, in the handshake</a:t>
             </a:r>
           </a:p>
           <a:p>
-            <a:pPr/>
             <a:r>
               <a:t>A tool's state: in the server's memory</a:t>
             </a:r>
@@ -33294,7 +33272,7 @@
             <a:spLocks noGrp="1"/>
           </p:cNvSpPr>
           <p:nvPr>
-            <p:ph type="body" idx="3" sz="quarter"/>
+            <p:ph type="body" sz="quarter" idx="3"/>
           </p:nvPr>
         </p:nvSpPr>
         <p:spPr/>
@@ -33315,7 +33293,7 @@
             <a:spLocks noGrp="1"/>
           </p:cNvSpPr>
           <p:nvPr>
-            <p:ph idx="4" sz="quarter"/>
+            <p:ph sz="quarter" idx="4"/>
           </p:nvPr>
         </p:nvSpPr>
         <p:spPr>
@@ -33326,17 +33304,15 @@
         </p:spPr>
         <p:txBody>
           <a:bodyPr>
-            <a:normAutofit fontScale="77500"/>
+            <a:normAutofit fontScale="85000" lnSpcReduction="10000"/>
           </a:bodyPr>
           <a:lstStyle/>
           <a:p>
-            <a:pPr/>
             <a:r>
               <a:t>No handshake: every request stands alone</a:t>
             </a:r>
           </a:p>
           <a:p>
-            <a:pPr/>
             <a:r>
               <a:t>No session: </a:t>
             </a:r>
@@ -33351,7 +33327,6 @@
             </a:r>
           </a:p>
           <a:p>
-            <a:pPr/>
             <a:r>
               <a:t>Capabilities: ask with </a:t>
             </a:r>
@@ -33363,7 +33338,6 @@
             </a:r>
           </a:p>
           <a:p>
-            <a:pPr/>
             <a:r>
               <a:t>A tool's state: an explicit handle</a:t>
             </a:r>
@@ -33388,7 +33362,7 @@
         </p:spPr>
         <p:txBody>
           <a:bodyPr wrap="square">
-            <a:normAutofit fontScale="77500"/>
+            <a:normAutofit fontScale="85000" lnSpcReduction="10000"/>
           </a:bodyPr>
           <a:lstStyle>
             <a:lvl1pPr marL="228600" indent="-228600" algn="l" defTabSz="914400" rtl="0" eaLnBrk="1" latinLnBrk="0" hangingPunct="1">
@@ -33555,7 +33529,6 @@
             </a:lvl9pPr>
           </a:lstStyle>
           <a:p>
-            <a:pPr/>
             <a:r>
               <a:t>Servers you meet this year speak either version: recognising which is a real skill</a:t>
             </a:r>
@@ -34047,7 +34020,7 @@
 </file>
 
 <file path=ppt/slides/slide53.xml><?xml version="1.0" encoding="utf-8"?>
-<p:sld xmlns:a="http://schemas.openxmlformats.org/drawingml/2006/main" xmlns:p="http://schemas.openxmlformats.org/presentationml/2006/main" xmlns:r="http://schemas.openxmlformats.org/officeDocument/2006/relationships">
+<p:sld xmlns:a="http://schemas.openxmlformats.org/drawingml/2006/main" xmlns:r="http://schemas.openxmlformats.org/officeDocument/2006/relationships" xmlns:p="http://schemas.openxmlformats.org/presentationml/2006/main">
   <p:cSld>
     <p:spTree>
       <p:nvGrpSpPr>
@@ -34055,7 +34028,14 @@
         <p:cNvGrpSpPr/>
         <p:nvPr/>
       </p:nvGrpSpPr>
-      <p:grpSpPr/>
+      <p:grpSpPr>
+        <a:xfrm>
+          <a:off x="0" y="0"/>
+          <a:ext cx="0" cy="0"/>
+          <a:chOff x="0" y="0"/>
+          <a:chExt cx="0" cy="0"/>
+        </a:xfrm>
+      </p:grpSpPr>
       <p:sp>
         <p:nvSpPr>
           <p:cNvPr id="2" name="Title 1"/>
@@ -34101,7 +34081,6 @@
           </a:bodyPr>
           <a:lstStyle/>
           <a:p>
-            <a:pPr/>
             <a:r>
               <a:t>A tool that needs state </a:t>
             </a:r>
@@ -34114,25 +34093,21 @@
             </a:r>
           </a:p>
           <a:p>
-            <a:pPr/>
             <a:r>
               <a:t>The model passes the handle back as an ordinary argument</a:t>
             </a:r>
           </a:p>
           <a:p>
-            <a:pPr/>
             <a:r>
               <a:t>State stopped being hidden in the connection and became a value you can see in the request</a:t>
             </a:r>
           </a:p>
           <a:p>
-            <a:pPr/>
             <a:r>
               <a:t>Anything that logs the traffic can now audit it</a:t>
             </a:r>
           </a:p>
           <a:p>
-            <a:pPr/>
             <a:r>
               <a:t>The specification's authors: "mint an explicit handle from a tool and have the model pass it back as an argument"</a:t>
             </a:r>
@@ -34426,7 +34401,7 @@
 </file>
 
 <file path=ppt/slides/slide54.xml><?xml version="1.0" encoding="utf-8"?>
-<p:sld xmlns:a="http://schemas.openxmlformats.org/drawingml/2006/main" xmlns:p="http://schemas.openxmlformats.org/presentationml/2006/main" xmlns:r="http://schemas.openxmlformats.org/officeDocument/2006/relationships">
+<p:sld xmlns:a="http://schemas.openxmlformats.org/drawingml/2006/main" xmlns:r="http://schemas.openxmlformats.org/officeDocument/2006/relationships" xmlns:p="http://schemas.openxmlformats.org/presentationml/2006/main">
   <p:cSld>
     <p:spTree>
       <p:nvGrpSpPr>
@@ -34434,7 +34409,14 @@
         <p:cNvGrpSpPr/>
         <p:nvPr/>
       </p:nvGrpSpPr>
-      <p:grpSpPr/>
+      <p:grpSpPr>
+        <a:xfrm>
+          <a:off x="0" y="0"/>
+          <a:ext cx="0" cy="0"/>
+          <a:chOff x="0" y="0"/>
+          <a:chExt cx="0" cy="0"/>
+        </a:xfrm>
+      </p:grpSpPr>
       <p:sp>
         <p:nvSpPr>
           <p:cNvPr id="2" name="Title 1"/>
@@ -34511,7 +34493,7 @@
             </a:fontRef>
           </p:style>
           <p:txBody>
-            <a:bodyPr rtlCol="0" anchor="ctr" wrap="square" lIns="109728" rIns="109728" tIns="54864" bIns="54864">
+            <a:bodyPr wrap="square" lIns="109728" tIns="54864" rIns="109728" bIns="54864" rtlCol="0" anchor="ctr">
               <a:noAutofit/>
             </a:bodyPr>
             <a:lstStyle/>
@@ -34578,7 +34560,7 @@
             </a:fontRef>
           </p:style>
           <p:txBody>
-            <a:bodyPr rtlCol="0" anchor="ctr" wrap="square" lIns="109728" rIns="109728" tIns="54864" bIns="54864">
+            <a:bodyPr wrap="square" lIns="109728" tIns="54864" rIns="109728" bIns="54864" rtlCol="0" anchor="ctr">
               <a:noAutofit/>
             </a:bodyPr>
             <a:lstStyle/>
@@ -34645,7 +34627,7 @@
             </a:fontRef>
           </p:style>
           <p:txBody>
-            <a:bodyPr rtlCol="0" anchor="ctr" wrap="square" lIns="109728" rIns="109728" tIns="54864" bIns="54864">
+            <a:bodyPr wrap="square" lIns="109728" tIns="54864" rIns="109728" bIns="54864" rtlCol="0" anchor="ctr">
               <a:noAutofit/>
             </a:bodyPr>
             <a:lstStyle/>
@@ -34712,7 +34694,7 @@
             </a:fontRef>
           </p:style>
           <p:txBody>
-            <a:bodyPr rtlCol="0" anchor="ctr" wrap="square" lIns="109728" rIns="109728" tIns="54864" bIns="54864">
+            <a:bodyPr wrap="square" lIns="109728" tIns="54864" rIns="109728" bIns="54864" rtlCol="0" anchor="ctr">
               <a:noAutofit/>
             </a:bodyPr>
             <a:lstStyle/>
@@ -34880,19 +34862,16 @@
           </a:bodyPr>
           <a:lstStyle/>
           <a:p>
-            <a:pPr/>
             <a:r>
               <a:t>Nothing in the connection remembered anything</a:t>
             </a:r>
           </a:p>
           <a:p>
-            <a:pPr/>
             <a:r>
               <a:t>The second call can land on any copy of the server, if what the handle names is stored where every copy can reach</a:t>
             </a:r>
           </a:p>
           <a:p>
-            <a:pPr/>
             <a:r>
               <a:t>Most tools never need this: a search or a lookup stands alone</a:t>
             </a:r>
@@ -35088,7 +35067,7 @@
 </file>
 
 <file path=ppt/slides/slide55.xml><?xml version="1.0" encoding="utf-8"?>
-<p:sld xmlns:a="http://schemas.openxmlformats.org/drawingml/2006/main" xmlns:p="http://schemas.openxmlformats.org/presentationml/2006/main" xmlns:r="http://schemas.openxmlformats.org/officeDocument/2006/relationships">
+<p:sld xmlns:a="http://schemas.openxmlformats.org/drawingml/2006/main" xmlns:r="http://schemas.openxmlformats.org/officeDocument/2006/relationships" xmlns:p="http://schemas.openxmlformats.org/presentationml/2006/main">
   <p:cSld>
     <p:spTree>
       <p:nvGrpSpPr>
@@ -35096,7 +35075,14 @@
         <p:cNvGrpSpPr/>
         <p:nvPr/>
       </p:nvGrpSpPr>
-      <p:grpSpPr/>
+      <p:grpSpPr>
+        <a:xfrm>
+          <a:off x="0" y="0"/>
+          <a:ext cx="0" cy="0"/>
+          <a:chOff x="0" y="0"/>
+          <a:chExt cx="0" cy="0"/>
+        </a:xfrm>
+      </p:grpSpPr>
       <p:sp>
         <p:nvSpPr>
           <p:cNvPr id="2" name="Title 1"/>
@@ -35138,7 +35124,7 @@
         </p:spPr>
         <p:txBody>
           <a:bodyPr>
-            <a:normAutofit fontScale="85000"/>
+            <a:normAutofit fontScale="92500"/>
           </a:bodyPr>
           <a:lstStyle/>
           <a:p>
@@ -35190,7 +35176,7 @@
           </a:fontRef>
         </p:style>
         <p:txBody>
-          <a:bodyPr rtlCol="0" anchor="t" wrap="none" lIns="137160" rIns="137160" tIns="91440" bIns="91440">
+          <a:bodyPr wrap="none" lIns="137160" tIns="91440" rIns="137160" bIns="91440" rtlCol="0" anchor="t">
             <a:noAutofit/>
           </a:bodyPr>
           <a:lstStyle/>
@@ -35506,7 +35492,7 @@
         </p:spPr>
         <p:txBody>
           <a:bodyPr wrap="square">
-            <a:normAutofit fontScale="85000"/>
+            <a:normAutofit lnSpcReduction="10000"/>
           </a:bodyPr>
           <a:lstStyle>
             <a:lvl1pPr marL="228600" indent="-228600" algn="l" defTabSz="914400" rtl="0" eaLnBrk="1" latinLnBrk="0" hangingPunct="1">
@@ -35673,19 +35659,16 @@
             </a:lvl9pPr>
           </a:lstStyle>
           <a:p>
-            <a:pPr/>
             <a:r>
               <a:t>The model reads that like any other result, and can retry or tell the user</a:t>
             </a:r>
           </a:p>
           <a:p>
-            <a:pPr/>
             <a:r>
               <a:t>But "division by zero" does not tell it what to do next</a:t>
             </a:r>
           </a:p>
           <a:p>
-            <a:pPr/>
             <a:r>
               <a:t>Return the failure yourself, in words the model can act on: "b must not be 0"</a:t>
             </a:r>
@@ -35881,7 +35864,7 @@
 </file>
 
 <file path=ppt/slides/slide56.xml><?xml version="1.0" encoding="utf-8"?>
-<p:sld xmlns:a="http://schemas.openxmlformats.org/drawingml/2006/main" xmlns:p="http://schemas.openxmlformats.org/presentationml/2006/main" xmlns:r="http://schemas.openxmlformats.org/officeDocument/2006/relationships">
+<p:sld xmlns:a="http://schemas.openxmlformats.org/drawingml/2006/main" xmlns:r="http://schemas.openxmlformats.org/officeDocument/2006/relationships" xmlns:p="http://schemas.openxmlformats.org/presentationml/2006/main">
   <p:cSld>
     <p:spTree>
       <p:nvGrpSpPr>
@@ -35889,7 +35872,14 @@
         <p:cNvGrpSpPr/>
         <p:nvPr/>
       </p:nvGrpSpPr>
-      <p:grpSpPr/>
+      <p:grpSpPr>
+        <a:xfrm>
+          <a:off x="0" y="0"/>
+          <a:ext cx="0" cy="0"/>
+          <a:chOff x="0" y="0"/>
+          <a:chExt cx="0" cy="0"/>
+        </a:xfrm>
+      </p:grpSpPr>
       <p:sp>
         <p:nvSpPr>
           <p:cNvPr id="2" name="Title 1"/>
@@ -35935,31 +35925,26 @@
           </a:bodyPr>
           <a:lstStyle/>
           <a:p>
-            <a:pPr/>
             <a:r>
               <a:t>Each connected server's whole tool list goes into the model's context before you type a word</a:t>
             </a:r>
           </a:p>
           <a:p>
-            <a:pPr/>
             <a:r>
               <a:t>Anthropic's worked example: an agent spending 150,000 tokens on tool definitions and results, cut to 2,000 by loading tools only when needed</a:t>
             </a:r>
           </a:p>
           <a:p>
-            <a:pPr/>
             <a:r>
               <a:t>VS Code allows at most 128 tools in one chat request</a:t>
             </a:r>
           </a:p>
           <a:p>
-            <a:pPr/>
             <a:r>
               <a:t>So connect the servers the task needs, and switch the rest off</a:t>
             </a:r>
           </a:p>
           <a:p>
-            <a:pPr/>
             <a:r>
               <a:t>More context is not better context</a:t>
             </a:r>
@@ -36253,7 +36238,7 @@
 </file>
 
 <file path=ppt/slides/slide57.xml><?xml version="1.0" encoding="utf-8"?>
-<p:sld xmlns:a="http://schemas.openxmlformats.org/drawingml/2006/main" xmlns:p="http://schemas.openxmlformats.org/presentationml/2006/main" xmlns:r="http://schemas.openxmlformats.org/officeDocument/2006/relationships">
+<p:sld xmlns:a="http://schemas.openxmlformats.org/drawingml/2006/main" xmlns:r="http://schemas.openxmlformats.org/officeDocument/2006/relationships" xmlns:p="http://schemas.openxmlformats.org/presentationml/2006/main">
   <p:cSld>
     <p:spTree>
       <p:nvGrpSpPr>
@@ -36261,7 +36246,14 @@
         <p:cNvGrpSpPr/>
         <p:nvPr/>
       </p:nvGrpSpPr>
-      <p:grpSpPr/>
+      <p:grpSpPr>
+        <a:xfrm>
+          <a:off x="0" y="0"/>
+          <a:ext cx="0" cy="0"/>
+          <a:chOff x="0" y="0"/>
+          <a:chExt cx="0" cy="0"/>
+        </a:xfrm>
+      </p:grpSpPr>
       <p:sp>
         <p:nvSpPr>
           <p:cNvPr id="2" name="Title 1"/>
@@ -36303,7 +36295,7 @@
         </p:spPr>
         <p:txBody>
           <a:bodyPr>
-            <a:normAutofit fontScale="77500"/>
+            <a:normAutofit fontScale="77500" lnSpcReduction="10000"/>
           </a:bodyPr>
           <a:lstStyle/>
           <a:p>
@@ -36355,7 +36347,7 @@
           </a:fontRef>
         </p:style>
         <p:txBody>
-          <a:bodyPr rtlCol="0" anchor="t" wrap="none" lIns="137160" rIns="137160" tIns="91440" bIns="91440">
+          <a:bodyPr wrap="none" lIns="137160" tIns="91440" rIns="137160" bIns="91440" rtlCol="0" anchor="t">
             <a:noAutofit/>
           </a:bodyPr>
           <a:lstStyle/>
@@ -36550,7 +36542,7 @@
         </p:spPr>
         <p:txBody>
           <a:bodyPr wrap="square">
-            <a:normAutofit fontScale="77500"/>
+            <a:normAutofit fontScale="92500" lnSpcReduction="10000"/>
           </a:bodyPr>
           <a:lstStyle>
             <a:lvl1pPr marL="228600" indent="-228600" algn="l" defTabSz="914400" rtl="0" eaLnBrk="1" latinLnBrk="0" hangingPunct="1">
@@ -36717,13 +36709,11 @@
             </a:lvl9pPr>
           </a:lstStyle>
           <a:p>
-            <a:pPr/>
             <a:r>
               <a:t>Read its answer to (3), and the arguments it chose for (1)</a:t>
             </a:r>
           </a:p>
           <a:p>
-            <a:pPr/>
             <a:r>
               <a:t>Then tell it: </a:t>
             </a:r>
@@ -36879,7 +36869,7 @@
 </file>
 
 <file path=ppt/slides/slide58.xml><?xml version="1.0" encoding="utf-8"?>
-<p:sld xmlns:a="http://schemas.openxmlformats.org/drawingml/2006/main" xmlns:p="http://schemas.openxmlformats.org/presentationml/2006/main" xmlns:r="http://schemas.openxmlformats.org/officeDocument/2006/relationships">
+<p:sld xmlns:a="http://schemas.openxmlformats.org/drawingml/2006/main" xmlns:r="http://schemas.openxmlformats.org/officeDocument/2006/relationships" xmlns:p="http://schemas.openxmlformats.org/presentationml/2006/main">
   <p:cSld>
     <p:spTree>
       <p:nvGrpSpPr>
@@ -36887,7 +36877,14 @@
         <p:cNvGrpSpPr/>
         <p:nvPr/>
       </p:nvGrpSpPr>
-      <p:grpSpPr/>
+      <p:grpSpPr>
+        <a:xfrm>
+          <a:off x="0" y="0"/>
+          <a:ext cx="0" cy="0"/>
+          <a:chOff x="0" y="0"/>
+          <a:chExt cx="0" cy="0"/>
+        </a:xfrm>
+      </p:grpSpPr>
       <p:sp>
         <p:nvSpPr>
           <p:cNvPr id="2" name="Title 1"/>
@@ -36929,11 +36926,10 @@
         </p:spPr>
         <p:txBody>
           <a:bodyPr>
-            <a:normAutofit fontScale="92500"/>
+            <a:normAutofit lnSpcReduction="10000"/>
           </a:bodyPr>
           <a:lstStyle/>
           <a:p>
-            <a:pPr/>
             <a:r>
               <a:t>With </a:t>
             </a:r>
@@ -36957,13 +36953,11 @@
             </a:r>
           </a:p>
           <a:p>
-            <a:pPr/>
             <a:r>
               <a:t>No reply asked what the tool could do. A vague description is not treated as a warning</a:t>
             </a:r>
           </a:p>
           <a:p>
-            <a:pPr/>
             <a:r>
               <a:t>The arguments were guesses too: one reply sent the whole sentence, another an </a:t>
             </a:r>
@@ -36975,7 +36969,6 @@
             </a:r>
           </a:p>
           <a:p>
-            <a:pPr/>
             <a:r>
               <a:t>Described precisely, </a:t>
             </a:r>
@@ -36990,7 +36983,6 @@
             </a:r>
           </a:p>
           <a:p>
-            <a:pPr/>
             <a:r>
               <a:rPr b="1"/>
               <a:t>The description is the interface: say what the tool does, and when to use it</a:t>
@@ -37285,7 +37277,7 @@
 </file>
 
 <file path=ppt/slides/slide59.xml><?xml version="1.0" encoding="utf-8"?>
-<p:sld xmlns:a="http://schemas.openxmlformats.org/drawingml/2006/main" xmlns:p="http://schemas.openxmlformats.org/presentationml/2006/main" xmlns:r="http://schemas.openxmlformats.org/officeDocument/2006/relationships">
+<p:sld xmlns:a="http://schemas.openxmlformats.org/drawingml/2006/main" xmlns:r="http://schemas.openxmlformats.org/officeDocument/2006/relationships" xmlns:p="http://schemas.openxmlformats.org/presentationml/2006/main">
   <p:cSld>
     <p:spTree>
       <p:nvGrpSpPr>
@@ -37293,7 +37285,14 @@
         <p:cNvGrpSpPr/>
         <p:nvPr/>
       </p:nvGrpSpPr>
-      <p:grpSpPr/>
+      <p:grpSpPr>
+        <a:xfrm>
+          <a:off x="0" y="0"/>
+          <a:ext cx="0" cy="0"/>
+          <a:chOff x="0" y="0"/>
+          <a:chExt cx="0" cy="0"/>
+        </a:xfrm>
+      </p:grpSpPr>
       <p:sp>
         <p:nvSpPr>
           <p:cNvPr id="2" name="Title 1"/>
@@ -37339,7 +37338,6 @@
           </a:bodyPr>
           <a:lstStyle/>
           <a:p>
-            <a:pPr/>
             <a:r>
               <a:rPr b="1"/>
               <a:t>Read</a:t>
@@ -37349,7 +37347,6 @@
             </a:r>
           </a:p>
           <a:p>
-            <a:pPr/>
             <a:r>
               <a:rPr b="1"/>
               <a:t>Try</a:t>
@@ -37366,7 +37363,6 @@
             </a:r>
           </a:p>
           <a:p>
-            <a:pPr/>
             <a:r>
               <a:rPr b="1"/>
               <a:t>Build</a:t>
@@ -37385,7 +37381,6 @@
             </a:r>
           </a:p>
           <a:p>
-            <a:pPr/>
             <a:r>
               <a:rPr b="1"/>
               <a:t>Test</a:t>
@@ -37395,7 +37390,6 @@
             </a:r>
           </a:p>
           <a:p>
-            <a:pPr/>
             <a:r>
               <a:rPr b="1"/>
               <a:t>Browse</a:t>
@@ -37693,7 +37687,7 @@
 </file>
 
 <file path=ppt/slides/slide6.xml><?xml version="1.0" encoding="utf-8"?>
-<p:sld xmlns:a="http://schemas.openxmlformats.org/drawingml/2006/main" xmlns:p="http://schemas.openxmlformats.org/presentationml/2006/main" xmlns:r="http://schemas.openxmlformats.org/officeDocument/2006/relationships">
+<p:sld xmlns:a="http://schemas.openxmlformats.org/drawingml/2006/main" xmlns:r="http://schemas.openxmlformats.org/officeDocument/2006/relationships" xmlns:p="http://schemas.openxmlformats.org/presentationml/2006/main">
   <p:cSld>
     <p:spTree>
       <p:nvGrpSpPr>
@@ -37701,7 +37695,14 @@
         <p:cNvGrpSpPr/>
         <p:nvPr/>
       </p:nvGrpSpPr>
-      <p:grpSpPr/>
+      <p:grpSpPr>
+        <a:xfrm>
+          <a:off x="0" y="0"/>
+          <a:ext cx="0" cy="0"/>
+          <a:chOff x="0" y="0"/>
+          <a:chExt cx="0" cy="0"/>
+        </a:xfrm>
+      </p:grpSpPr>
       <p:sp>
         <p:nvSpPr>
           <p:cNvPr id="2" name="Title 1"/>
@@ -37732,7 +37733,7 @@
             <a:spLocks noGrp="1"/>
           </p:cNvSpPr>
           <p:nvPr>
-            <p:ph idx="1" sz="half"/>
+            <p:ph sz="half" idx="1"/>
           </p:nvPr>
         </p:nvSpPr>
         <p:spPr>
@@ -37743,40 +37744,45 @@
         </p:spPr>
         <p:txBody>
           <a:bodyPr>
-            <a:normAutofit fontScale="92500"/>
+            <a:normAutofit/>
           </a:bodyPr>
           <a:lstStyle/>
           <a:p>
-            <a:pPr/>
-            <a:r>
+            <a:r>
+              <a:rPr dirty="0"/>
               <a:t>AI models are cut off from your real data</a:t>
             </a:r>
-          </a:p>
-          <a:p>
-            <a:pPr/>
-            <a:r>
+            <a:r>
+              <a:rPr lang="en-US" dirty="0"/>
+              <a:t> – “Brain in a Jar”</a:t>
+            </a:r>
+            <a:endParaRPr dirty="0"/>
+          </a:p>
+          <a:p>
+            <a:r>
+              <a:rPr dirty="0"/>
               <a:t>Each connection needs its own custom code</a:t>
             </a:r>
           </a:p>
           <a:p>
-            <a:pPr/>
-            <a:r>
-              <a:rPr b="1"/>
+            <a:r>
+              <a:rPr b="1" dirty="0"/>
               <a:t>M × N</a:t>
             </a:r>
             <a:r>
+              <a:rPr dirty="0"/>
               <a:t>: M applications times N systems</a:t>
             </a:r>
           </a:p>
           <a:p>
-            <a:pPr/>
-            <a:r>
+            <a:r>
+              <a:rPr dirty="0"/>
               <a:t>Slow to build, hard to maintain</a:t>
             </a:r>
           </a:p>
           <a:p>
-            <a:pPr/>
-            <a:r>
+            <a:r>
+              <a:rPr dirty="0"/>
               <a:t>Every connector breaks in its own way</a:t>
             </a:r>
           </a:p>
@@ -37813,7 +37819,7 @@
             <a:noFill/>
           </p:spPr>
           <p:txBody>
-            <a:bodyPr wrap="square" anchor="ctr" lIns="27432" rIns="27432" tIns="0" bIns="0">
+            <a:bodyPr wrap="square" lIns="27432" tIns="0" rIns="27432" bIns="0" anchor="ctr">
               <a:noAutofit/>
             </a:bodyPr>
             <a:lstStyle/>
@@ -37847,7 +37853,7 @@
             <a:noFill/>
           </p:spPr>
           <p:txBody>
-            <a:bodyPr wrap="square" anchor="ctr" lIns="27432" rIns="27432" tIns="0" bIns="0">
+            <a:bodyPr wrap="square" lIns="27432" tIns="0" rIns="27432" bIns="0" anchor="ctr">
               <a:noAutofit/>
             </a:bodyPr>
             <a:lstStyle/>
@@ -37905,7 +37911,7 @@
             </a:fontRef>
           </p:style>
           <p:txBody>
-            <a:bodyPr rtlCol="0" anchor="ctr" wrap="square">
+            <a:bodyPr wrap="square" rtlCol="0" anchor="ctr">
               <a:noAutofit/>
             </a:bodyPr>
             <a:lstStyle/>
@@ -37963,7 +37969,7 @@
             </a:fontRef>
           </p:style>
           <p:txBody>
-            <a:bodyPr rtlCol="0" anchor="ctr" wrap="square">
+            <a:bodyPr wrap="square" rtlCol="0" anchor="ctr">
               <a:noAutofit/>
             </a:bodyPr>
             <a:lstStyle/>
@@ -38021,7 +38027,7 @@
             </a:fontRef>
           </p:style>
           <p:txBody>
-            <a:bodyPr rtlCol="0" anchor="ctr" wrap="square">
+            <a:bodyPr wrap="square" rtlCol="0" anchor="ctr">
               <a:noAutofit/>
             </a:bodyPr>
             <a:lstStyle/>
@@ -38079,7 +38085,7 @@
             </a:fontRef>
           </p:style>
           <p:txBody>
-            <a:bodyPr rtlCol="0" anchor="ctr" wrap="square">
+            <a:bodyPr wrap="square" rtlCol="0" anchor="ctr">
               <a:noAutofit/>
             </a:bodyPr>
             <a:lstStyle/>
@@ -38137,7 +38143,7 @@
             </a:fontRef>
           </p:style>
           <p:txBody>
-            <a:bodyPr rtlCol="0" anchor="ctr" wrap="square">
+            <a:bodyPr wrap="square" rtlCol="0" anchor="ctr">
               <a:noAutofit/>
             </a:bodyPr>
             <a:lstStyle/>
@@ -38195,7 +38201,7 @@
             </a:fontRef>
           </p:style>
           <p:txBody>
-            <a:bodyPr rtlCol="0" anchor="ctr" wrap="square">
+            <a:bodyPr wrap="square" rtlCol="0" anchor="ctr">
               <a:noAutofit/>
             </a:bodyPr>
             <a:lstStyle/>
@@ -38580,7 +38586,7 @@
             <a:noFill/>
           </p:spPr>
           <p:txBody>
-            <a:bodyPr wrap="square" anchor="ctr" lIns="27432" rIns="27432" tIns="0" bIns="0">
+            <a:bodyPr wrap="square" lIns="27432" tIns="0" rIns="27432" bIns="0" anchor="ctr">
               <a:noAutofit/>
             </a:bodyPr>
             <a:lstStyle/>
@@ -38885,7 +38891,7 @@
 </file>
 
 <file path=ppt/slides/slide60.xml><?xml version="1.0" encoding="utf-8"?>
-<p:sld xmlns:a="http://schemas.openxmlformats.org/drawingml/2006/main" xmlns:p="http://schemas.openxmlformats.org/presentationml/2006/main" xmlns:r="http://schemas.openxmlformats.org/officeDocument/2006/relationships">
+<p:sld xmlns:a="http://schemas.openxmlformats.org/drawingml/2006/main" xmlns:r="http://schemas.openxmlformats.org/officeDocument/2006/relationships" xmlns:p="http://schemas.openxmlformats.org/presentationml/2006/main">
   <p:cSld>
     <p:spTree>
       <p:nvGrpSpPr>
@@ -38893,7 +38899,14 @@
         <p:cNvGrpSpPr/>
         <p:nvPr/>
       </p:nvGrpSpPr>
-      <p:grpSpPr/>
+      <p:grpSpPr>
+        <a:xfrm>
+          <a:off x="0" y="0"/>
+          <a:ext cx="0" cy="0"/>
+          <a:chOff x="0" y="0"/>
+          <a:chExt cx="0" cy="0"/>
+        </a:xfrm>
+      </p:grpSpPr>
       <p:sp>
         <p:nvSpPr>
           <p:cNvPr id="2" name="Title 1"/>
@@ -38945,7 +38958,7 @@
             <a:spLocks noGrp="1"/>
           </p:cNvSpPr>
           <p:nvPr>
-            <p:ph idx="2" sz="half"/>
+            <p:ph sz="half" idx="2"/>
           </p:nvPr>
         </p:nvSpPr>
         <p:spPr>
@@ -38956,35 +38969,30 @@
         </p:spPr>
         <p:txBody>
           <a:bodyPr>
-            <a:normAutofit fontScale="77500"/>
+            <a:normAutofit fontScale="92500" lnSpcReduction="20000"/>
           </a:bodyPr>
           <a:lstStyle/>
           <a:p>
-            <a:pPr/>
             <a:r>
               <a:t>A name and description that say nothing, then wondering why another tool is called</a:t>
             </a:r>
           </a:p>
           <a:p>
-            <a:pPr/>
             <a:r>
               <a:t>A vague one, then wondering why it is called for the wrong things</a:t>
             </a:r>
           </a:p>
           <a:p>
-            <a:pPr/>
             <a:r>
               <a:t>A tool added to the listing but not to the handler</a:t>
             </a:r>
           </a:p>
           <a:p>
-            <a:pPr/>
             <a:r>
               <a:t>Printing to stdout in a stdio server</a:t>
             </a:r>
           </a:p>
           <a:p>
-            <a:pPr/>
             <a:r>
               <a:t>An error message the model cannot act on</a:t>
             </a:r>
@@ -38998,7 +39006,7 @@
             <a:spLocks noGrp="1"/>
           </p:cNvSpPr>
           <p:nvPr>
-            <p:ph type="body" idx="3" sz="quarter"/>
+            <p:ph type="body" sz="quarter" idx="3"/>
           </p:nvPr>
         </p:nvSpPr>
         <p:spPr/>
@@ -39019,7 +39027,7 @@
             <a:spLocks noGrp="1"/>
           </p:cNvSpPr>
           <p:nvPr>
-            <p:ph idx="4" sz="quarter"/>
+            <p:ph sz="quarter" idx="4"/>
           </p:nvPr>
         </p:nvSpPr>
         <p:spPr>
@@ -39030,35 +39038,30 @@
         </p:spPr>
         <p:txBody>
           <a:bodyPr>
-            <a:normAutofit fontScale="77500"/>
+            <a:normAutofit fontScale="92500" lnSpcReduction="20000"/>
           </a:bodyPr>
           <a:lstStyle/>
           <a:p>
-            <a:pPr/>
             <a:r>
               <a:t>Assuming the model runs tools itself</a:t>
             </a:r>
           </a:p>
           <a:p>
-            <a:pPr/>
             <a:r>
               <a:t>Assuming the model will refuse a dangerous call</a:t>
             </a:r>
           </a:p>
           <a:p>
-            <a:pPr/>
             <a:r>
               <a:t>Installing a server without reading what it does</a:t>
             </a:r>
           </a:p>
           <a:p>
-            <a:pPr/>
             <a:r>
               <a:t>Giving a server more access than the job needs</a:t>
             </a:r>
           </a:p>
           <a:p>
-            <a:pPr/>
             <a:r>
               <a:t>Treating tool output as trusted</a:t>
             </a:r>
@@ -39598,7 +39601,7 @@
 </file>
 
 <file path=ppt/slides/slide61.xml><?xml version="1.0" encoding="utf-8"?>
-<p:sld xmlns:a="http://schemas.openxmlformats.org/drawingml/2006/main" xmlns:p="http://schemas.openxmlformats.org/presentationml/2006/main" xmlns:r="http://schemas.openxmlformats.org/officeDocument/2006/relationships">
+<p:sld xmlns:a="http://schemas.openxmlformats.org/drawingml/2006/main" xmlns:r="http://schemas.openxmlformats.org/officeDocument/2006/relationships" xmlns:p="http://schemas.openxmlformats.org/presentationml/2006/main">
   <p:cSld>
     <p:spTree>
       <p:nvGrpSpPr>
@@ -39606,7 +39609,14 @@
         <p:cNvGrpSpPr/>
         <p:nvPr/>
       </p:nvGrpSpPr>
-      <p:grpSpPr/>
+      <p:grpSpPr>
+        <a:xfrm>
+          <a:off x="0" y="0"/>
+          <a:ext cx="0" cy="0"/>
+          <a:chOff x="0" y="0"/>
+          <a:chExt cx="0" cy="0"/>
+        </a:xfrm>
+      </p:grpSpPr>
       <p:sp>
         <p:nvSpPr>
           <p:cNvPr id="2" name="Title 1"/>
@@ -39648,35 +39658,30 @@
         </p:spPr>
         <p:txBody>
           <a:bodyPr>
-            <a:normAutofit fontScale="92500"/>
+            <a:normAutofit/>
           </a:bodyPr>
           <a:lstStyle/>
           <a:p>
-            <a:pPr/>
             <a:r>
               <a:t>MCP: one protocol between AI applications and tools, turning M × N connectors into M + N</a:t>
             </a:r>
           </a:p>
           <a:p>
-            <a:pPr/>
             <a:r>
               <a:t>A host holds clients; servers offer tools, resources and prompts</a:t>
             </a:r>
           </a:p>
           <a:p>
-            <a:pPr/>
             <a:r>
               <a:t>JSON-RPC 2.0 messages, over stdio for local servers and Streamable HTTP for remote ones</a:t>
             </a:r>
           </a:p>
           <a:p>
-            <a:pPr/>
             <a:r>
               <a:t>The model only asks. The client decides and the server acts, so those two are the boundary</a:t>
             </a:r>
           </a:p>
           <a:p>
-            <a:pPr/>
             <a:r>
               <a:t>2026: no sessions. Every request stands alone, and state travels as a handle</a:t>
             </a:r>
@@ -39970,7 +39975,7 @@
 </file>
 
 <file path=ppt/slides/slide7.xml><?xml version="1.0" encoding="utf-8"?>
-<p:sld xmlns:a="http://schemas.openxmlformats.org/drawingml/2006/main" xmlns:p="http://schemas.openxmlformats.org/presentationml/2006/main" xmlns:r="http://schemas.openxmlformats.org/officeDocument/2006/relationships">
+<p:sld xmlns:a="http://schemas.openxmlformats.org/drawingml/2006/main" xmlns:r="http://schemas.openxmlformats.org/officeDocument/2006/relationships" xmlns:p="http://schemas.openxmlformats.org/presentationml/2006/main">
   <p:cSld>
     <p:spTree>
       <p:nvGrpSpPr>
@@ -39978,7 +39983,14 @@
         <p:cNvGrpSpPr/>
         <p:nvPr/>
       </p:nvGrpSpPr>
-      <p:grpSpPr/>
+      <p:grpSpPr>
+        <a:xfrm>
+          <a:off x="0" y="0"/>
+          <a:ext cx="0" cy="0"/>
+          <a:chOff x="0" y="0"/>
+          <a:chExt cx="0" cy="0"/>
+        </a:xfrm>
+      </p:grpSpPr>
       <p:sp>
         <p:nvSpPr>
           <p:cNvPr id="2" name="Title 1"/>
@@ -40009,7 +40021,7 @@
             <a:spLocks noGrp="1"/>
           </p:cNvSpPr>
           <p:nvPr>
-            <p:ph idx="1" sz="half"/>
+            <p:ph sz="half" idx="1"/>
           </p:nvPr>
         </p:nvSpPr>
         <p:spPr>
@@ -40020,17 +40032,15 @@
         </p:spPr>
         <p:txBody>
           <a:bodyPr>
-            <a:normAutofit fontScale="92500"/>
+            <a:normAutofit lnSpcReduction="10000"/>
           </a:bodyPr>
           <a:lstStyle/>
           <a:p>
-            <a:pPr/>
             <a:r>
               <a:t>One standard protocol for every connection</a:t>
             </a:r>
           </a:p>
           <a:p>
-            <a:pPr/>
             <a:r>
               <a:rPr b="1"/>
               <a:t>M + N</a:t>
@@ -40044,19 +40054,16 @@
             </a:r>
           </a:p>
           <a:p>
-            <a:pPr/>
             <a:r>
               <a:t>Plug and play: any client works with any server</a:t>
             </a:r>
           </a:p>
           <a:p>
-            <a:pPr/>
             <a:r>
               <a:t>Build a server once; every AI application can use it</a:t>
             </a:r>
           </a:p>
           <a:p>
-            <a:pPr/>
             <a:r>
               <a:t>Open source, and run by a community</a:t>
             </a:r>
@@ -40094,7 +40101,7 @@
             <a:noFill/>
           </p:spPr>
           <p:txBody>
-            <a:bodyPr wrap="square" anchor="ctr" lIns="27432" rIns="27432" tIns="0" bIns="0">
+            <a:bodyPr wrap="square" lIns="27432" tIns="0" rIns="27432" bIns="0" anchor="ctr">
               <a:noAutofit/>
             </a:bodyPr>
             <a:lstStyle/>
@@ -40128,7 +40135,7 @@
             <a:noFill/>
           </p:spPr>
           <p:txBody>
-            <a:bodyPr wrap="square" anchor="ctr" lIns="27432" rIns="27432" tIns="0" bIns="0">
+            <a:bodyPr wrap="square" lIns="27432" tIns="0" rIns="27432" bIns="0" anchor="ctr">
               <a:noAutofit/>
             </a:bodyPr>
             <a:lstStyle/>
@@ -40186,7 +40193,7 @@
             </a:fontRef>
           </p:style>
           <p:txBody>
-            <a:bodyPr rtlCol="0" anchor="ctr" wrap="square">
+            <a:bodyPr wrap="square" rtlCol="0" anchor="ctr">
               <a:noAutofit/>
             </a:bodyPr>
             <a:lstStyle/>
@@ -40244,7 +40251,7 @@
             </a:fontRef>
           </p:style>
           <p:txBody>
-            <a:bodyPr rtlCol="0" anchor="ctr" wrap="square">
+            <a:bodyPr wrap="square" rtlCol="0" anchor="ctr">
               <a:noAutofit/>
             </a:bodyPr>
             <a:lstStyle/>
@@ -40302,7 +40309,7 @@
             </a:fontRef>
           </p:style>
           <p:txBody>
-            <a:bodyPr rtlCol="0" anchor="ctr" wrap="square">
+            <a:bodyPr wrap="square" rtlCol="0" anchor="ctr">
               <a:noAutofit/>
             </a:bodyPr>
             <a:lstStyle/>
@@ -40360,7 +40367,7 @@
             </a:fontRef>
           </p:style>
           <p:txBody>
-            <a:bodyPr rtlCol="0" anchor="ctr" wrap="square">
+            <a:bodyPr wrap="square" rtlCol="0" anchor="ctr">
               <a:noAutofit/>
             </a:bodyPr>
             <a:lstStyle/>
@@ -40418,7 +40425,7 @@
             </a:fontRef>
           </p:style>
           <p:txBody>
-            <a:bodyPr rtlCol="0" anchor="ctr" wrap="square">
+            <a:bodyPr wrap="square" rtlCol="0" anchor="ctr">
               <a:noAutofit/>
             </a:bodyPr>
             <a:lstStyle/>
@@ -40476,7 +40483,7 @@
             </a:fontRef>
           </p:style>
           <p:txBody>
-            <a:bodyPr rtlCol="0" anchor="ctr" wrap="square">
+            <a:bodyPr wrap="square" rtlCol="0" anchor="ctr">
               <a:noAutofit/>
             </a:bodyPr>
             <a:lstStyle/>
@@ -40534,7 +40541,7 @@
             </a:fontRef>
           </p:style>
           <p:txBody>
-            <a:bodyPr rtlCol="0" anchor="ctr" wrap="square">
+            <a:bodyPr wrap="square" rtlCol="0" anchor="ctr">
               <a:noAutofit/>
             </a:bodyPr>
             <a:lstStyle/>
@@ -40814,7 +40821,7 @@
             <a:noFill/>
           </p:spPr>
           <p:txBody>
-            <a:bodyPr wrap="square" anchor="ctr" lIns="27432" rIns="27432" tIns="0" bIns="0">
+            <a:bodyPr wrap="square" lIns="27432" tIns="0" rIns="27432" bIns="0" anchor="ctr">
               <a:noAutofit/>
             </a:bodyPr>
             <a:lstStyle/>
@@ -41119,7 +41126,7 @@
 </file>
 
 <file path=ppt/slides/slide8.xml><?xml version="1.0" encoding="utf-8"?>
-<p:sld xmlns:a="http://schemas.openxmlformats.org/drawingml/2006/main" xmlns:p="http://schemas.openxmlformats.org/presentationml/2006/main" xmlns:r="http://schemas.openxmlformats.org/officeDocument/2006/relationships">
+<p:sld xmlns:a="http://schemas.openxmlformats.org/drawingml/2006/main" xmlns:r="http://schemas.openxmlformats.org/officeDocument/2006/relationships" xmlns:p="http://schemas.openxmlformats.org/presentationml/2006/main">
   <p:cSld>
     <p:spTree>
       <p:nvGrpSpPr>
@@ -41127,7 +41134,14 @@
         <p:cNvGrpSpPr/>
         <p:nvPr/>
       </p:nvGrpSpPr>
-      <p:grpSpPr/>
+      <p:grpSpPr>
+        <a:xfrm>
+          <a:off x="0" y="0"/>
+          <a:ext cx="0" cy="0"/>
+          <a:chOff x="0" y="0"/>
+          <a:chExt cx="0" cy="0"/>
+        </a:xfrm>
+      </p:grpSpPr>
       <p:sp>
         <p:nvSpPr>
           <p:cNvPr id="2" name="Title 1"/>
@@ -41173,33 +41187,35 @@
           </a:bodyPr>
           <a:lstStyle/>
           <a:p>
-            <a:pPr/>
-            <a:r>
+            <a:r>
+              <a:rPr dirty="0"/>
               <a:t>USB-C: one port, and any device plugs into any computer</a:t>
             </a:r>
           </a:p>
           <a:p>
-            <a:pPr/>
-            <a:r>
+            <a:r>
+              <a:rPr dirty="0"/>
               <a:t>ODBC: one driver interface, and any program reads any database</a:t>
             </a:r>
           </a:p>
           <a:p>
-            <a:pPr/>
-            <a:r>
+            <a:r>
+              <a:rPr dirty="0"/>
               <a:t>The Language Server Protocol: one protocol, and any editor understands any language</a:t>
             </a:r>
           </a:p>
           <a:p>
-            <a:pPr/>
             <a:r>
               <a:t>MCP's own specification says it "takes some inspiration from the Language Server Protocol"</a:t>
             </a:r>
-          </a:p>
-          <a:p>
-            <a:pPr/>
-            <a:r>
-              <a:rPr b="1"/>
+            <a:endParaRPr lang="en-US"/>
+          </a:p>
+          <a:p>
+            <a:endParaRPr/>
+          </a:p>
+          <a:p>
+            <a:r>
+              <a:rPr b="1" dirty="0"/>
               <a:t>Think of MCP as the USB-C port for AI applications</a:t>
             </a:r>
           </a:p>
@@ -41442,7 +41458,7 @@
                                         <p:tgtEl>
                                           <p:spTgt spid="3">
                                             <p:txEl>
-                                              <p:pRg st="4" end="4"/>
+                                              <p:pRg st="5" end="5"/>
                                             </p:txEl>
                                           </p:spTgt>
                                         </p:tgtEl>
@@ -41492,7 +41508,7 @@
 </file>
 
 <file path=ppt/slides/slide9.xml><?xml version="1.0" encoding="utf-8"?>
-<p:sld xmlns:a="http://schemas.openxmlformats.org/drawingml/2006/main" xmlns:p="http://schemas.openxmlformats.org/presentationml/2006/main" xmlns:r="http://schemas.openxmlformats.org/officeDocument/2006/relationships">
+<p:sld xmlns:a="http://schemas.openxmlformats.org/drawingml/2006/main" xmlns:r="http://schemas.openxmlformats.org/officeDocument/2006/relationships" xmlns:p="http://schemas.openxmlformats.org/presentationml/2006/main">
   <p:cSld>
     <p:spTree>
       <p:nvGrpSpPr>
@@ -41500,7 +41516,14 @@
         <p:cNvGrpSpPr/>
         <p:nvPr/>
       </p:nvGrpSpPr>
-      <p:grpSpPr/>
+      <p:grpSpPr>
+        <a:xfrm>
+          <a:off x="0" y="0"/>
+          <a:ext cx="0" cy="0"/>
+          <a:chOff x="0" y="0"/>
+          <a:chExt cx="0" cy="0"/>
+        </a:xfrm>
+      </p:grpSpPr>
       <p:sp>
         <p:nvSpPr>
           <p:cNvPr id="2" name="Title 1"/>
@@ -41546,7 +41569,6 @@
           </a:bodyPr>
           <a:lstStyle/>
           <a:p>
-            <a:pPr/>
             <a:r>
               <a:rPr b="1"/>
               <a:t>Host</a:t>
@@ -41568,7 +41590,6 @@
             </a:r>
           </a:p>
           <a:p>
-            <a:pPr/>
             <a:r>
               <a:rPr b="1"/>
               <a:t>Client</a:t>
@@ -41584,7 +41605,6 @@
             </a:r>
           </a:p>
           <a:p>
-            <a:pPr/>
             <a:r>
               <a:rPr b="1"/>
               <a:t>Server</a:t>
